--- a/slides/0_intro.pptx
+++ b/slides/0_intro.pptx
@@ -10,14 +10,14 @@
   <p:sldIdLst>
     <p:sldId id="256" r:id="rId2"/>
     <p:sldId id="265" r:id="rId3"/>
-    <p:sldId id="262" r:id="rId4"/>
-    <p:sldId id="268" r:id="rId5"/>
-    <p:sldId id="266" r:id="rId6"/>
-    <p:sldId id="273" r:id="rId7"/>
-    <p:sldId id="269" r:id="rId8"/>
-    <p:sldId id="274" r:id="rId9"/>
-    <p:sldId id="271" r:id="rId10"/>
-    <p:sldId id="270" r:id="rId11"/>
+    <p:sldId id="266" r:id="rId4"/>
+    <p:sldId id="273" r:id="rId5"/>
+    <p:sldId id="262" r:id="rId6"/>
+    <p:sldId id="268" r:id="rId7"/>
+    <p:sldId id="258" r:id="rId8"/>
+    <p:sldId id="269" r:id="rId9"/>
+    <p:sldId id="274" r:id="rId10"/>
+    <p:sldId id="271" r:id="rId11"/>
     <p:sldId id="272" r:id="rId12"/>
   </p:sldIdLst>
   <p:sldSz cx="12192000" cy="6858000"/>
@@ -489,7 +489,7 @@
           <a:p>
             <a:fld id="{506E0FD1-891F-4B1E-916D-E9B585160BB8}" type="datetimeFigureOut">
               <a:rPr lang="en-GB" smtClean="0"/>
-              <a:t>11/01/2026</a:t>
+              <a:t>05/03/2026</a:t>
             </a:fld>
             <a:endParaRPr lang="en-GB"/>
           </a:p>
@@ -757,90 +757,6 @@
 </p:notesMaster>
 </file>
 
-<file path=ppt/notesSlides/notesSlide1.xml><?xml version="1.0" encoding="utf-8"?>
-<p:notes xmlns:a="http://schemas.openxmlformats.org/drawingml/2006/main" xmlns:r="http://schemas.openxmlformats.org/officeDocument/2006/relationships" xmlns:p="http://schemas.openxmlformats.org/presentationml/2006/main">
-  <p:cSld>
-    <p:spTree>
-      <p:nvGrpSpPr>
-        <p:cNvPr id="1" name=""/>
-        <p:cNvGrpSpPr/>
-        <p:nvPr/>
-      </p:nvGrpSpPr>
-      <p:grpSpPr>
-        <a:xfrm>
-          <a:off x="0" y="0"/>
-          <a:ext cx="0" cy="0"/>
-          <a:chOff x="0" y="0"/>
-          <a:chExt cx="0" cy="0"/>
-        </a:xfrm>
-      </p:grpSpPr>
-      <p:sp>
-        <p:nvSpPr>
-          <p:cNvPr id="2" name="Slide Image Placeholder 1"/>
-          <p:cNvSpPr>
-            <a:spLocks noGrp="1" noRot="1" noChangeAspect="1"/>
-          </p:cNvSpPr>
-          <p:nvPr>
-            <p:ph type="sldImg"/>
-          </p:nvPr>
-        </p:nvSpPr>
-        <p:spPr/>
-      </p:sp>
-      <p:sp>
-        <p:nvSpPr>
-          <p:cNvPr id="3" name="Notes Placeholder 2"/>
-          <p:cNvSpPr>
-            <a:spLocks noGrp="1"/>
-          </p:cNvSpPr>
-          <p:nvPr>
-            <p:ph type="body" idx="1"/>
-          </p:nvPr>
-        </p:nvSpPr>
-        <p:spPr/>
-        <p:txBody>
-          <a:bodyPr/>
-          <a:lstStyle/>
-          <a:p>
-            <a:endParaRPr lang="en-GB" dirty="0"/>
-          </a:p>
-        </p:txBody>
-      </p:sp>
-      <p:sp>
-        <p:nvSpPr>
-          <p:cNvPr id="4" name="Slide Number Placeholder 3"/>
-          <p:cNvSpPr>
-            <a:spLocks noGrp="1"/>
-          </p:cNvSpPr>
-          <p:nvPr>
-            <p:ph type="sldNum" sz="quarter" idx="5"/>
-          </p:nvPr>
-        </p:nvSpPr>
-        <p:spPr/>
-        <p:txBody>
-          <a:bodyPr/>
-          <a:lstStyle/>
-          <a:p>
-            <a:fld id="{E5C76E5F-9D68-4973-8A2A-59949176DA9A}" type="slidenum">
-              <a:rPr lang="en-GB" smtClean="0"/>
-              <a:t>10</a:t>
-            </a:fld>
-            <a:endParaRPr lang="en-GB"/>
-          </a:p>
-        </p:txBody>
-      </p:sp>
-    </p:spTree>
-    <p:extLst>
-      <p:ext uri="{BB962C8B-B14F-4D97-AF65-F5344CB8AC3E}">
-        <p14:creationId xmlns:p14="http://schemas.microsoft.com/office/powerpoint/2010/main" val="1663140543"/>
-      </p:ext>
-    </p:extLst>
-  </p:cSld>
-  <p:clrMapOvr>
-    <a:masterClrMapping/>
-  </p:clrMapOvr>
-</p:notes>
-</file>
-
 <file path=ppt/slideLayouts/slideLayout1.xml><?xml version="1.0" encoding="utf-8"?>
 <p:sldLayout xmlns:a="http://schemas.openxmlformats.org/drawingml/2006/main" xmlns:r="http://schemas.openxmlformats.org/officeDocument/2006/relationships" xmlns:p="http://schemas.openxmlformats.org/presentationml/2006/main" type="title" preserve="1">
   <p:cSld name="Title Slide">
@@ -990,7 +906,7 @@
           <a:p>
             <a:fld id="{D68C3F22-27B2-44E3-9C5F-D08126455F6F}" type="datetime1">
               <a:rPr lang="en-GB" smtClean="0"/>
-              <a:t>11/01/2026</a:t>
+              <a:t>05/03/2026</a:t>
             </a:fld>
             <a:endParaRPr lang="en-GB"/>
           </a:p>
@@ -1190,7 +1106,7 @@
           <a:p>
             <a:fld id="{1CD03846-7BF6-4FB6-A921-FF3379ADBD4C}" type="datetime1">
               <a:rPr lang="en-GB" smtClean="0"/>
-              <a:t>11/01/2026</a:t>
+              <a:t>05/03/2026</a:t>
             </a:fld>
             <a:endParaRPr lang="en-GB"/>
           </a:p>
@@ -1400,7 +1316,7 @@
           <a:p>
             <a:fld id="{99E1B91A-3FD0-4144-9C84-63E9688ED2FE}" type="datetime1">
               <a:rPr lang="en-GB" smtClean="0"/>
-              <a:t>11/01/2026</a:t>
+              <a:t>05/03/2026</a:t>
             </a:fld>
             <a:endParaRPr lang="en-GB"/>
           </a:p>
@@ -1600,7 +1516,7 @@
           <a:p>
             <a:fld id="{5295ED7B-FEAD-4734-819F-93EF4B0EA908}" type="datetime1">
               <a:rPr lang="en-GB" smtClean="0"/>
-              <a:t>11/01/2026</a:t>
+              <a:t>05/03/2026</a:t>
             </a:fld>
             <a:endParaRPr lang="en-GB"/>
           </a:p>
@@ -1876,7 +1792,7 @@
           <a:p>
             <a:fld id="{D2D5D4B4-C926-4B45-8815-1ED8911179A2}" type="datetime1">
               <a:rPr lang="en-GB" smtClean="0"/>
-              <a:t>11/01/2026</a:t>
+              <a:t>05/03/2026</a:t>
             </a:fld>
             <a:endParaRPr lang="en-GB"/>
           </a:p>
@@ -2144,7 +2060,7 @@
           <a:p>
             <a:fld id="{B4C5210A-0E37-4935-93AF-69F21A5F712F}" type="datetime1">
               <a:rPr lang="en-GB" smtClean="0"/>
-              <a:t>11/01/2026</a:t>
+              <a:t>05/03/2026</a:t>
             </a:fld>
             <a:endParaRPr lang="en-GB"/>
           </a:p>
@@ -2559,7 +2475,7 @@
           <a:p>
             <a:fld id="{3D3A6B2F-436C-4691-80E8-9C890E000E9D}" type="datetime1">
               <a:rPr lang="en-GB" smtClean="0"/>
-              <a:t>11/01/2026</a:t>
+              <a:t>05/03/2026</a:t>
             </a:fld>
             <a:endParaRPr lang="en-GB"/>
           </a:p>
@@ -2701,7 +2617,7 @@
           <a:p>
             <a:fld id="{84385F4C-D74B-496F-8D21-97E3549C783B}" type="datetime1">
               <a:rPr lang="en-GB" smtClean="0"/>
-              <a:t>11/01/2026</a:t>
+              <a:t>05/03/2026</a:t>
             </a:fld>
             <a:endParaRPr lang="en-GB"/>
           </a:p>
@@ -2814,7 +2730,7 @@
           <a:p>
             <a:fld id="{0CBDCB32-C241-4703-A832-4EB47BD54E83}" type="datetime1">
               <a:rPr lang="en-GB" smtClean="0"/>
-              <a:t>11/01/2026</a:t>
+              <a:t>05/03/2026</a:t>
             </a:fld>
             <a:endParaRPr lang="en-GB"/>
           </a:p>
@@ -3127,7 +3043,7 @@
           <a:p>
             <a:fld id="{85C150FF-BE95-4D25-A16A-E368A81CBF24}" type="datetime1">
               <a:rPr lang="en-GB" smtClean="0"/>
-              <a:t>11/01/2026</a:t>
+              <a:t>05/03/2026</a:t>
             </a:fld>
             <a:endParaRPr lang="en-GB"/>
           </a:p>
@@ -3416,7 +3332,7 @@
           <a:p>
             <a:fld id="{F3C5DB4B-B349-43C9-A424-BADA723AD9F1}" type="datetime1">
               <a:rPr lang="en-GB" smtClean="0"/>
-              <a:t>11/01/2026</a:t>
+              <a:t>05/03/2026</a:t>
             </a:fld>
             <a:endParaRPr lang="en-GB"/>
           </a:p>
@@ -3659,7 +3575,7 @@
           <a:p>
             <a:fld id="{12632426-0A0C-405F-A3D0-2D11AA44702A}" type="datetime1">
               <a:rPr lang="en-GB" smtClean="0"/>
-              <a:t>11/01/2026</a:t>
+              <a:t>05/03/2026</a:t>
             </a:fld>
             <a:endParaRPr lang="en-GB"/>
           </a:p>
@@ -4168,7 +4084,7 @@
           <p:cNvPr id="2" name="Title 1">
             <a:extLst>
               <a:ext uri="{FF2B5EF4-FFF2-40B4-BE49-F238E27FC236}">
-                <a16:creationId xmlns:a16="http://schemas.microsoft.com/office/drawing/2014/main" id="{5CFF9571-C6ED-CFC8-29FD-1B24BD4B2A10}"/>
+                <a16:creationId xmlns:a16="http://schemas.microsoft.com/office/drawing/2014/main" id="{287931D7-F116-6FF9-9B2A-660AE0271642}"/>
               </a:ext>
             </a:extLst>
           </p:cNvPr>
@@ -4186,7 +4102,123 @@
           <a:p>
             <a:r>
               <a:rPr lang="en-GB" dirty="0"/>
-              <a:t>Deep Learning</a:t>
+              <a:t>Programming Environments</a:t>
+            </a:r>
+          </a:p>
+        </p:txBody>
+      </p:sp>
+      <p:sp>
+        <p:nvSpPr>
+          <p:cNvPr id="3" name="Content Placeholder 2">
+            <a:extLst>
+              <a:ext uri="{FF2B5EF4-FFF2-40B4-BE49-F238E27FC236}">
+                <a16:creationId xmlns:a16="http://schemas.microsoft.com/office/drawing/2014/main" id="{C612A4C1-FFFD-3C44-E2CA-D30093EF744E}"/>
+              </a:ext>
+            </a:extLst>
+          </p:cNvPr>
+          <p:cNvSpPr>
+            <a:spLocks noGrp="1"/>
+          </p:cNvSpPr>
+          <p:nvPr>
+            <p:ph idx="1"/>
+          </p:nvPr>
+        </p:nvSpPr>
+        <p:spPr/>
+        <p:txBody>
+          <a:bodyPr/>
+          <a:lstStyle/>
+          <a:p>
+            <a:pPr marL="0" indent="0">
+              <a:buNone/>
+            </a:pPr>
+            <a:r>
+              <a:rPr lang="en-GB" dirty="0"/>
+              <a:t>locally, best use</a:t>
+            </a:r>
+          </a:p>
+          <a:p>
+            <a:r>
+              <a:rPr lang="en-GB" dirty="0"/>
+              <a:t>a virtual environment to flexibly install packages (e.g., </a:t>
+            </a:r>
+            <a:r>
+              <a:rPr lang="en-GB" dirty="0" err="1">
+                <a:hlinkClick r:id="rId2"/>
+              </a:rPr>
+              <a:t>venv</a:t>
+            </a:r>
+            <a:r>
+              <a:rPr lang="en-GB" dirty="0"/>
+              <a:t>)</a:t>
+            </a:r>
+          </a:p>
+          <a:p>
+            <a:r>
+              <a:rPr lang="en-GB" dirty="0"/>
+              <a:t>an IDE of your choice (e.g., </a:t>
+            </a:r>
+            <a:r>
+              <a:rPr lang="en-GB" dirty="0">
+                <a:hlinkClick r:id="rId3"/>
+              </a:rPr>
+              <a:t>VS Code</a:t>
+            </a:r>
+            <a:r>
+              <a:rPr lang="en-GB" dirty="0"/>
+              <a:t>)</a:t>
+            </a:r>
+          </a:p>
+          <a:p>
+            <a:r>
+              <a:rPr lang="en-GB" dirty="0"/>
+              <a:t>both plain Python files or </a:t>
+            </a:r>
+            <a:r>
+              <a:rPr lang="en-GB" dirty="0" err="1">
+                <a:hlinkClick r:id="rId4"/>
+              </a:rPr>
+              <a:t>Jupyter</a:t>
+            </a:r>
+            <a:r>
+              <a:rPr lang="en-GB" dirty="0">
+                <a:hlinkClick r:id="rId4"/>
+              </a:rPr>
+              <a:t> notebooks</a:t>
+            </a:r>
+            <a:r>
+              <a:rPr lang="en-GB" dirty="0"/>
+              <a:t> are fine</a:t>
+            </a:r>
+          </a:p>
+          <a:p>
+            <a:pPr marL="0" indent="0">
+              <a:buNone/>
+            </a:pPr>
+            <a:endParaRPr lang="en-GB" dirty="0"/>
+          </a:p>
+          <a:p>
+            <a:pPr marL="0" indent="0">
+              <a:buNone/>
+            </a:pPr>
+            <a:r>
+              <a:rPr lang="en-GB" dirty="0"/>
+              <a:t>but cloud-based environments also fine (e.g., </a:t>
+            </a:r>
+            <a:r>
+              <a:rPr lang="en-GB" dirty="0">
+                <a:hlinkClick r:id="rId5"/>
+              </a:rPr>
+              <a:t>Google </a:t>
+            </a:r>
+            <a:r>
+              <a:rPr lang="en-GB" dirty="0" err="1">
+                <a:hlinkClick r:id="rId5"/>
+              </a:rPr>
+              <a:t>Colab</a:t>
+            </a:r>
+            <a:r>
+              <a:rPr lang="en-GB" dirty="0"/>
+              <a:t>)</a:t>
             </a:r>
           </a:p>
         </p:txBody>
@@ -4196,7 +4228,7 @@
           <p:cNvPr id="4" name="Slide Number Placeholder 3">
             <a:extLst>
               <a:ext uri="{FF2B5EF4-FFF2-40B4-BE49-F238E27FC236}">
-                <a16:creationId xmlns:a16="http://schemas.microsoft.com/office/drawing/2014/main" id="{575B97E4-48D3-5CA3-B6B2-3BC5DD71690F}"/>
+                <a16:creationId xmlns:a16="http://schemas.microsoft.com/office/drawing/2014/main" id="{279EB8C7-7F0B-BA44-36D2-4511056C6368}"/>
               </a:ext>
             </a:extLst>
           </p:cNvPr>
@@ -4220,165 +4252,10 @@
           </a:p>
         </p:txBody>
       </p:sp>
-      <p:pic>
-        <p:nvPicPr>
-          <p:cNvPr id="5" name="Picture 2" descr="PyTorch is evolving fast. Listen to this podcast to find out how!">
-            <a:extLst>
-              <a:ext uri="{FF2B5EF4-FFF2-40B4-BE49-F238E27FC236}">
-                <a16:creationId xmlns:a16="http://schemas.microsoft.com/office/drawing/2014/main" id="{FD58764D-2B67-728C-787A-C6B642EBCFD8}"/>
-              </a:ext>
-            </a:extLst>
-          </p:cNvPr>
-          <p:cNvPicPr>
-            <a:picLocks noChangeAspect="1" noChangeArrowheads="1"/>
-          </p:cNvPicPr>
-          <p:nvPr/>
-        </p:nvPicPr>
-        <p:blipFill>
-          <a:blip r:embed="rId3">
-            <a:extLst>
-              <a:ext uri="{28A0092B-C50C-407E-A947-70E740481C1C}">
-                <a14:useLocalDpi xmlns:a14="http://schemas.microsoft.com/office/drawing/2010/main" val="0"/>
-              </a:ext>
-            </a:extLst>
-          </a:blip>
-          <a:srcRect/>
-          <a:stretch>
-            <a:fillRect/>
-          </a:stretch>
-        </p:blipFill>
-        <p:spPr bwMode="auto">
-          <a:xfrm>
-            <a:off x="838200" y="3430102"/>
-            <a:ext cx="3701716" cy="789677"/>
-          </a:xfrm>
-          <a:prstGeom prst="rect">
-            <a:avLst/>
-          </a:prstGeom>
-          <a:noFill/>
-          <a:extLst>
-            <a:ext uri="{909E8E84-426E-40DD-AFC4-6F175D3DCCD1}">
-              <a14:hiddenFill xmlns:a14="http://schemas.microsoft.com/office/drawing/2010/main">
-                <a:solidFill>
-                  <a:srgbClr val="FFFFFF"/>
-                </a:solidFill>
-              </a14:hiddenFill>
-            </a:ext>
-          </a:extLst>
-        </p:spPr>
-      </p:pic>
-      <p:pic>
-        <p:nvPicPr>
-          <p:cNvPr id="6" name="Picture 6" descr="Machine Learning in the Browser using TensorFlow.js | by Suraj Parmar ...">
-            <a:extLst>
-              <a:ext uri="{FF2B5EF4-FFF2-40B4-BE49-F238E27FC236}">
-                <a16:creationId xmlns:a16="http://schemas.microsoft.com/office/drawing/2014/main" id="{9C0D363E-EF7C-EEF1-BD05-D7980098DD5A}"/>
-              </a:ext>
-            </a:extLst>
-          </p:cNvPr>
-          <p:cNvPicPr>
-            <a:picLocks noChangeAspect="1" noChangeArrowheads="1"/>
-          </p:cNvPicPr>
-          <p:nvPr/>
-        </p:nvPicPr>
-        <p:blipFill>
-          <a:blip r:embed="rId4">
-            <a:extLst>
-              <a:ext uri="{28A0092B-C50C-407E-A947-70E740481C1C}">
-                <a14:useLocalDpi xmlns:a14="http://schemas.microsoft.com/office/drawing/2010/main" val="0"/>
-              </a:ext>
-            </a:extLst>
-          </a:blip>
-          <a:srcRect/>
-          <a:stretch>
-            <a:fillRect/>
-          </a:stretch>
-        </p:blipFill>
-        <p:spPr bwMode="auto">
-          <a:xfrm>
-            <a:off x="7652086" y="3261935"/>
-            <a:ext cx="3284621" cy="1102144"/>
-          </a:xfrm>
-          <a:prstGeom prst="rect">
-            <a:avLst/>
-          </a:prstGeom>
-          <a:noFill/>
-          <a:extLst>
-            <a:ext uri="{909E8E84-426E-40DD-AFC4-6F175D3DCCD1}">
-              <a14:hiddenFill xmlns:a14="http://schemas.microsoft.com/office/drawing/2010/main">
-                <a:solidFill>
-                  <a:srgbClr val="FFFFFF"/>
-                </a:solidFill>
-              </a14:hiddenFill>
-            </a:ext>
-          </a:extLst>
-        </p:spPr>
-      </p:pic>
-      <p:sp>
-        <p:nvSpPr>
-          <p:cNvPr id="7" name="Rectangle: Rounded Corners 6">
-            <a:extLst>
-              <a:ext uri="{FF2B5EF4-FFF2-40B4-BE49-F238E27FC236}">
-                <a16:creationId xmlns:a16="http://schemas.microsoft.com/office/drawing/2014/main" id="{DF8A9556-CB38-5619-CC52-7BD00B11B476}"/>
-              </a:ext>
-            </a:extLst>
-          </p:cNvPr>
-          <p:cNvSpPr/>
-          <p:nvPr/>
-        </p:nvSpPr>
-        <p:spPr>
-          <a:xfrm>
-            <a:off x="838200" y="3285804"/>
-            <a:ext cx="3701716" cy="1078275"/>
-          </a:xfrm>
-          <a:prstGeom prst="roundRect">
-            <a:avLst/>
-          </a:prstGeom>
-          <a:noFill/>
-          <a:ln>
-            <a:solidFill>
-              <a:srgbClr val="C00000"/>
-            </a:solidFill>
-          </a:ln>
-        </p:spPr>
-        <p:style>
-          <a:lnRef idx="2">
-            <a:schemeClr val="accent1">
-              <a:shade val="15000"/>
-            </a:schemeClr>
-          </a:lnRef>
-          <a:fillRef idx="1">
-            <a:schemeClr val="accent1"/>
-          </a:fillRef>
-          <a:effectRef idx="0">
-            <a:schemeClr val="accent1"/>
-          </a:effectRef>
-          <a:fontRef idx="minor">
-            <a:schemeClr val="lt1"/>
-          </a:fontRef>
-        </p:style>
-        <p:txBody>
-          <a:bodyPr rtlCol="0" anchor="ctr"/>
-          <a:lstStyle/>
-          <a:p>
-            <a:pPr algn="ctr"/>
-            <a:endParaRPr lang="en-GB">
-              <a:ln>
-                <a:solidFill>
-                  <a:schemeClr val="tx1"/>
-                </a:solidFill>
-              </a:ln>
-              <a:solidFill>
-                <a:schemeClr val="tx1"/>
-              </a:solidFill>
-            </a:endParaRPr>
-          </a:p>
-        </p:txBody>
-      </p:sp>
     </p:spTree>
     <p:extLst>
       <p:ext uri="{BB962C8B-B14F-4D97-AF65-F5344CB8AC3E}">
-        <p14:creationId xmlns:p14="http://schemas.microsoft.com/office/powerpoint/2010/main" val="3544795835"/>
+        <p14:creationId xmlns:p14="http://schemas.microsoft.com/office/powerpoint/2010/main" val="2053728267"/>
       </p:ext>
     </p:extLst>
   </p:cSld>
@@ -4451,13 +4328,53 @@
         </p:nvSpPr>
         <p:spPr/>
         <p:txBody>
-          <a:bodyPr/>
+          <a:bodyPr>
+            <a:normAutofit/>
+          </a:bodyPr>
           <a:lstStyle/>
           <a:p>
             <a:r>
-              <a:rPr lang="en-GB" dirty="0"/>
-              <a:t>…</a:t>
-            </a:r>
+              <a:rPr lang="de-DE" dirty="0">
+                <a:hlinkClick r:id="rId2"/>
+              </a:rPr>
+              <a:t>An Introduction to Statistical Learning</a:t>
+            </a:r>
+            <a:endParaRPr lang="de-DE" dirty="0">
+              <a:hlinkClick r:id="rId3"/>
+            </a:endParaRPr>
+          </a:p>
+          <a:p>
+            <a:r>
+              <a:rPr lang="de-DE" dirty="0">
+                <a:hlinkClick r:id="rId3"/>
+              </a:rPr>
+              <a:t>The Elements of Statistical Learning</a:t>
+            </a:r>
+            <a:endParaRPr lang="de-DE" dirty="0"/>
+          </a:p>
+          <a:p>
+            <a:r>
+              <a:rPr lang="de-DE" dirty="0">
+                <a:hlinkClick r:id="rId4"/>
+              </a:rPr>
+              <a:t>Pattern Recognition and Machine Learning</a:t>
+            </a:r>
+            <a:endParaRPr lang="de-DE" dirty="0"/>
+          </a:p>
+          <a:p>
+            <a:r>
+              <a:rPr lang="en-DE">
+                <a:hlinkClick r:id="rId5"/>
+              </a:rPr>
+              <a:t>M</a:t>
+            </a:r>
+            <a:r>
+              <a:rPr lang="de-DE" dirty="0">
+                <a:hlinkClick r:id="rId5"/>
+              </a:rPr>
+              <a:t>achine Learning</a:t>
+            </a:r>
+            <a:endParaRPr lang="en-GB" dirty="0"/>
           </a:p>
           <a:p>
             <a:pPr marL="0" indent="0">
@@ -4468,7 +4385,7 @@
           <a:p>
             <a:r>
               <a:rPr lang="en-GB" dirty="0">
-                <a:hlinkClick r:id="rId2"/>
+                <a:hlinkClick r:id="rId6"/>
               </a:rPr>
               <a:t>Deep Learning</a:t>
             </a:r>
@@ -4477,16 +4394,7 @@
           <a:p>
             <a:r>
               <a:rPr lang="en-GB" dirty="0">
-                <a:hlinkClick r:id="rId3"/>
-              </a:rPr>
-              <a:t>The Little Book of Deep Learning</a:t>
-            </a:r>
-            <a:endParaRPr lang="en-GB" dirty="0"/>
-          </a:p>
-          <a:p>
-            <a:r>
-              <a:rPr lang="en-GB" dirty="0">
-                <a:hlinkClick r:id="rId4"/>
+                <a:hlinkClick r:id="rId7"/>
               </a:rPr>
               <a:t>Understanding Deep Learning</a:t>
             </a:r>
@@ -4864,65 +4772,10 @@
       </p:grpSpPr>
       <p:sp>
         <p:nvSpPr>
-          <p:cNvPr id="2" name="Title 1">
-            <a:extLst>
-              <a:ext uri="{FF2B5EF4-FFF2-40B4-BE49-F238E27FC236}">
-                <a16:creationId xmlns:a16="http://schemas.microsoft.com/office/drawing/2014/main" id="{CD9B44F7-861D-5F7F-A3C4-DC4382499A99}"/>
-              </a:ext>
-            </a:extLst>
-          </p:cNvPr>
-          <p:cNvSpPr>
-            <a:spLocks noGrp="1"/>
-          </p:cNvSpPr>
-          <p:nvPr>
-            <p:ph type="title"/>
-          </p:nvPr>
-        </p:nvSpPr>
-        <p:spPr/>
-        <p:txBody>
-          <a:bodyPr>
-            <a:normAutofit/>
-          </a:bodyPr>
-          <a:lstStyle/>
-          <a:p>
-            <a:r>
-              <a:rPr lang="de-DE" dirty="0"/>
-              <a:t>Main Areas </a:t>
-            </a:r>
-            <a:r>
-              <a:rPr lang="de-DE" dirty="0" err="1"/>
-              <a:t>of</a:t>
-            </a:r>
-            <a:r>
-              <a:rPr lang="de-DE" dirty="0"/>
-              <a:t> </a:t>
-            </a:r>
-            <a:r>
-              <a:rPr lang="de-DE" dirty="0" err="1"/>
-              <a:t>Artificial</a:t>
-            </a:r>
-            <a:r>
-              <a:rPr lang="de-DE" dirty="0"/>
-              <a:t> </a:t>
-            </a:r>
-            <a:r>
-              <a:rPr lang="de-DE" dirty="0" err="1"/>
-              <a:t>Intelligence</a:t>
-            </a:r>
-            <a:r>
-              <a:rPr lang="de-DE" dirty="0"/>
-              <a:t> (AI)</a:t>
-            </a:r>
-            <a:endParaRPr lang="en-GB" dirty="0"/>
-          </a:p>
-        </p:txBody>
-      </p:sp>
-      <p:sp>
-        <p:nvSpPr>
-          <p:cNvPr id="4" name="Slide Number Placeholder 3">
-            <a:extLst>
-              <a:ext uri="{FF2B5EF4-FFF2-40B4-BE49-F238E27FC236}">
-                <a16:creationId xmlns:a16="http://schemas.microsoft.com/office/drawing/2014/main" id="{DDCC8EC6-3F79-485E-71D3-142E15936327}"/>
+          <p:cNvPr id="3" name="Slide Number Placeholder 2">
+            <a:extLst>
+              <a:ext uri="{FF2B5EF4-FFF2-40B4-BE49-F238E27FC236}">
+                <a16:creationId xmlns:a16="http://schemas.microsoft.com/office/drawing/2014/main" id="{7335F983-758A-EB88-9012-92F52DEF2369}"/>
               </a:ext>
             </a:extLst>
           </p:cNvPr>
@@ -4938,788 +4791,9 @@
           <a:bodyPr/>
           <a:lstStyle/>
           <a:p>
-            <a:fld id="{08C366F5-AFAD-49CB-854A-9D9E238FCA13}" type="slidenum">
+            <a:fld id="{A3F33A53-1B14-4784-A6BE-2DB6D72C8D95}" type="slidenum">
               <a:rPr lang="en-GB" smtClean="0"/>
               <a:t>3</a:t>
-            </a:fld>
-            <a:endParaRPr lang="en-GB"/>
-          </a:p>
-        </p:txBody>
-      </p:sp>
-      <p:pic>
-        <p:nvPicPr>
-          <p:cNvPr id="5" name="Picture 4">
-            <a:extLst>
-              <a:ext uri="{FF2B5EF4-FFF2-40B4-BE49-F238E27FC236}">
-                <a16:creationId xmlns:a16="http://schemas.microsoft.com/office/drawing/2014/main" id="{230461BE-CBBC-633F-BF4F-AD6554B61B94}"/>
-              </a:ext>
-            </a:extLst>
-          </p:cNvPr>
-          <p:cNvPicPr>
-            <a:picLocks noChangeAspect="1"/>
-          </p:cNvPicPr>
-          <p:nvPr/>
-        </p:nvPicPr>
-        <p:blipFill>
-          <a:blip r:embed="rId2"/>
-          <a:stretch>
-            <a:fillRect/>
-          </a:stretch>
-        </p:blipFill>
-        <p:spPr>
-          <a:xfrm>
-            <a:off x="439111" y="2282706"/>
-            <a:ext cx="5603963" cy="921243"/>
-          </a:xfrm>
-          <a:prstGeom prst="rect">
-            <a:avLst/>
-          </a:prstGeom>
-        </p:spPr>
-      </p:pic>
-      <p:pic>
-        <p:nvPicPr>
-          <p:cNvPr id="6" name="Picture 5" descr="A collage of many images&#10;&#10;Description automatically generated">
-            <a:extLst>
-              <a:ext uri="{FF2B5EF4-FFF2-40B4-BE49-F238E27FC236}">
-                <a16:creationId xmlns:a16="http://schemas.microsoft.com/office/drawing/2014/main" id="{029F3378-177B-1DEF-9328-6E0FCD05D6A0}"/>
-              </a:ext>
-            </a:extLst>
-          </p:cNvPr>
-          <p:cNvPicPr>
-            <a:picLocks noChangeAspect="1"/>
-          </p:cNvPicPr>
-          <p:nvPr/>
-        </p:nvPicPr>
-        <p:blipFill>
-          <a:blip r:embed="rId3"/>
-          <a:stretch>
-            <a:fillRect/>
-          </a:stretch>
-        </p:blipFill>
-        <p:spPr>
-          <a:xfrm>
-            <a:off x="910720" y="3952220"/>
-            <a:ext cx="2078016" cy="2078016"/>
-          </a:xfrm>
-          <a:prstGeom prst="rect">
-            <a:avLst/>
-          </a:prstGeom>
-        </p:spPr>
-      </p:pic>
-      <p:pic>
-        <p:nvPicPr>
-          <p:cNvPr id="7" name="Picture 6">
-            <a:extLst>
-              <a:ext uri="{FF2B5EF4-FFF2-40B4-BE49-F238E27FC236}">
-                <a16:creationId xmlns:a16="http://schemas.microsoft.com/office/drawing/2014/main" id="{B25A4FFF-1D36-AC9C-C62A-4BAEB008BBCA}"/>
-              </a:ext>
-            </a:extLst>
-          </p:cNvPr>
-          <p:cNvPicPr>
-            <a:picLocks noChangeAspect="1"/>
-          </p:cNvPicPr>
-          <p:nvPr/>
-        </p:nvPicPr>
-        <p:blipFill>
-          <a:blip r:embed="rId4"/>
-          <a:stretch>
-            <a:fillRect/>
-          </a:stretch>
-        </p:blipFill>
-        <p:spPr>
-          <a:xfrm>
-            <a:off x="8471244" y="2218617"/>
-            <a:ext cx="1841655" cy="1998785"/>
-          </a:xfrm>
-          <a:prstGeom prst="rect">
-            <a:avLst/>
-          </a:prstGeom>
-        </p:spPr>
-      </p:pic>
-      <p:sp>
-        <p:nvSpPr>
-          <p:cNvPr id="8" name="TextBox 7">
-            <a:extLst>
-              <a:ext uri="{FF2B5EF4-FFF2-40B4-BE49-F238E27FC236}">
-                <a16:creationId xmlns:a16="http://schemas.microsoft.com/office/drawing/2014/main" id="{8BAD89D0-9E61-6800-832F-2640E2937535}"/>
-              </a:ext>
-            </a:extLst>
-          </p:cNvPr>
-          <p:cNvSpPr txBox="1"/>
-          <p:nvPr/>
-        </p:nvSpPr>
-        <p:spPr>
-          <a:xfrm>
-            <a:off x="439111" y="1759486"/>
-            <a:ext cx="2063835" cy="523220"/>
-          </a:xfrm>
-          <a:prstGeom prst="rect">
-            <a:avLst/>
-          </a:prstGeom>
-          <a:noFill/>
-        </p:spPr>
-        <p:txBody>
-          <a:bodyPr wrap="none" rtlCol="0">
-            <a:spAutoFit/>
-          </a:bodyPr>
-          <a:lstStyle/>
-          <a:p>
-            <a:r>
-              <a:rPr lang="de-DE" sz="2800" dirty="0"/>
-              <a:t>tabular data</a:t>
-            </a:r>
-            <a:endParaRPr lang="en-GB" sz="2800" dirty="0"/>
-          </a:p>
-        </p:txBody>
-      </p:sp>
-      <p:sp>
-        <p:nvSpPr>
-          <p:cNvPr id="9" name="TextBox 8">
-            <a:extLst>
-              <a:ext uri="{FF2B5EF4-FFF2-40B4-BE49-F238E27FC236}">
-                <a16:creationId xmlns:a16="http://schemas.microsoft.com/office/drawing/2014/main" id="{D87F4D34-236A-5C86-228F-99672208DBD8}"/>
-              </a:ext>
-            </a:extLst>
-          </p:cNvPr>
-          <p:cNvSpPr txBox="1"/>
-          <p:nvPr/>
-        </p:nvSpPr>
-        <p:spPr>
-          <a:xfrm>
-            <a:off x="609521" y="3429000"/>
-            <a:ext cx="2680414" cy="523220"/>
-          </a:xfrm>
-          <a:prstGeom prst="rect">
-            <a:avLst/>
-          </a:prstGeom>
-          <a:noFill/>
-        </p:spPr>
-        <p:txBody>
-          <a:bodyPr wrap="none" rtlCol="0">
-            <a:spAutoFit/>
-          </a:bodyPr>
-          <a:lstStyle/>
-          <a:p>
-            <a:r>
-              <a:rPr lang="de-DE" sz="2800" dirty="0"/>
-              <a:t>computer vision</a:t>
-            </a:r>
-            <a:endParaRPr lang="en-GB" sz="2800" dirty="0"/>
-          </a:p>
-        </p:txBody>
-      </p:sp>
-      <p:sp>
-        <p:nvSpPr>
-          <p:cNvPr id="10" name="TextBox 9">
-            <a:extLst>
-              <a:ext uri="{FF2B5EF4-FFF2-40B4-BE49-F238E27FC236}">
-                <a16:creationId xmlns:a16="http://schemas.microsoft.com/office/drawing/2014/main" id="{1D119B08-DDB6-BE91-ADEA-700B82E1A498}"/>
-              </a:ext>
-            </a:extLst>
-          </p:cNvPr>
-          <p:cNvSpPr txBox="1"/>
-          <p:nvPr/>
-        </p:nvSpPr>
-        <p:spPr>
-          <a:xfrm>
-            <a:off x="7976972" y="1695397"/>
-            <a:ext cx="2830198" cy="523220"/>
-          </a:xfrm>
-          <a:prstGeom prst="rect">
-            <a:avLst/>
-          </a:prstGeom>
-          <a:noFill/>
-        </p:spPr>
-        <p:txBody>
-          <a:bodyPr wrap="none" rtlCol="0">
-            <a:spAutoFit/>
-          </a:bodyPr>
-          <a:lstStyle/>
-          <a:p>
-            <a:r>
-              <a:rPr lang="de-DE" sz="2800" dirty="0"/>
-              <a:t>language models</a:t>
-            </a:r>
-            <a:endParaRPr lang="en-GB" sz="2800" dirty="0"/>
-          </a:p>
-        </p:txBody>
-      </p:sp>
-      <p:sp>
-        <p:nvSpPr>
-          <p:cNvPr id="11" name="TextBox 10">
-            <a:extLst>
-              <a:ext uri="{FF2B5EF4-FFF2-40B4-BE49-F238E27FC236}">
-                <a16:creationId xmlns:a16="http://schemas.microsoft.com/office/drawing/2014/main" id="{FDCB25F8-AE37-1ACB-BA8E-33CFFD038092}"/>
-              </a:ext>
-            </a:extLst>
-          </p:cNvPr>
-          <p:cNvSpPr txBox="1"/>
-          <p:nvPr/>
-        </p:nvSpPr>
-        <p:spPr>
-          <a:xfrm>
-            <a:off x="4725673" y="3654052"/>
-            <a:ext cx="1292213" cy="523220"/>
-          </a:xfrm>
-          <a:prstGeom prst="rect">
-            <a:avLst/>
-          </a:prstGeom>
-          <a:noFill/>
-        </p:spPr>
-        <p:txBody>
-          <a:bodyPr wrap="none" rtlCol="0">
-            <a:spAutoFit/>
-          </a:bodyPr>
-          <a:lstStyle/>
-          <a:p>
-            <a:r>
-              <a:rPr lang="de-DE" sz="2800" dirty="0"/>
-              <a:t>control</a:t>
-            </a:r>
-            <a:endParaRPr lang="en-GB" sz="2800" dirty="0"/>
-          </a:p>
-        </p:txBody>
-      </p:sp>
-      <p:pic>
-        <p:nvPicPr>
-          <p:cNvPr id="13" name="Picture 12">
-            <a:extLst>
-              <a:ext uri="{FF2B5EF4-FFF2-40B4-BE49-F238E27FC236}">
-                <a16:creationId xmlns:a16="http://schemas.microsoft.com/office/drawing/2014/main" id="{728E3C93-9BB5-54EC-0C68-41D872F0A9B7}"/>
-              </a:ext>
-            </a:extLst>
-          </p:cNvPr>
-          <p:cNvPicPr>
-            <a:picLocks noChangeAspect="1"/>
-          </p:cNvPicPr>
-          <p:nvPr/>
-        </p:nvPicPr>
-        <p:blipFill>
-          <a:blip r:embed="rId5"/>
-          <a:stretch>
-            <a:fillRect/>
-          </a:stretch>
-        </p:blipFill>
-        <p:spPr>
-          <a:xfrm>
-            <a:off x="4725673" y="4177272"/>
-            <a:ext cx="2750387" cy="1343218"/>
-          </a:xfrm>
-          <a:prstGeom prst="rect">
-            <a:avLst/>
-          </a:prstGeom>
-        </p:spPr>
-      </p:pic>
-      <p:sp>
-        <p:nvSpPr>
-          <p:cNvPr id="3" name="TextBox 2">
-            <a:extLst>
-              <a:ext uri="{FF2B5EF4-FFF2-40B4-BE49-F238E27FC236}">
-                <a16:creationId xmlns:a16="http://schemas.microsoft.com/office/drawing/2014/main" id="{5B545444-0F88-D652-43F5-7AB41F39A7A8}"/>
-              </a:ext>
-            </a:extLst>
-          </p:cNvPr>
-          <p:cNvSpPr txBox="1"/>
-          <p:nvPr/>
-        </p:nvSpPr>
-        <p:spPr>
-          <a:xfrm>
-            <a:off x="3885793" y="5835544"/>
-            <a:ext cx="5506278" cy="769441"/>
-          </a:xfrm>
-          <a:prstGeom prst="rect">
-            <a:avLst/>
-          </a:prstGeom>
-          <a:noFill/>
-          <a:ln>
-            <a:solidFill>
-              <a:schemeClr val="tx1"/>
-            </a:solidFill>
-          </a:ln>
-        </p:spPr>
-        <p:txBody>
-          <a:bodyPr wrap="square" rtlCol="0">
-            <a:spAutoFit/>
-          </a:bodyPr>
-          <a:lstStyle/>
-          <a:p>
-            <a:r>
-              <a:rPr lang="de-DE" sz="2200" dirty="0"/>
-              <a:t>all </a:t>
-            </a:r>
-            <a:r>
-              <a:rPr lang="de-DE" sz="2200" dirty="0" err="1"/>
-              <a:t>empowered</a:t>
-            </a:r>
-            <a:r>
-              <a:rPr lang="de-DE" sz="2200" dirty="0"/>
-              <a:t> by one key </a:t>
-            </a:r>
-            <a:r>
-              <a:rPr lang="de-DE" sz="2200" dirty="0" err="1"/>
-              <a:t>component</a:t>
-            </a:r>
-            <a:r>
-              <a:rPr lang="de-DE" sz="2200" dirty="0"/>
-              <a:t>:</a:t>
-            </a:r>
-          </a:p>
-          <a:p>
-            <a:r>
-              <a:rPr lang="de-DE" sz="2200" dirty="0" err="1"/>
-              <a:t>learning</a:t>
-            </a:r>
-            <a:r>
-              <a:rPr lang="de-DE" sz="2200" dirty="0"/>
-              <a:t> from </a:t>
-            </a:r>
-            <a:r>
-              <a:rPr lang="de-DE" sz="2200" dirty="0" err="1"/>
-              <a:t>data</a:t>
-            </a:r>
-            <a:r>
-              <a:rPr lang="de-DE" sz="2200" dirty="0"/>
-              <a:t> </a:t>
-            </a:r>
-            <a:r>
-              <a:rPr lang="de-DE" sz="2200" dirty="0">
-                <a:sym typeface="Wingdings" pitchFamily="2" charset="2"/>
-              </a:rPr>
-              <a:t> </a:t>
-            </a:r>
-            <a:r>
-              <a:rPr lang="de-DE" sz="2200" dirty="0" err="1">
-                <a:sym typeface="Wingdings" pitchFamily="2" charset="2"/>
-              </a:rPr>
-              <a:t>Machine</a:t>
-            </a:r>
-            <a:r>
-              <a:rPr lang="de-DE" sz="2200" dirty="0">
-                <a:sym typeface="Wingdings" pitchFamily="2" charset="2"/>
-              </a:rPr>
-              <a:t> Learning </a:t>
-            </a:r>
-            <a:r>
-              <a:rPr lang="de-DE" sz="2200" dirty="0"/>
-              <a:t>(ML)</a:t>
-            </a:r>
-            <a:endParaRPr lang="en-GB" sz="2200" dirty="0"/>
-          </a:p>
-        </p:txBody>
-      </p:sp>
-    </p:spTree>
-    <p:extLst>
-      <p:ext uri="{BB962C8B-B14F-4D97-AF65-F5344CB8AC3E}">
-        <p14:creationId xmlns:p14="http://schemas.microsoft.com/office/powerpoint/2010/main" val="1120484139"/>
-      </p:ext>
-    </p:extLst>
-  </p:cSld>
-  <p:clrMapOvr>
-    <a:masterClrMapping/>
-  </p:clrMapOvr>
-</p:sld>
-</file>
-
-<file path=ppt/slides/slide4.xml><?xml version="1.0" encoding="utf-8"?>
-<p:sld xmlns:a="http://schemas.openxmlformats.org/drawingml/2006/main" xmlns:r="http://schemas.openxmlformats.org/officeDocument/2006/relationships" xmlns:p="http://schemas.openxmlformats.org/presentationml/2006/main">
-  <p:cSld>
-    <p:spTree>
-      <p:nvGrpSpPr>
-        <p:cNvPr id="1" name=""/>
-        <p:cNvGrpSpPr/>
-        <p:nvPr/>
-      </p:nvGrpSpPr>
-      <p:grpSpPr>
-        <a:xfrm>
-          <a:off x="0" y="0"/>
-          <a:ext cx="0" cy="0"/>
-          <a:chOff x="0" y="0"/>
-          <a:chExt cx="0" cy="0"/>
-        </a:xfrm>
-      </p:grpSpPr>
-      <p:sp>
-        <p:nvSpPr>
-          <p:cNvPr id="5" name="Title 4">
-            <a:extLst>
-              <a:ext uri="{FF2B5EF4-FFF2-40B4-BE49-F238E27FC236}">
-                <a16:creationId xmlns:a16="http://schemas.microsoft.com/office/drawing/2014/main" id="{5CA917D1-CFE8-CFA0-EC29-D31E03982235}"/>
-              </a:ext>
-            </a:extLst>
-          </p:cNvPr>
-          <p:cNvSpPr>
-            <a:spLocks noGrp="1"/>
-          </p:cNvSpPr>
-          <p:nvPr>
-            <p:ph type="title"/>
-          </p:nvPr>
-        </p:nvSpPr>
-        <p:spPr/>
-        <p:txBody>
-          <a:bodyPr/>
-          <a:lstStyle/>
-          <a:p>
-            <a:r>
-              <a:rPr lang="de-DE" dirty="0"/>
-              <a:t>When to Use ML (Learning from Data)</a:t>
-            </a:r>
-            <a:endParaRPr lang="en-GB" dirty="0"/>
-          </a:p>
-        </p:txBody>
-      </p:sp>
-      <p:sp>
-        <p:nvSpPr>
-          <p:cNvPr id="4" name="Slide Number Placeholder 3">
-            <a:extLst>
-              <a:ext uri="{FF2B5EF4-FFF2-40B4-BE49-F238E27FC236}">
-                <a16:creationId xmlns:a16="http://schemas.microsoft.com/office/drawing/2014/main" id="{B6A10007-F622-5B4B-B5A0-241B785D7DB8}"/>
-              </a:ext>
-            </a:extLst>
-          </p:cNvPr>
-          <p:cNvSpPr>
-            <a:spLocks noGrp="1"/>
-          </p:cNvSpPr>
-          <p:nvPr>
-            <p:ph type="sldNum" sz="quarter" idx="12"/>
-          </p:nvPr>
-        </p:nvSpPr>
-        <p:spPr/>
-        <p:txBody>
-          <a:bodyPr/>
-          <a:lstStyle/>
-          <a:p>
-            <a:fld id="{A3F33A53-1B14-4784-A6BE-2DB6D72C8D95}" type="slidenum">
-              <a:rPr lang="en-GB" smtClean="0"/>
-              <a:t>4</a:t>
-            </a:fld>
-            <a:endParaRPr lang="en-GB"/>
-          </a:p>
-        </p:txBody>
-      </p:sp>
-      <p:sp>
-        <p:nvSpPr>
-          <p:cNvPr id="6" name="TextBox 5">
-            <a:extLst>
-              <a:ext uri="{FF2B5EF4-FFF2-40B4-BE49-F238E27FC236}">
-                <a16:creationId xmlns:a16="http://schemas.microsoft.com/office/drawing/2014/main" id="{E84151AC-16C9-C1FF-7D4B-9897133BE633}"/>
-              </a:ext>
-            </a:extLst>
-          </p:cNvPr>
-          <p:cNvSpPr txBox="1"/>
-          <p:nvPr/>
-        </p:nvSpPr>
-        <p:spPr>
-          <a:xfrm>
-            <a:off x="838200" y="2016445"/>
-            <a:ext cx="3767320" cy="1077218"/>
-          </a:xfrm>
-          <a:prstGeom prst="rect">
-            <a:avLst/>
-          </a:prstGeom>
-          <a:noFill/>
-        </p:spPr>
-        <p:txBody>
-          <a:bodyPr wrap="square">
-            <a:spAutoFit/>
-          </a:bodyPr>
-          <a:lstStyle/>
-          <a:p>
-            <a:r>
-              <a:rPr lang="en-GB" sz="4000" dirty="0"/>
-              <a:t>automation</a:t>
-            </a:r>
-          </a:p>
-          <a:p>
-            <a:r>
-              <a:rPr lang="en-GB" sz="2400" dirty="0"/>
-              <a:t>too complex for rules</a:t>
-            </a:r>
-          </a:p>
-        </p:txBody>
-      </p:sp>
-      <p:sp>
-        <p:nvSpPr>
-          <p:cNvPr id="7" name="TextBox 6">
-            <a:extLst>
-              <a:ext uri="{FF2B5EF4-FFF2-40B4-BE49-F238E27FC236}">
-                <a16:creationId xmlns:a16="http://schemas.microsoft.com/office/drawing/2014/main" id="{B41C67E1-0656-937B-6797-538377633F26}"/>
-              </a:ext>
-            </a:extLst>
-          </p:cNvPr>
-          <p:cNvSpPr txBox="1"/>
-          <p:nvPr/>
-        </p:nvSpPr>
-        <p:spPr>
-          <a:xfrm>
-            <a:off x="6214111" y="2016445"/>
-            <a:ext cx="4307839" cy="1077218"/>
-          </a:xfrm>
-          <a:prstGeom prst="rect">
-            <a:avLst/>
-          </a:prstGeom>
-          <a:noFill/>
-        </p:spPr>
-        <p:txBody>
-          <a:bodyPr wrap="square">
-            <a:spAutoFit/>
-          </a:bodyPr>
-          <a:lstStyle/>
-          <a:p>
-            <a:r>
-              <a:rPr lang="en-GB" sz="4000" dirty="0"/>
-              <a:t>uncertainty</a:t>
-            </a:r>
-          </a:p>
-          <a:p>
-            <a:r>
-              <a:rPr lang="en-GB" sz="2400" dirty="0"/>
-              <a:t>too complex for humans</a:t>
-            </a:r>
-          </a:p>
-        </p:txBody>
-      </p:sp>
-      <p:pic>
-        <p:nvPicPr>
-          <p:cNvPr id="8" name="Picture 2" descr="Alphafold-2 Brief Summary. How it works and what it means for… | by ...">
-            <a:extLst>
-              <a:ext uri="{FF2B5EF4-FFF2-40B4-BE49-F238E27FC236}">
-                <a16:creationId xmlns:a16="http://schemas.microsoft.com/office/drawing/2014/main" id="{A734C35A-F9EC-16AF-C578-6C4A860B7BE6}"/>
-              </a:ext>
-            </a:extLst>
-          </p:cNvPr>
-          <p:cNvPicPr>
-            <a:picLocks noChangeAspect="1" noChangeArrowheads="1"/>
-          </p:cNvPicPr>
-          <p:nvPr/>
-        </p:nvPicPr>
-        <p:blipFill>
-          <a:blip r:embed="rId2">
-            <a:extLst>
-              <a:ext uri="{28A0092B-C50C-407E-A947-70E740481C1C}">
-                <a14:useLocalDpi xmlns:a14="http://schemas.microsoft.com/office/drawing/2010/main" val="0"/>
-              </a:ext>
-            </a:extLst>
-          </a:blip>
-          <a:srcRect/>
-          <a:stretch>
-            <a:fillRect/>
-          </a:stretch>
-        </p:blipFill>
-        <p:spPr bwMode="auto">
-          <a:xfrm>
-            <a:off x="6214111" y="3192255"/>
-            <a:ext cx="4307839" cy="2423160"/>
-          </a:xfrm>
-          <a:prstGeom prst="rect">
-            <a:avLst/>
-          </a:prstGeom>
-          <a:noFill/>
-          <a:extLst>
-            <a:ext uri="{909E8E84-426E-40DD-AFC4-6F175D3DCCD1}">
-              <a14:hiddenFill xmlns:a14="http://schemas.microsoft.com/office/drawing/2010/main">
-                <a:solidFill>
-                  <a:srgbClr val="FFFFFF"/>
-                </a:solidFill>
-              </a14:hiddenFill>
-            </a:ext>
-          </a:extLst>
-        </p:spPr>
-      </p:pic>
-      <p:sp>
-        <p:nvSpPr>
-          <p:cNvPr id="9" name="TextBox 8">
-            <a:extLst>
-              <a:ext uri="{FF2B5EF4-FFF2-40B4-BE49-F238E27FC236}">
-                <a16:creationId xmlns:a16="http://schemas.microsoft.com/office/drawing/2014/main" id="{63CD0BC8-8653-739C-7ACE-3DB4279978A0}"/>
-              </a:ext>
-            </a:extLst>
-          </p:cNvPr>
-          <p:cNvSpPr txBox="1"/>
-          <p:nvPr/>
-        </p:nvSpPr>
-        <p:spPr>
-          <a:xfrm>
-            <a:off x="6096001" y="5700575"/>
-            <a:ext cx="6005454" cy="400110"/>
-          </a:xfrm>
-          <a:prstGeom prst="rect">
-            <a:avLst/>
-          </a:prstGeom>
-          <a:noFill/>
-        </p:spPr>
-        <p:txBody>
-          <a:bodyPr wrap="square">
-            <a:spAutoFit/>
-          </a:bodyPr>
-          <a:lstStyle/>
-          <a:p>
-            <a:r>
-              <a:rPr lang="en-GB" sz="2000" dirty="0"/>
-              <a:t>protein structure predictions, demand forecasting, …</a:t>
-            </a:r>
-          </a:p>
-        </p:txBody>
-      </p:sp>
-      <p:pic>
-        <p:nvPicPr>
-          <p:cNvPr id="10" name="Picture 9" descr="A computer on a table&#10;&#10;Description automatically generated">
-            <a:extLst>
-              <a:ext uri="{FF2B5EF4-FFF2-40B4-BE49-F238E27FC236}">
-                <a16:creationId xmlns:a16="http://schemas.microsoft.com/office/drawing/2014/main" id="{236AF176-CF90-9AEF-5F5A-62931A1F153D}"/>
-              </a:ext>
-            </a:extLst>
-          </p:cNvPr>
-          <p:cNvPicPr>
-            <a:picLocks noChangeAspect="1"/>
-          </p:cNvPicPr>
-          <p:nvPr/>
-        </p:nvPicPr>
-        <p:blipFill>
-          <a:blip r:embed="rId3">
-            <a:extLst>
-              <a:ext uri="{28A0092B-C50C-407E-A947-70E740481C1C}">
-                <a14:useLocalDpi xmlns:a14="http://schemas.microsoft.com/office/drawing/2010/main" val="0"/>
-              </a:ext>
-            </a:extLst>
-          </a:blip>
-          <a:stretch>
-            <a:fillRect/>
-          </a:stretch>
-        </p:blipFill>
-        <p:spPr>
-          <a:xfrm>
-            <a:off x="838200" y="3192255"/>
-            <a:ext cx="3767320" cy="2423159"/>
-          </a:xfrm>
-          <a:prstGeom prst="rect">
-            <a:avLst/>
-          </a:prstGeom>
-        </p:spPr>
-      </p:pic>
-      <p:sp>
-        <p:nvSpPr>
-          <p:cNvPr id="11" name="TextBox 10">
-            <a:extLst>
-              <a:ext uri="{FF2B5EF4-FFF2-40B4-BE49-F238E27FC236}">
-                <a16:creationId xmlns:a16="http://schemas.microsoft.com/office/drawing/2014/main" id="{A7A78324-008A-CDED-13FB-DBF4795BDAC2}"/>
-              </a:ext>
-            </a:extLst>
-          </p:cNvPr>
-          <p:cNvSpPr txBox="1"/>
-          <p:nvPr/>
-        </p:nvSpPr>
-        <p:spPr>
-          <a:xfrm>
-            <a:off x="838200" y="5692867"/>
-            <a:ext cx="3767320" cy="400110"/>
-          </a:xfrm>
-          <a:prstGeom prst="rect">
-            <a:avLst/>
-          </a:prstGeom>
-          <a:noFill/>
-        </p:spPr>
-        <p:txBody>
-          <a:bodyPr wrap="square">
-            <a:spAutoFit/>
-          </a:bodyPr>
-          <a:lstStyle/>
-          <a:p>
-            <a:r>
-              <a:rPr lang="en-GB" sz="2000" dirty="0"/>
-              <a:t>object recognition, chatbot, …</a:t>
-            </a:r>
-          </a:p>
-        </p:txBody>
-      </p:sp>
-      <p:sp>
-        <p:nvSpPr>
-          <p:cNvPr id="13" name="TextBox 12">
-            <a:extLst>
-              <a:ext uri="{FF2B5EF4-FFF2-40B4-BE49-F238E27FC236}">
-                <a16:creationId xmlns:a16="http://schemas.microsoft.com/office/drawing/2014/main" id="{B72CA6B1-3E7B-83D8-2B03-2A610283AD83}"/>
-              </a:ext>
-            </a:extLst>
-          </p:cNvPr>
-          <p:cNvSpPr txBox="1"/>
-          <p:nvPr/>
-        </p:nvSpPr>
-        <p:spPr>
-          <a:xfrm>
-            <a:off x="10521950" y="4694111"/>
-            <a:ext cx="1227438" cy="369332"/>
-          </a:xfrm>
-          <a:prstGeom prst="rect">
-            <a:avLst/>
-          </a:prstGeom>
-          <a:noFill/>
-        </p:spPr>
-        <p:txBody>
-          <a:bodyPr wrap="square">
-            <a:spAutoFit/>
-          </a:bodyPr>
-          <a:lstStyle/>
-          <a:p>
-            <a:r>
-              <a:rPr lang="en-GB" sz="1800" dirty="0" err="1"/>
-              <a:t>AlphaFold</a:t>
-            </a:r>
-            <a:endParaRPr lang="en-GB" dirty="0"/>
-          </a:p>
-        </p:txBody>
-      </p:sp>
-    </p:spTree>
-    <p:extLst>
-      <p:ext uri="{BB962C8B-B14F-4D97-AF65-F5344CB8AC3E}">
-        <p14:creationId xmlns:p14="http://schemas.microsoft.com/office/powerpoint/2010/main" val="2935442931"/>
-      </p:ext>
-    </p:extLst>
-  </p:cSld>
-  <p:clrMapOvr>
-    <a:masterClrMapping/>
-  </p:clrMapOvr>
-</p:sld>
-</file>
-
-<file path=ppt/slides/slide5.xml><?xml version="1.0" encoding="utf-8"?>
-<p:sld xmlns:a="http://schemas.openxmlformats.org/drawingml/2006/main" xmlns:r="http://schemas.openxmlformats.org/officeDocument/2006/relationships" xmlns:p="http://schemas.openxmlformats.org/presentationml/2006/main">
-  <p:cSld>
-    <p:spTree>
-      <p:nvGrpSpPr>
-        <p:cNvPr id="1" name=""/>
-        <p:cNvGrpSpPr/>
-        <p:nvPr/>
-      </p:nvGrpSpPr>
-      <p:grpSpPr>
-        <a:xfrm>
-          <a:off x="0" y="0"/>
-          <a:ext cx="0" cy="0"/>
-          <a:chOff x="0" y="0"/>
-          <a:chExt cx="0" cy="0"/>
-        </a:xfrm>
-      </p:grpSpPr>
-      <p:sp>
-        <p:nvSpPr>
-          <p:cNvPr id="3" name="Slide Number Placeholder 2">
-            <a:extLst>
-              <a:ext uri="{FF2B5EF4-FFF2-40B4-BE49-F238E27FC236}">
-                <a16:creationId xmlns:a16="http://schemas.microsoft.com/office/drawing/2014/main" id="{7335F983-758A-EB88-9012-92F52DEF2369}"/>
-              </a:ext>
-            </a:extLst>
-          </p:cNvPr>
-          <p:cNvSpPr>
-            <a:spLocks noGrp="1"/>
-          </p:cNvSpPr>
-          <p:nvPr>
-            <p:ph type="sldNum" sz="quarter" idx="12"/>
-          </p:nvPr>
-        </p:nvSpPr>
-        <p:spPr/>
-        <p:txBody>
-          <a:bodyPr/>
-          <a:lstStyle/>
-          <a:p>
-            <a:fld id="{A3F33A53-1B14-4784-A6BE-2DB6D72C8D95}" type="slidenum">
-              <a:rPr lang="en-GB" smtClean="0"/>
-              <a:t>5</a:t>
             </a:fld>
             <a:endParaRPr lang="en-GB"/>
           </a:p>
@@ -6239,6 +5313,768 @@
 </p:sld>
 </file>
 
+<file path=ppt/slides/slide4.xml><?xml version="1.0" encoding="utf-8"?>
+<p:sld xmlns:a="http://schemas.openxmlformats.org/drawingml/2006/main" xmlns:r="http://schemas.openxmlformats.org/officeDocument/2006/relationships" xmlns:p="http://schemas.openxmlformats.org/presentationml/2006/main">
+  <p:cSld>
+    <p:spTree>
+      <p:nvGrpSpPr>
+        <p:cNvPr id="1" name=""/>
+        <p:cNvGrpSpPr/>
+        <p:nvPr/>
+      </p:nvGrpSpPr>
+      <p:grpSpPr>
+        <a:xfrm>
+          <a:off x="0" y="0"/>
+          <a:ext cx="0" cy="0"/>
+          <a:chOff x="0" y="0"/>
+          <a:chExt cx="0" cy="0"/>
+        </a:xfrm>
+      </p:grpSpPr>
+      <p:sp>
+        <p:nvSpPr>
+          <p:cNvPr id="3" name="Titel 2">
+            <a:extLst>
+              <a:ext uri="{FF2B5EF4-FFF2-40B4-BE49-F238E27FC236}">
+                <a16:creationId xmlns:a16="http://schemas.microsoft.com/office/drawing/2014/main" id="{60AEF908-D62B-6A6D-87B6-FC24F85EF246}"/>
+              </a:ext>
+            </a:extLst>
+          </p:cNvPr>
+          <p:cNvSpPr>
+            <a:spLocks noGrp="1"/>
+          </p:cNvSpPr>
+          <p:nvPr>
+            <p:ph type="title"/>
+          </p:nvPr>
+        </p:nvSpPr>
+        <p:spPr/>
+        <p:txBody>
+          <a:bodyPr/>
+          <a:lstStyle/>
+          <a:p>
+            <a:r>
+              <a:rPr lang="de-DE" dirty="0" err="1"/>
+              <a:t>Typical</a:t>
+            </a:r>
+            <a:r>
+              <a:rPr lang="de-DE" dirty="0"/>
+              <a:t> Data Science Workflow</a:t>
+            </a:r>
+          </a:p>
+        </p:txBody>
+      </p:sp>
+      <p:sp>
+        <p:nvSpPr>
+          <p:cNvPr id="4" name="Inhaltsplatzhalter 3">
+            <a:extLst>
+              <a:ext uri="{FF2B5EF4-FFF2-40B4-BE49-F238E27FC236}">
+                <a16:creationId xmlns:a16="http://schemas.microsoft.com/office/drawing/2014/main" id="{CAAF2F99-958E-01A0-B671-67F68797F6FF}"/>
+              </a:ext>
+            </a:extLst>
+          </p:cNvPr>
+          <p:cNvSpPr>
+            <a:spLocks noGrp="1"/>
+          </p:cNvSpPr>
+          <p:nvPr>
+            <p:ph idx="1"/>
+          </p:nvPr>
+        </p:nvSpPr>
+        <p:spPr/>
+        <p:txBody>
+          <a:bodyPr/>
+          <a:lstStyle/>
+          <a:p>
+            <a:pPr marL="0" indent="0">
+              <a:buNone/>
+            </a:pPr>
+            <a:endParaRPr lang="de-DE" dirty="0"/>
+          </a:p>
+          <a:p>
+            <a:pPr marL="0" indent="0">
+              <a:buNone/>
+            </a:pPr>
+            <a:r>
+              <a:rPr lang="de-DE" dirty="0"/>
+              <a:t>Business Understanding</a:t>
+            </a:r>
+          </a:p>
+          <a:p>
+            <a:pPr marL="0" indent="0">
+              <a:buNone/>
+            </a:pPr>
+            <a:r>
+              <a:rPr lang="de-DE" dirty="0"/>
+              <a:t>→ Data Collection</a:t>
+            </a:r>
+          </a:p>
+          <a:p>
+            <a:pPr marL="0" indent="0">
+              <a:buNone/>
+            </a:pPr>
+            <a:r>
+              <a:rPr lang="de-DE" dirty="0"/>
+              <a:t>→ Data Exploration </a:t>
+            </a:r>
+          </a:p>
+          <a:p>
+            <a:pPr marL="0" indent="0">
+              <a:buNone/>
+            </a:pPr>
+            <a:r>
+              <a:rPr lang="de-DE" dirty="0"/>
+              <a:t>→ Data </a:t>
+            </a:r>
+            <a:r>
+              <a:rPr lang="de-DE" dirty="0" err="1"/>
+              <a:t>Cleaning</a:t>
+            </a:r>
+            <a:r>
+              <a:rPr lang="de-DE" dirty="0"/>
+              <a:t> &amp; </a:t>
+            </a:r>
+            <a:r>
+              <a:rPr lang="de-DE" dirty="0" err="1"/>
+              <a:t>Preparation</a:t>
+            </a:r>
+            <a:endParaRPr lang="de-DE" dirty="0"/>
+          </a:p>
+          <a:p>
+            <a:pPr marL="0" indent="0">
+              <a:buNone/>
+            </a:pPr>
+            <a:r>
+              <a:rPr lang="de-DE" dirty="0"/>
+              <a:t>→ Modeling</a:t>
+            </a:r>
+          </a:p>
+          <a:p>
+            <a:pPr marL="0" indent="0">
+              <a:buNone/>
+            </a:pPr>
+            <a:r>
+              <a:rPr lang="de-DE" dirty="0"/>
+              <a:t>→ Evaluation</a:t>
+            </a:r>
+          </a:p>
+          <a:p>
+            <a:pPr marL="0" indent="0">
+              <a:buNone/>
+            </a:pPr>
+            <a:r>
+              <a:rPr lang="de-DE" dirty="0"/>
+              <a:t>→ </a:t>
+            </a:r>
+            <a:r>
+              <a:rPr lang="de-DE" dirty="0" err="1"/>
+              <a:t>Deployment</a:t>
+            </a:r>
+            <a:r>
+              <a:rPr lang="de-DE" dirty="0"/>
+              <a:t> &amp; Monitoring</a:t>
+            </a:r>
+          </a:p>
+        </p:txBody>
+      </p:sp>
+      <p:sp>
+        <p:nvSpPr>
+          <p:cNvPr id="2" name="Foliennummernplatzhalter 1">
+            <a:extLst>
+              <a:ext uri="{FF2B5EF4-FFF2-40B4-BE49-F238E27FC236}">
+                <a16:creationId xmlns:a16="http://schemas.microsoft.com/office/drawing/2014/main" id="{A88F1996-6422-164F-6384-0F54EF74EA53}"/>
+              </a:ext>
+            </a:extLst>
+          </p:cNvPr>
+          <p:cNvSpPr>
+            <a:spLocks noGrp="1"/>
+          </p:cNvSpPr>
+          <p:nvPr>
+            <p:ph type="sldNum" sz="quarter" idx="12"/>
+          </p:nvPr>
+        </p:nvSpPr>
+        <p:spPr/>
+        <p:txBody>
+          <a:bodyPr/>
+          <a:lstStyle/>
+          <a:p>
+            <a:fld id="{08C366F5-AFAD-49CB-854A-9D9E238FCA13}" type="slidenum">
+              <a:rPr lang="en-GB" smtClean="0"/>
+              <a:t>4</a:t>
+            </a:fld>
+            <a:endParaRPr lang="en-GB"/>
+          </a:p>
+        </p:txBody>
+      </p:sp>
+      <p:sp>
+        <p:nvSpPr>
+          <p:cNvPr id="5" name="Textfeld 4">
+            <a:extLst>
+              <a:ext uri="{FF2B5EF4-FFF2-40B4-BE49-F238E27FC236}">
+                <a16:creationId xmlns:a16="http://schemas.microsoft.com/office/drawing/2014/main" id="{CB5D0225-54DA-888D-C45E-EA07926C4B43}"/>
+              </a:ext>
+            </a:extLst>
+          </p:cNvPr>
+          <p:cNvSpPr txBox="1"/>
+          <p:nvPr/>
+        </p:nvSpPr>
+        <p:spPr>
+          <a:xfrm>
+            <a:off x="7247156" y="3831223"/>
+            <a:ext cx="2735044" cy="523220"/>
+          </a:xfrm>
+          <a:prstGeom prst="rect">
+            <a:avLst/>
+          </a:prstGeom>
+          <a:noFill/>
+        </p:spPr>
+        <p:txBody>
+          <a:bodyPr wrap="none" rtlCol="0">
+            <a:spAutoFit/>
+          </a:bodyPr>
+          <a:lstStyle/>
+          <a:p>
+            <a:r>
+              <a:rPr lang="de-DE" sz="2800" dirty="0"/>
+              <a:t>iterative </a:t>
+            </a:r>
+            <a:r>
+              <a:rPr lang="de-DE" sz="2800" dirty="0" err="1"/>
+              <a:t>process</a:t>
+            </a:r>
+            <a:endParaRPr lang="de-DE" sz="2800" dirty="0"/>
+          </a:p>
+        </p:txBody>
+      </p:sp>
+      <p:sp>
+        <p:nvSpPr>
+          <p:cNvPr id="6" name="Geschweifte Klammer rechts 5">
+            <a:extLst>
+              <a:ext uri="{FF2B5EF4-FFF2-40B4-BE49-F238E27FC236}">
+                <a16:creationId xmlns:a16="http://schemas.microsoft.com/office/drawing/2014/main" id="{3292F64E-6271-97C7-7F2A-8AC5E345AE33}"/>
+              </a:ext>
+            </a:extLst>
+          </p:cNvPr>
+          <p:cNvSpPr/>
+          <p:nvPr/>
+        </p:nvSpPr>
+        <p:spPr>
+          <a:xfrm>
+            <a:off x="6096000" y="2375452"/>
+            <a:ext cx="1113183" cy="3434763"/>
+          </a:xfrm>
+          <a:prstGeom prst="rightBrace">
+            <a:avLst/>
+          </a:prstGeom>
+        </p:spPr>
+        <p:style>
+          <a:lnRef idx="2">
+            <a:schemeClr val="accent1"/>
+          </a:lnRef>
+          <a:fillRef idx="0">
+            <a:schemeClr val="accent1"/>
+          </a:fillRef>
+          <a:effectRef idx="1">
+            <a:schemeClr val="accent1"/>
+          </a:effectRef>
+          <a:fontRef idx="minor">
+            <a:schemeClr val="tx1"/>
+          </a:fontRef>
+        </p:style>
+        <p:txBody>
+          <a:bodyPr rtlCol="0" anchor="ctr"/>
+          <a:lstStyle/>
+          <a:p>
+            <a:pPr algn="ctr"/>
+            <a:endParaRPr lang="de-DE"/>
+          </a:p>
+        </p:txBody>
+      </p:sp>
+    </p:spTree>
+    <p:extLst>
+      <p:ext uri="{BB962C8B-B14F-4D97-AF65-F5344CB8AC3E}">
+        <p14:creationId xmlns:p14="http://schemas.microsoft.com/office/powerpoint/2010/main" val="801189289"/>
+      </p:ext>
+    </p:extLst>
+  </p:cSld>
+  <p:clrMapOvr>
+    <a:masterClrMapping/>
+  </p:clrMapOvr>
+</p:sld>
+</file>
+
+<file path=ppt/slides/slide5.xml><?xml version="1.0" encoding="utf-8"?>
+<p:sld xmlns:a="http://schemas.openxmlformats.org/drawingml/2006/main" xmlns:r="http://schemas.openxmlformats.org/officeDocument/2006/relationships" xmlns:p="http://schemas.openxmlformats.org/presentationml/2006/main">
+  <p:cSld>
+    <p:spTree>
+      <p:nvGrpSpPr>
+        <p:cNvPr id="1" name=""/>
+        <p:cNvGrpSpPr/>
+        <p:nvPr/>
+      </p:nvGrpSpPr>
+      <p:grpSpPr>
+        <a:xfrm>
+          <a:off x="0" y="0"/>
+          <a:ext cx="0" cy="0"/>
+          <a:chOff x="0" y="0"/>
+          <a:chExt cx="0" cy="0"/>
+        </a:xfrm>
+      </p:grpSpPr>
+      <p:sp>
+        <p:nvSpPr>
+          <p:cNvPr id="2" name="Title 1">
+            <a:extLst>
+              <a:ext uri="{FF2B5EF4-FFF2-40B4-BE49-F238E27FC236}">
+                <a16:creationId xmlns:a16="http://schemas.microsoft.com/office/drawing/2014/main" id="{CD9B44F7-861D-5F7F-A3C4-DC4382499A99}"/>
+              </a:ext>
+            </a:extLst>
+          </p:cNvPr>
+          <p:cNvSpPr>
+            <a:spLocks noGrp="1"/>
+          </p:cNvSpPr>
+          <p:nvPr>
+            <p:ph type="title"/>
+          </p:nvPr>
+        </p:nvSpPr>
+        <p:spPr/>
+        <p:txBody>
+          <a:bodyPr>
+            <a:normAutofit/>
+          </a:bodyPr>
+          <a:lstStyle/>
+          <a:p>
+            <a:r>
+              <a:rPr lang="de-DE" dirty="0"/>
+              <a:t>Main Areas </a:t>
+            </a:r>
+            <a:r>
+              <a:rPr lang="de-DE" dirty="0" err="1"/>
+              <a:t>of</a:t>
+            </a:r>
+            <a:r>
+              <a:rPr lang="de-DE" dirty="0"/>
+              <a:t> </a:t>
+            </a:r>
+            <a:r>
+              <a:rPr lang="de-DE" dirty="0" err="1"/>
+              <a:t>Artificial</a:t>
+            </a:r>
+            <a:r>
+              <a:rPr lang="de-DE" dirty="0"/>
+              <a:t> </a:t>
+            </a:r>
+            <a:r>
+              <a:rPr lang="de-DE" dirty="0" err="1"/>
+              <a:t>Intelligence</a:t>
+            </a:r>
+            <a:r>
+              <a:rPr lang="de-DE" dirty="0"/>
+              <a:t> (AI)</a:t>
+            </a:r>
+            <a:endParaRPr lang="en-GB" dirty="0"/>
+          </a:p>
+        </p:txBody>
+      </p:sp>
+      <p:sp>
+        <p:nvSpPr>
+          <p:cNvPr id="4" name="Slide Number Placeholder 3">
+            <a:extLst>
+              <a:ext uri="{FF2B5EF4-FFF2-40B4-BE49-F238E27FC236}">
+                <a16:creationId xmlns:a16="http://schemas.microsoft.com/office/drawing/2014/main" id="{DDCC8EC6-3F79-485E-71D3-142E15936327}"/>
+              </a:ext>
+            </a:extLst>
+          </p:cNvPr>
+          <p:cNvSpPr>
+            <a:spLocks noGrp="1"/>
+          </p:cNvSpPr>
+          <p:nvPr>
+            <p:ph type="sldNum" sz="quarter" idx="12"/>
+          </p:nvPr>
+        </p:nvSpPr>
+        <p:spPr/>
+        <p:txBody>
+          <a:bodyPr/>
+          <a:lstStyle/>
+          <a:p>
+            <a:fld id="{08C366F5-AFAD-49CB-854A-9D9E238FCA13}" type="slidenum">
+              <a:rPr lang="en-GB" smtClean="0"/>
+              <a:t>5</a:t>
+            </a:fld>
+            <a:endParaRPr lang="en-GB"/>
+          </a:p>
+        </p:txBody>
+      </p:sp>
+      <p:pic>
+        <p:nvPicPr>
+          <p:cNvPr id="5" name="Picture 4">
+            <a:extLst>
+              <a:ext uri="{FF2B5EF4-FFF2-40B4-BE49-F238E27FC236}">
+                <a16:creationId xmlns:a16="http://schemas.microsoft.com/office/drawing/2014/main" id="{230461BE-CBBC-633F-BF4F-AD6554B61B94}"/>
+              </a:ext>
+            </a:extLst>
+          </p:cNvPr>
+          <p:cNvPicPr>
+            <a:picLocks noChangeAspect="1"/>
+          </p:cNvPicPr>
+          <p:nvPr/>
+        </p:nvPicPr>
+        <p:blipFill>
+          <a:blip r:embed="rId2"/>
+          <a:stretch>
+            <a:fillRect/>
+          </a:stretch>
+        </p:blipFill>
+        <p:spPr>
+          <a:xfrm>
+            <a:off x="439111" y="2282706"/>
+            <a:ext cx="5603963" cy="921243"/>
+          </a:xfrm>
+          <a:prstGeom prst="rect">
+            <a:avLst/>
+          </a:prstGeom>
+        </p:spPr>
+      </p:pic>
+      <p:pic>
+        <p:nvPicPr>
+          <p:cNvPr id="6" name="Picture 5" descr="A collage of many images&#10;&#10;Description automatically generated">
+            <a:extLst>
+              <a:ext uri="{FF2B5EF4-FFF2-40B4-BE49-F238E27FC236}">
+                <a16:creationId xmlns:a16="http://schemas.microsoft.com/office/drawing/2014/main" id="{029F3378-177B-1DEF-9328-6E0FCD05D6A0}"/>
+              </a:ext>
+            </a:extLst>
+          </p:cNvPr>
+          <p:cNvPicPr>
+            <a:picLocks noChangeAspect="1"/>
+          </p:cNvPicPr>
+          <p:nvPr/>
+        </p:nvPicPr>
+        <p:blipFill>
+          <a:blip r:embed="rId3"/>
+          <a:stretch>
+            <a:fillRect/>
+          </a:stretch>
+        </p:blipFill>
+        <p:spPr>
+          <a:xfrm>
+            <a:off x="910720" y="3952220"/>
+            <a:ext cx="2078016" cy="2078016"/>
+          </a:xfrm>
+          <a:prstGeom prst="rect">
+            <a:avLst/>
+          </a:prstGeom>
+        </p:spPr>
+      </p:pic>
+      <p:pic>
+        <p:nvPicPr>
+          <p:cNvPr id="7" name="Picture 6">
+            <a:extLst>
+              <a:ext uri="{FF2B5EF4-FFF2-40B4-BE49-F238E27FC236}">
+                <a16:creationId xmlns:a16="http://schemas.microsoft.com/office/drawing/2014/main" id="{B25A4FFF-1D36-AC9C-C62A-4BAEB008BBCA}"/>
+              </a:ext>
+            </a:extLst>
+          </p:cNvPr>
+          <p:cNvPicPr>
+            <a:picLocks noChangeAspect="1"/>
+          </p:cNvPicPr>
+          <p:nvPr/>
+        </p:nvPicPr>
+        <p:blipFill>
+          <a:blip r:embed="rId4"/>
+          <a:stretch>
+            <a:fillRect/>
+          </a:stretch>
+        </p:blipFill>
+        <p:spPr>
+          <a:xfrm>
+            <a:off x="8471244" y="2218617"/>
+            <a:ext cx="1841655" cy="1998785"/>
+          </a:xfrm>
+          <a:prstGeom prst="rect">
+            <a:avLst/>
+          </a:prstGeom>
+        </p:spPr>
+      </p:pic>
+      <p:sp>
+        <p:nvSpPr>
+          <p:cNvPr id="8" name="TextBox 7">
+            <a:extLst>
+              <a:ext uri="{FF2B5EF4-FFF2-40B4-BE49-F238E27FC236}">
+                <a16:creationId xmlns:a16="http://schemas.microsoft.com/office/drawing/2014/main" id="{8BAD89D0-9E61-6800-832F-2640E2937535}"/>
+              </a:ext>
+            </a:extLst>
+          </p:cNvPr>
+          <p:cNvSpPr txBox="1"/>
+          <p:nvPr/>
+        </p:nvSpPr>
+        <p:spPr>
+          <a:xfrm>
+            <a:off x="439111" y="1759486"/>
+            <a:ext cx="2063835" cy="523220"/>
+          </a:xfrm>
+          <a:prstGeom prst="rect">
+            <a:avLst/>
+          </a:prstGeom>
+          <a:noFill/>
+        </p:spPr>
+        <p:txBody>
+          <a:bodyPr wrap="none" rtlCol="0">
+            <a:spAutoFit/>
+          </a:bodyPr>
+          <a:lstStyle/>
+          <a:p>
+            <a:r>
+              <a:rPr lang="de-DE" sz="2800" dirty="0"/>
+              <a:t>tabular data</a:t>
+            </a:r>
+            <a:endParaRPr lang="en-GB" sz="2800" dirty="0"/>
+          </a:p>
+        </p:txBody>
+      </p:sp>
+      <p:sp>
+        <p:nvSpPr>
+          <p:cNvPr id="9" name="TextBox 8">
+            <a:extLst>
+              <a:ext uri="{FF2B5EF4-FFF2-40B4-BE49-F238E27FC236}">
+                <a16:creationId xmlns:a16="http://schemas.microsoft.com/office/drawing/2014/main" id="{D87F4D34-236A-5C86-228F-99672208DBD8}"/>
+              </a:ext>
+            </a:extLst>
+          </p:cNvPr>
+          <p:cNvSpPr txBox="1"/>
+          <p:nvPr/>
+        </p:nvSpPr>
+        <p:spPr>
+          <a:xfrm>
+            <a:off x="609521" y="3429000"/>
+            <a:ext cx="2680414" cy="523220"/>
+          </a:xfrm>
+          <a:prstGeom prst="rect">
+            <a:avLst/>
+          </a:prstGeom>
+          <a:noFill/>
+        </p:spPr>
+        <p:txBody>
+          <a:bodyPr wrap="none" rtlCol="0">
+            <a:spAutoFit/>
+          </a:bodyPr>
+          <a:lstStyle/>
+          <a:p>
+            <a:r>
+              <a:rPr lang="de-DE" sz="2800" dirty="0"/>
+              <a:t>computer vision</a:t>
+            </a:r>
+            <a:endParaRPr lang="en-GB" sz="2800" dirty="0"/>
+          </a:p>
+        </p:txBody>
+      </p:sp>
+      <p:sp>
+        <p:nvSpPr>
+          <p:cNvPr id="10" name="TextBox 9">
+            <a:extLst>
+              <a:ext uri="{FF2B5EF4-FFF2-40B4-BE49-F238E27FC236}">
+                <a16:creationId xmlns:a16="http://schemas.microsoft.com/office/drawing/2014/main" id="{1D119B08-DDB6-BE91-ADEA-700B82E1A498}"/>
+              </a:ext>
+            </a:extLst>
+          </p:cNvPr>
+          <p:cNvSpPr txBox="1"/>
+          <p:nvPr/>
+        </p:nvSpPr>
+        <p:spPr>
+          <a:xfrm>
+            <a:off x="7976972" y="1695397"/>
+            <a:ext cx="2830198" cy="523220"/>
+          </a:xfrm>
+          <a:prstGeom prst="rect">
+            <a:avLst/>
+          </a:prstGeom>
+          <a:noFill/>
+        </p:spPr>
+        <p:txBody>
+          <a:bodyPr wrap="none" rtlCol="0">
+            <a:spAutoFit/>
+          </a:bodyPr>
+          <a:lstStyle/>
+          <a:p>
+            <a:r>
+              <a:rPr lang="de-DE" sz="2800" dirty="0"/>
+              <a:t>language models</a:t>
+            </a:r>
+            <a:endParaRPr lang="en-GB" sz="2800" dirty="0"/>
+          </a:p>
+        </p:txBody>
+      </p:sp>
+      <p:sp>
+        <p:nvSpPr>
+          <p:cNvPr id="11" name="TextBox 10">
+            <a:extLst>
+              <a:ext uri="{FF2B5EF4-FFF2-40B4-BE49-F238E27FC236}">
+                <a16:creationId xmlns:a16="http://schemas.microsoft.com/office/drawing/2014/main" id="{FDCB25F8-AE37-1ACB-BA8E-33CFFD038092}"/>
+              </a:ext>
+            </a:extLst>
+          </p:cNvPr>
+          <p:cNvSpPr txBox="1"/>
+          <p:nvPr/>
+        </p:nvSpPr>
+        <p:spPr>
+          <a:xfrm>
+            <a:off x="4725673" y="3654052"/>
+            <a:ext cx="1292213" cy="523220"/>
+          </a:xfrm>
+          <a:prstGeom prst="rect">
+            <a:avLst/>
+          </a:prstGeom>
+          <a:noFill/>
+        </p:spPr>
+        <p:txBody>
+          <a:bodyPr wrap="none" rtlCol="0">
+            <a:spAutoFit/>
+          </a:bodyPr>
+          <a:lstStyle/>
+          <a:p>
+            <a:r>
+              <a:rPr lang="de-DE" sz="2800" dirty="0"/>
+              <a:t>control</a:t>
+            </a:r>
+            <a:endParaRPr lang="en-GB" sz="2800" dirty="0"/>
+          </a:p>
+        </p:txBody>
+      </p:sp>
+      <p:pic>
+        <p:nvPicPr>
+          <p:cNvPr id="13" name="Picture 12">
+            <a:extLst>
+              <a:ext uri="{FF2B5EF4-FFF2-40B4-BE49-F238E27FC236}">
+                <a16:creationId xmlns:a16="http://schemas.microsoft.com/office/drawing/2014/main" id="{728E3C93-9BB5-54EC-0C68-41D872F0A9B7}"/>
+              </a:ext>
+            </a:extLst>
+          </p:cNvPr>
+          <p:cNvPicPr>
+            <a:picLocks noChangeAspect="1"/>
+          </p:cNvPicPr>
+          <p:nvPr/>
+        </p:nvPicPr>
+        <p:blipFill>
+          <a:blip r:embed="rId5"/>
+          <a:stretch>
+            <a:fillRect/>
+          </a:stretch>
+        </p:blipFill>
+        <p:spPr>
+          <a:xfrm>
+            <a:off x="4725673" y="4177272"/>
+            <a:ext cx="2750387" cy="1343218"/>
+          </a:xfrm>
+          <a:prstGeom prst="rect">
+            <a:avLst/>
+          </a:prstGeom>
+        </p:spPr>
+      </p:pic>
+      <p:sp>
+        <p:nvSpPr>
+          <p:cNvPr id="3" name="TextBox 2">
+            <a:extLst>
+              <a:ext uri="{FF2B5EF4-FFF2-40B4-BE49-F238E27FC236}">
+                <a16:creationId xmlns:a16="http://schemas.microsoft.com/office/drawing/2014/main" id="{5B545444-0F88-D652-43F5-7AB41F39A7A8}"/>
+              </a:ext>
+            </a:extLst>
+          </p:cNvPr>
+          <p:cNvSpPr txBox="1"/>
+          <p:nvPr/>
+        </p:nvSpPr>
+        <p:spPr>
+          <a:xfrm>
+            <a:off x="3885793" y="5835544"/>
+            <a:ext cx="5506278" cy="769441"/>
+          </a:xfrm>
+          <a:prstGeom prst="rect">
+            <a:avLst/>
+          </a:prstGeom>
+          <a:noFill/>
+          <a:ln>
+            <a:solidFill>
+              <a:schemeClr val="tx1"/>
+            </a:solidFill>
+          </a:ln>
+        </p:spPr>
+        <p:txBody>
+          <a:bodyPr wrap="square" rtlCol="0">
+            <a:spAutoFit/>
+          </a:bodyPr>
+          <a:lstStyle/>
+          <a:p>
+            <a:r>
+              <a:rPr lang="de-DE" sz="2200" dirty="0"/>
+              <a:t>all </a:t>
+            </a:r>
+            <a:r>
+              <a:rPr lang="de-DE" sz="2200" dirty="0" err="1"/>
+              <a:t>empowered</a:t>
+            </a:r>
+            <a:r>
+              <a:rPr lang="de-DE" sz="2200" dirty="0"/>
+              <a:t> by one key </a:t>
+            </a:r>
+            <a:r>
+              <a:rPr lang="de-DE" sz="2200" dirty="0" err="1"/>
+              <a:t>component</a:t>
+            </a:r>
+            <a:r>
+              <a:rPr lang="de-DE" sz="2200" dirty="0"/>
+              <a:t>:</a:t>
+            </a:r>
+          </a:p>
+          <a:p>
+            <a:r>
+              <a:rPr lang="de-DE" sz="2200" dirty="0" err="1"/>
+              <a:t>learning</a:t>
+            </a:r>
+            <a:r>
+              <a:rPr lang="de-DE" sz="2200" dirty="0"/>
+              <a:t> from </a:t>
+            </a:r>
+            <a:r>
+              <a:rPr lang="de-DE" sz="2200" dirty="0" err="1"/>
+              <a:t>data</a:t>
+            </a:r>
+            <a:r>
+              <a:rPr lang="de-DE" sz="2200" dirty="0"/>
+              <a:t> </a:t>
+            </a:r>
+            <a:r>
+              <a:rPr lang="de-DE" sz="2200" dirty="0">
+                <a:sym typeface="Wingdings" pitchFamily="2" charset="2"/>
+              </a:rPr>
+              <a:t> </a:t>
+            </a:r>
+            <a:r>
+              <a:rPr lang="de-DE" sz="2200" dirty="0" err="1">
+                <a:sym typeface="Wingdings" pitchFamily="2" charset="2"/>
+              </a:rPr>
+              <a:t>Machine</a:t>
+            </a:r>
+            <a:r>
+              <a:rPr lang="de-DE" sz="2200" dirty="0">
+                <a:sym typeface="Wingdings" pitchFamily="2" charset="2"/>
+              </a:rPr>
+              <a:t> Learning </a:t>
+            </a:r>
+            <a:r>
+              <a:rPr lang="de-DE" sz="2200" dirty="0"/>
+              <a:t>(ML)</a:t>
+            </a:r>
+            <a:endParaRPr lang="en-GB" sz="2200" dirty="0"/>
+          </a:p>
+        </p:txBody>
+      </p:sp>
+    </p:spTree>
+    <p:extLst>
+      <p:ext uri="{BB962C8B-B14F-4D97-AF65-F5344CB8AC3E}">
+        <p14:creationId xmlns:p14="http://schemas.microsoft.com/office/powerpoint/2010/main" val="1120484139"/>
+      </p:ext>
+    </p:extLst>
+  </p:cSld>
+  <p:clrMapOvr>
+    <a:masterClrMapping/>
+  </p:clrMapOvr>
+</p:sld>
+</file>
+
 <file path=ppt/slides/slide6.xml><?xml version="1.0" encoding="utf-8"?>
 <p:sld xmlns:a="http://schemas.openxmlformats.org/drawingml/2006/main" xmlns:r="http://schemas.openxmlformats.org/officeDocument/2006/relationships" xmlns:p="http://schemas.openxmlformats.org/presentationml/2006/main">
   <p:cSld>
@@ -6258,10 +6094,10 @@
       </p:grpSpPr>
       <p:sp>
         <p:nvSpPr>
-          <p:cNvPr id="3" name="Titel 2">
-            <a:extLst>
-              <a:ext uri="{FF2B5EF4-FFF2-40B4-BE49-F238E27FC236}">
-                <a16:creationId xmlns:a16="http://schemas.microsoft.com/office/drawing/2014/main" id="{60AEF908-D62B-6A6D-87B6-FC24F85EF246}"/>
+          <p:cNvPr id="5" name="Title 4">
+            <a:extLst>
+              <a:ext uri="{FF2B5EF4-FFF2-40B4-BE49-F238E27FC236}">
+                <a16:creationId xmlns:a16="http://schemas.microsoft.com/office/drawing/2014/main" id="{5CA917D1-CFE8-CFA0-EC29-D31E03982235}"/>
               </a:ext>
             </a:extLst>
           </p:cNvPr>
@@ -6278,47 +6114,19 @@
           <a:lstStyle/>
           <a:p>
             <a:r>
-              <a:rPr lang="de-DE" dirty="0" err="1"/>
-              <a:t>Typical</a:t>
-            </a:r>
-            <a:r>
               <a:rPr lang="de-DE" dirty="0"/>
-              <a:t> Data Science Workflow</a:t>
-            </a:r>
-          </a:p>
-        </p:txBody>
-      </p:sp>
-      <p:sp>
-        <p:nvSpPr>
-          <p:cNvPr id="4" name="Inhaltsplatzhalter 3">
-            <a:extLst>
-              <a:ext uri="{FF2B5EF4-FFF2-40B4-BE49-F238E27FC236}">
-                <a16:creationId xmlns:a16="http://schemas.microsoft.com/office/drawing/2014/main" id="{CAAF2F99-958E-01A0-B671-67F68797F6FF}"/>
-              </a:ext>
-            </a:extLst>
-          </p:cNvPr>
-          <p:cNvSpPr>
-            <a:spLocks noGrp="1"/>
-          </p:cNvSpPr>
-          <p:nvPr>
-            <p:ph idx="1"/>
-          </p:nvPr>
-        </p:nvSpPr>
-        <p:spPr/>
-        <p:txBody>
-          <a:bodyPr/>
-          <a:lstStyle/>
-          <a:p>
-            <a:endParaRPr lang="de-DE"/>
-          </a:p>
-        </p:txBody>
-      </p:sp>
-      <p:sp>
-        <p:nvSpPr>
-          <p:cNvPr id="2" name="Foliennummernplatzhalter 1">
-            <a:extLst>
-              <a:ext uri="{FF2B5EF4-FFF2-40B4-BE49-F238E27FC236}">
-                <a16:creationId xmlns:a16="http://schemas.microsoft.com/office/drawing/2014/main" id="{A88F1996-6422-164F-6384-0F54EF74EA53}"/>
+              <a:t>When to Use ML (Learning from Data)</a:t>
+            </a:r>
+            <a:endParaRPr lang="en-GB" dirty="0"/>
+          </a:p>
+        </p:txBody>
+      </p:sp>
+      <p:sp>
+        <p:nvSpPr>
+          <p:cNvPr id="4" name="Slide Number Placeholder 3">
+            <a:extLst>
+              <a:ext uri="{FF2B5EF4-FFF2-40B4-BE49-F238E27FC236}">
+                <a16:creationId xmlns:a16="http://schemas.microsoft.com/office/drawing/2014/main" id="{B6A10007-F622-5B4B-B5A0-241B785D7DB8}"/>
               </a:ext>
             </a:extLst>
           </p:cNvPr>
@@ -6334,7 +6142,7 @@
           <a:bodyPr/>
           <a:lstStyle/>
           <a:p>
-            <a:fld id="{08C366F5-AFAD-49CB-854A-9D9E238FCA13}" type="slidenum">
+            <a:fld id="{A3F33A53-1B14-4784-A6BE-2DB6D72C8D95}" type="slidenum">
               <a:rPr lang="en-GB" smtClean="0"/>
               <a:t>6</a:t>
             </a:fld>
@@ -6342,10 +6150,281 @@
           </a:p>
         </p:txBody>
       </p:sp>
+      <p:sp>
+        <p:nvSpPr>
+          <p:cNvPr id="6" name="TextBox 5">
+            <a:extLst>
+              <a:ext uri="{FF2B5EF4-FFF2-40B4-BE49-F238E27FC236}">
+                <a16:creationId xmlns:a16="http://schemas.microsoft.com/office/drawing/2014/main" id="{E84151AC-16C9-C1FF-7D4B-9897133BE633}"/>
+              </a:ext>
+            </a:extLst>
+          </p:cNvPr>
+          <p:cNvSpPr txBox="1"/>
+          <p:nvPr/>
+        </p:nvSpPr>
+        <p:spPr>
+          <a:xfrm>
+            <a:off x="838200" y="2016445"/>
+            <a:ext cx="3767320" cy="1077218"/>
+          </a:xfrm>
+          <a:prstGeom prst="rect">
+            <a:avLst/>
+          </a:prstGeom>
+          <a:noFill/>
+        </p:spPr>
+        <p:txBody>
+          <a:bodyPr wrap="square">
+            <a:spAutoFit/>
+          </a:bodyPr>
+          <a:lstStyle/>
+          <a:p>
+            <a:r>
+              <a:rPr lang="en-GB" sz="4000" dirty="0"/>
+              <a:t>automation</a:t>
+            </a:r>
+          </a:p>
+          <a:p>
+            <a:r>
+              <a:rPr lang="en-GB" sz="2400" dirty="0"/>
+              <a:t>too complex for rules</a:t>
+            </a:r>
+          </a:p>
+        </p:txBody>
+      </p:sp>
+      <p:sp>
+        <p:nvSpPr>
+          <p:cNvPr id="7" name="TextBox 6">
+            <a:extLst>
+              <a:ext uri="{FF2B5EF4-FFF2-40B4-BE49-F238E27FC236}">
+                <a16:creationId xmlns:a16="http://schemas.microsoft.com/office/drawing/2014/main" id="{B41C67E1-0656-937B-6797-538377633F26}"/>
+              </a:ext>
+            </a:extLst>
+          </p:cNvPr>
+          <p:cNvSpPr txBox="1"/>
+          <p:nvPr/>
+        </p:nvSpPr>
+        <p:spPr>
+          <a:xfrm>
+            <a:off x="6214111" y="2016445"/>
+            <a:ext cx="4307839" cy="1077218"/>
+          </a:xfrm>
+          <a:prstGeom prst="rect">
+            <a:avLst/>
+          </a:prstGeom>
+          <a:noFill/>
+        </p:spPr>
+        <p:txBody>
+          <a:bodyPr wrap="square">
+            <a:spAutoFit/>
+          </a:bodyPr>
+          <a:lstStyle/>
+          <a:p>
+            <a:r>
+              <a:rPr lang="en-GB" sz="4000" dirty="0"/>
+              <a:t>uncertainty</a:t>
+            </a:r>
+          </a:p>
+          <a:p>
+            <a:r>
+              <a:rPr lang="en-GB" sz="2400" dirty="0"/>
+              <a:t>too complex for humans</a:t>
+            </a:r>
+          </a:p>
+        </p:txBody>
+      </p:sp>
+      <p:pic>
+        <p:nvPicPr>
+          <p:cNvPr id="8" name="Picture 2" descr="Alphafold-2 Brief Summary. How it works and what it means for… | by ...">
+            <a:extLst>
+              <a:ext uri="{FF2B5EF4-FFF2-40B4-BE49-F238E27FC236}">
+                <a16:creationId xmlns:a16="http://schemas.microsoft.com/office/drawing/2014/main" id="{A734C35A-F9EC-16AF-C578-6C4A860B7BE6}"/>
+              </a:ext>
+            </a:extLst>
+          </p:cNvPr>
+          <p:cNvPicPr>
+            <a:picLocks noChangeAspect="1" noChangeArrowheads="1"/>
+          </p:cNvPicPr>
+          <p:nvPr/>
+        </p:nvPicPr>
+        <p:blipFill>
+          <a:blip r:embed="rId2">
+            <a:extLst>
+              <a:ext uri="{28A0092B-C50C-407E-A947-70E740481C1C}">
+                <a14:useLocalDpi xmlns:a14="http://schemas.microsoft.com/office/drawing/2010/main" val="0"/>
+              </a:ext>
+            </a:extLst>
+          </a:blip>
+          <a:srcRect/>
+          <a:stretch>
+            <a:fillRect/>
+          </a:stretch>
+        </p:blipFill>
+        <p:spPr bwMode="auto">
+          <a:xfrm>
+            <a:off x="6214111" y="3192255"/>
+            <a:ext cx="4307839" cy="2423160"/>
+          </a:xfrm>
+          <a:prstGeom prst="rect">
+            <a:avLst/>
+          </a:prstGeom>
+          <a:noFill/>
+          <a:extLst>
+            <a:ext uri="{909E8E84-426E-40DD-AFC4-6F175D3DCCD1}">
+              <a14:hiddenFill xmlns:a14="http://schemas.microsoft.com/office/drawing/2010/main">
+                <a:solidFill>
+                  <a:srgbClr val="FFFFFF"/>
+                </a:solidFill>
+              </a14:hiddenFill>
+            </a:ext>
+          </a:extLst>
+        </p:spPr>
+      </p:pic>
+      <p:sp>
+        <p:nvSpPr>
+          <p:cNvPr id="9" name="TextBox 8">
+            <a:extLst>
+              <a:ext uri="{FF2B5EF4-FFF2-40B4-BE49-F238E27FC236}">
+                <a16:creationId xmlns:a16="http://schemas.microsoft.com/office/drawing/2014/main" id="{63CD0BC8-8653-739C-7ACE-3DB4279978A0}"/>
+              </a:ext>
+            </a:extLst>
+          </p:cNvPr>
+          <p:cNvSpPr txBox="1"/>
+          <p:nvPr/>
+        </p:nvSpPr>
+        <p:spPr>
+          <a:xfrm>
+            <a:off x="6096001" y="5700575"/>
+            <a:ext cx="6005454" cy="400110"/>
+          </a:xfrm>
+          <a:prstGeom prst="rect">
+            <a:avLst/>
+          </a:prstGeom>
+          <a:noFill/>
+        </p:spPr>
+        <p:txBody>
+          <a:bodyPr wrap="square">
+            <a:spAutoFit/>
+          </a:bodyPr>
+          <a:lstStyle/>
+          <a:p>
+            <a:r>
+              <a:rPr lang="en-GB" sz="2000" dirty="0"/>
+              <a:t>protein structure predictions, demand forecasting, …</a:t>
+            </a:r>
+          </a:p>
+        </p:txBody>
+      </p:sp>
+      <p:pic>
+        <p:nvPicPr>
+          <p:cNvPr id="10" name="Picture 9" descr="A computer on a table&#10;&#10;Description automatically generated">
+            <a:extLst>
+              <a:ext uri="{FF2B5EF4-FFF2-40B4-BE49-F238E27FC236}">
+                <a16:creationId xmlns:a16="http://schemas.microsoft.com/office/drawing/2014/main" id="{236AF176-CF90-9AEF-5F5A-62931A1F153D}"/>
+              </a:ext>
+            </a:extLst>
+          </p:cNvPr>
+          <p:cNvPicPr>
+            <a:picLocks noChangeAspect="1"/>
+          </p:cNvPicPr>
+          <p:nvPr/>
+        </p:nvPicPr>
+        <p:blipFill>
+          <a:blip r:embed="rId3">
+            <a:extLst>
+              <a:ext uri="{28A0092B-C50C-407E-A947-70E740481C1C}">
+                <a14:useLocalDpi xmlns:a14="http://schemas.microsoft.com/office/drawing/2010/main" val="0"/>
+              </a:ext>
+            </a:extLst>
+          </a:blip>
+          <a:stretch>
+            <a:fillRect/>
+          </a:stretch>
+        </p:blipFill>
+        <p:spPr>
+          <a:xfrm>
+            <a:off x="838200" y="3192255"/>
+            <a:ext cx="3767320" cy="2423159"/>
+          </a:xfrm>
+          <a:prstGeom prst="rect">
+            <a:avLst/>
+          </a:prstGeom>
+        </p:spPr>
+      </p:pic>
+      <p:sp>
+        <p:nvSpPr>
+          <p:cNvPr id="11" name="TextBox 10">
+            <a:extLst>
+              <a:ext uri="{FF2B5EF4-FFF2-40B4-BE49-F238E27FC236}">
+                <a16:creationId xmlns:a16="http://schemas.microsoft.com/office/drawing/2014/main" id="{A7A78324-008A-CDED-13FB-DBF4795BDAC2}"/>
+              </a:ext>
+            </a:extLst>
+          </p:cNvPr>
+          <p:cNvSpPr txBox="1"/>
+          <p:nvPr/>
+        </p:nvSpPr>
+        <p:spPr>
+          <a:xfrm>
+            <a:off x="838200" y="5692867"/>
+            <a:ext cx="3767320" cy="400110"/>
+          </a:xfrm>
+          <a:prstGeom prst="rect">
+            <a:avLst/>
+          </a:prstGeom>
+          <a:noFill/>
+        </p:spPr>
+        <p:txBody>
+          <a:bodyPr wrap="square">
+            <a:spAutoFit/>
+          </a:bodyPr>
+          <a:lstStyle/>
+          <a:p>
+            <a:r>
+              <a:rPr lang="en-GB" sz="2000" dirty="0"/>
+              <a:t>object recognition, chatbot, …</a:t>
+            </a:r>
+          </a:p>
+        </p:txBody>
+      </p:sp>
+      <p:sp>
+        <p:nvSpPr>
+          <p:cNvPr id="13" name="TextBox 12">
+            <a:extLst>
+              <a:ext uri="{FF2B5EF4-FFF2-40B4-BE49-F238E27FC236}">
+                <a16:creationId xmlns:a16="http://schemas.microsoft.com/office/drawing/2014/main" id="{B72CA6B1-3E7B-83D8-2B03-2A610283AD83}"/>
+              </a:ext>
+            </a:extLst>
+          </p:cNvPr>
+          <p:cNvSpPr txBox="1"/>
+          <p:nvPr/>
+        </p:nvSpPr>
+        <p:spPr>
+          <a:xfrm>
+            <a:off x="10521950" y="4694111"/>
+            <a:ext cx="1227438" cy="369332"/>
+          </a:xfrm>
+          <a:prstGeom prst="rect">
+            <a:avLst/>
+          </a:prstGeom>
+          <a:noFill/>
+        </p:spPr>
+        <p:txBody>
+          <a:bodyPr wrap="square">
+            <a:spAutoFit/>
+          </a:bodyPr>
+          <a:lstStyle/>
+          <a:p>
+            <a:r>
+              <a:rPr lang="en-GB" sz="1800" dirty="0" err="1"/>
+              <a:t>AlphaFold</a:t>
+            </a:r>
+            <a:endParaRPr lang="en-GB" dirty="0"/>
+          </a:p>
+        </p:txBody>
+      </p:sp>
     </p:spTree>
     <p:extLst>
       <p:ext uri="{BB962C8B-B14F-4D97-AF65-F5344CB8AC3E}">
-        <p14:creationId xmlns:p14="http://schemas.microsoft.com/office/powerpoint/2010/main" val="801189289"/>
+        <p14:creationId xmlns:p14="http://schemas.microsoft.com/office/powerpoint/2010/main" val="2935442931"/>
       </p:ext>
     </p:extLst>
   </p:cSld>
@@ -6374,6 +6453,1965 @@
       </p:grpSpPr>
       <p:sp>
         <p:nvSpPr>
+          <p:cNvPr id="4" name="Slide Number Placeholder 3">
+            <a:extLst>
+              <a:ext uri="{FF2B5EF4-FFF2-40B4-BE49-F238E27FC236}">
+                <a16:creationId xmlns:a16="http://schemas.microsoft.com/office/drawing/2014/main" id="{96068474-B64E-C6EC-6B3C-9C843D4BE0A6}"/>
+              </a:ext>
+            </a:extLst>
+          </p:cNvPr>
+          <p:cNvSpPr>
+            <a:spLocks noGrp="1"/>
+          </p:cNvSpPr>
+          <p:nvPr>
+            <p:ph type="sldNum" sz="quarter" idx="12"/>
+          </p:nvPr>
+        </p:nvSpPr>
+        <p:spPr/>
+        <p:txBody>
+          <a:bodyPr/>
+          <a:lstStyle/>
+          <a:p>
+            <a:fld id="{3D4C94FE-FF23-4504-88E9-14D481113291}" type="slidenum">
+              <a:rPr lang="en-GB" smtClean="0"/>
+              <a:t>7</a:t>
+            </a:fld>
+            <a:endParaRPr lang="en-GB"/>
+          </a:p>
+        </p:txBody>
+      </p:sp>
+      <p:grpSp>
+        <p:nvGrpSpPr>
+          <p:cNvPr id="5" name="Group 4">
+            <a:extLst>
+              <a:ext uri="{FF2B5EF4-FFF2-40B4-BE49-F238E27FC236}">
+                <a16:creationId xmlns:a16="http://schemas.microsoft.com/office/drawing/2014/main" id="{DCA50E04-3D60-66D2-8638-F7F57EDDA6DA}"/>
+              </a:ext>
+            </a:extLst>
+          </p:cNvPr>
+          <p:cNvGrpSpPr/>
+          <p:nvPr/>
+        </p:nvGrpSpPr>
+        <p:grpSpPr>
+          <a:xfrm>
+            <a:off x="71915" y="85725"/>
+            <a:ext cx="12048169" cy="5927675"/>
+            <a:chOff x="175321" y="218621"/>
+            <a:chExt cx="12048169" cy="5927675"/>
+          </a:xfrm>
+        </p:grpSpPr>
+        <p:pic>
+          <p:nvPicPr>
+            <p:cNvPr id="6" name="Picture 5" descr="Diagram&#10;&#10;Description automatically generated">
+              <a:extLst>
+                <a:ext uri="{FF2B5EF4-FFF2-40B4-BE49-F238E27FC236}">
+                  <a16:creationId xmlns:a16="http://schemas.microsoft.com/office/drawing/2014/main" id="{C1A1B37E-59B0-ADDA-B17A-FAA0ECBDD4C1}"/>
+                </a:ext>
+              </a:extLst>
+            </p:cNvPr>
+            <p:cNvPicPr>
+              <a:picLocks noChangeAspect="1"/>
+            </p:cNvPicPr>
+            <p:nvPr/>
+          </p:nvPicPr>
+          <p:blipFill rotWithShape="1">
+            <a:blip r:embed="rId2"/>
+            <a:srcRect l="49909" t="53477" r="35242" b="29747"/>
+            <a:stretch/>
+          </p:blipFill>
+          <p:spPr>
+            <a:xfrm>
+              <a:off x="4093771" y="3339970"/>
+              <a:ext cx="1120291" cy="872729"/>
+            </a:xfrm>
+            <a:prstGeom prst="rect">
+              <a:avLst/>
+            </a:prstGeom>
+          </p:spPr>
+        </p:pic>
+        <p:pic>
+          <p:nvPicPr>
+            <p:cNvPr id="7" name="Picture 2" descr="Building Autoencoders in Keras">
+              <a:extLst>
+                <a:ext uri="{FF2B5EF4-FFF2-40B4-BE49-F238E27FC236}">
+                  <a16:creationId xmlns:a16="http://schemas.microsoft.com/office/drawing/2014/main" id="{D9E6DDD4-A04F-E58B-F433-3EDEF323E3B9}"/>
+                </a:ext>
+              </a:extLst>
+            </p:cNvPr>
+            <p:cNvPicPr>
+              <a:picLocks noChangeAspect="1" noChangeArrowheads="1"/>
+            </p:cNvPicPr>
+            <p:nvPr/>
+          </p:nvPicPr>
+          <p:blipFill>
+            <a:blip r:embed="rId3">
+              <a:extLst>
+                <a:ext uri="{28A0092B-C50C-407E-A947-70E740481C1C}">
+                  <a14:useLocalDpi xmlns:a14="http://schemas.microsoft.com/office/drawing/2010/main" val="0"/>
+                </a:ext>
+              </a:extLst>
+            </a:blip>
+            <a:srcRect/>
+            <a:stretch>
+              <a:fillRect/>
+            </a:stretch>
+          </p:blipFill>
+          <p:spPr bwMode="auto">
+            <a:xfrm>
+              <a:off x="7033489" y="4389758"/>
+              <a:ext cx="1410036" cy="443154"/>
+            </a:xfrm>
+            <a:prstGeom prst="rect">
+              <a:avLst/>
+            </a:prstGeom>
+            <a:noFill/>
+            <a:extLst>
+              <a:ext uri="{909E8E84-426E-40DD-AFC4-6F175D3DCCD1}">
+                <a14:hiddenFill xmlns:a14="http://schemas.microsoft.com/office/drawing/2010/main">
+                  <a:solidFill>
+                    <a:srgbClr val="FFFFFF"/>
+                  </a:solidFill>
+                </a14:hiddenFill>
+              </a:ext>
+            </a:extLst>
+          </p:spPr>
+        </p:pic>
+        <p:sp>
+          <p:nvSpPr>
+            <p:cNvPr id="8" name="TextBox 7">
+              <a:extLst>
+                <a:ext uri="{FF2B5EF4-FFF2-40B4-BE49-F238E27FC236}">
+                  <a16:creationId xmlns:a16="http://schemas.microsoft.com/office/drawing/2014/main" id="{937D2F8F-5EDD-6B7E-7313-970BD358220C}"/>
+                </a:ext>
+              </a:extLst>
+            </p:cNvPr>
+            <p:cNvSpPr txBox="1"/>
+            <p:nvPr/>
+          </p:nvSpPr>
+          <p:spPr>
+            <a:xfrm>
+              <a:off x="2456981" y="218621"/>
+              <a:ext cx="4319451" cy="523220"/>
+            </a:xfrm>
+            <a:prstGeom prst="rect">
+              <a:avLst/>
+            </a:prstGeom>
+            <a:noFill/>
+          </p:spPr>
+          <p:txBody>
+            <a:bodyPr wrap="square" rtlCol="0">
+              <a:spAutoFit/>
+            </a:bodyPr>
+            <a:lstStyle/>
+            <a:p>
+              <a:pPr algn="ctr"/>
+              <a:r>
+                <a:rPr lang="en-US" sz="2800" b="1" dirty="0">
+                  <a:latin typeface="AccordAlternate" panose="02000000000000000000" pitchFamily="50" charset="0"/>
+                </a:rPr>
+                <a:t>MACHINE LEARNING</a:t>
+              </a:r>
+            </a:p>
+          </p:txBody>
+        </p:sp>
+        <p:cxnSp>
+          <p:nvCxnSpPr>
+            <p:cNvPr id="9" name="Straight Connector 8">
+              <a:extLst>
+                <a:ext uri="{FF2B5EF4-FFF2-40B4-BE49-F238E27FC236}">
+                  <a16:creationId xmlns:a16="http://schemas.microsoft.com/office/drawing/2014/main" id="{E7BA05BF-16E7-77F0-11E9-87A50BCD665B}"/>
+                </a:ext>
+              </a:extLst>
+            </p:cNvPr>
+            <p:cNvCxnSpPr>
+              <a:cxnSpLocks/>
+            </p:cNvCxnSpPr>
+            <p:nvPr/>
+          </p:nvCxnSpPr>
+          <p:spPr>
+            <a:xfrm flipV="1">
+              <a:off x="2626967" y="824266"/>
+              <a:ext cx="763649" cy="981135"/>
+            </a:xfrm>
+            <a:prstGeom prst="line">
+              <a:avLst/>
+            </a:prstGeom>
+            <a:ln w="38100" cmpd="sng">
+              <a:solidFill>
+                <a:schemeClr val="accent2"/>
+              </a:solidFill>
+            </a:ln>
+            <a:effectLst/>
+          </p:spPr>
+          <p:style>
+            <a:lnRef idx="2">
+              <a:schemeClr val="accent1"/>
+            </a:lnRef>
+            <a:fillRef idx="0">
+              <a:schemeClr val="accent1"/>
+            </a:fillRef>
+            <a:effectRef idx="1">
+              <a:schemeClr val="accent1"/>
+            </a:effectRef>
+            <a:fontRef idx="minor">
+              <a:schemeClr val="tx1"/>
+            </a:fontRef>
+          </p:style>
+        </p:cxnSp>
+        <p:sp>
+          <p:nvSpPr>
+            <p:cNvPr id="10" name="TextBox 9">
+              <a:extLst>
+                <a:ext uri="{FF2B5EF4-FFF2-40B4-BE49-F238E27FC236}">
+                  <a16:creationId xmlns:a16="http://schemas.microsoft.com/office/drawing/2014/main" id="{53805CF5-4013-AFDB-E7AD-55773D741F17}"/>
+                </a:ext>
+              </a:extLst>
+            </p:cNvPr>
+            <p:cNvSpPr txBox="1"/>
+            <p:nvPr/>
+          </p:nvSpPr>
+          <p:spPr>
+            <a:xfrm>
+              <a:off x="175321" y="1823259"/>
+              <a:ext cx="4319451" cy="400110"/>
+            </a:xfrm>
+            <a:prstGeom prst="rect">
+              <a:avLst/>
+            </a:prstGeom>
+            <a:noFill/>
+          </p:spPr>
+          <p:txBody>
+            <a:bodyPr wrap="square" rtlCol="0">
+              <a:spAutoFit/>
+            </a:bodyPr>
+            <a:lstStyle/>
+            <a:p>
+              <a:pPr algn="ctr"/>
+              <a:r>
+                <a:rPr lang="en-US" sz="2000" b="1" dirty="0">
+                  <a:solidFill>
+                    <a:srgbClr val="0070C0"/>
+                  </a:solidFill>
+                  <a:latin typeface="AccordAlternate" panose="02000000000000000000" pitchFamily="50" charset="0"/>
+                </a:rPr>
+                <a:t>SUPERVISED</a:t>
+              </a:r>
+            </a:p>
+          </p:txBody>
+        </p:sp>
+        <p:sp>
+          <p:nvSpPr>
+            <p:cNvPr id="11" name="TextBox 10">
+              <a:extLst>
+                <a:ext uri="{FF2B5EF4-FFF2-40B4-BE49-F238E27FC236}">
+                  <a16:creationId xmlns:a16="http://schemas.microsoft.com/office/drawing/2014/main" id="{B40FB2E7-5829-7A0B-E39B-9367288B1712}"/>
+                </a:ext>
+              </a:extLst>
+            </p:cNvPr>
+            <p:cNvSpPr txBox="1"/>
+            <p:nvPr/>
+          </p:nvSpPr>
+          <p:spPr>
+            <a:xfrm>
+              <a:off x="708719" y="1126039"/>
+              <a:ext cx="2178777" cy="461665"/>
+            </a:xfrm>
+            <a:prstGeom prst="rect">
+              <a:avLst/>
+            </a:prstGeom>
+            <a:noFill/>
+          </p:spPr>
+          <p:txBody>
+            <a:bodyPr wrap="square" rtlCol="0">
+              <a:spAutoFit/>
+            </a:bodyPr>
+            <a:lstStyle/>
+            <a:p>
+              <a:pPr algn="r"/>
+              <a:r>
+                <a:rPr lang="en-US" sz="1200" i="1" dirty="0"/>
+                <a:t>training target available (labeled or past data)</a:t>
+              </a:r>
+            </a:p>
+          </p:txBody>
+        </p:sp>
+        <p:sp>
+          <p:nvSpPr>
+            <p:cNvPr id="12" name="Freeform: Shape 13">
+              <a:extLst>
+                <a:ext uri="{FF2B5EF4-FFF2-40B4-BE49-F238E27FC236}">
+                  <a16:creationId xmlns:a16="http://schemas.microsoft.com/office/drawing/2014/main" id="{2778DC91-FE00-BC3E-E08B-55CE2285DF86}"/>
+                </a:ext>
+              </a:extLst>
+            </p:cNvPr>
+            <p:cNvSpPr/>
+            <p:nvPr/>
+          </p:nvSpPr>
+          <p:spPr>
+            <a:xfrm>
+              <a:off x="1416083" y="2189803"/>
+              <a:ext cx="535450" cy="666750"/>
+            </a:xfrm>
+            <a:custGeom>
+              <a:avLst/>
+              <a:gdLst>
+                <a:gd name="connsiteX0" fmla="*/ 535450 w 535450"/>
+                <a:gd name="connsiteY0" fmla="*/ 0 h 666750"/>
+                <a:gd name="connsiteX1" fmla="*/ 68725 w 535450"/>
+                <a:gd name="connsiteY1" fmla="*/ 466725 h 666750"/>
+                <a:gd name="connsiteX2" fmla="*/ 11575 w 535450"/>
+                <a:gd name="connsiteY2" fmla="*/ 666750 h 666750"/>
+              </a:gdLst>
+              <a:ahLst/>
+              <a:cxnLst>
+                <a:cxn ang="0">
+                  <a:pos x="connsiteX0" y="connsiteY0"/>
+                </a:cxn>
+                <a:cxn ang="0">
+                  <a:pos x="connsiteX1" y="connsiteY1"/>
+                </a:cxn>
+                <a:cxn ang="0">
+                  <a:pos x="connsiteX2" y="connsiteY2"/>
+                </a:cxn>
+              </a:cxnLst>
+              <a:rect l="l" t="t" r="r" b="b"/>
+              <a:pathLst>
+                <a:path w="535450" h="666750">
+                  <a:moveTo>
+                    <a:pt x="535450" y="0"/>
+                  </a:moveTo>
+                  <a:cubicBezTo>
+                    <a:pt x="345743" y="177800"/>
+                    <a:pt x="156037" y="355600"/>
+                    <a:pt x="68725" y="466725"/>
+                  </a:cubicBezTo>
+                  <a:cubicBezTo>
+                    <a:pt x="-18587" y="577850"/>
+                    <a:pt x="-3506" y="622300"/>
+                    <a:pt x="11575" y="666750"/>
+                  </a:cubicBezTo>
+                </a:path>
+              </a:pathLst>
+            </a:custGeom>
+            <a:noFill/>
+            <a:ln w="38100">
+              <a:solidFill>
+                <a:schemeClr val="accent2"/>
+              </a:solidFill>
+            </a:ln>
+            <a:effectLst/>
+          </p:spPr>
+          <p:style>
+            <a:lnRef idx="1">
+              <a:schemeClr val="accent1"/>
+            </a:lnRef>
+            <a:fillRef idx="3">
+              <a:schemeClr val="accent1"/>
+            </a:fillRef>
+            <a:effectRef idx="2">
+              <a:schemeClr val="accent1"/>
+            </a:effectRef>
+            <a:fontRef idx="minor">
+              <a:schemeClr val="lt1"/>
+            </a:fontRef>
+          </p:style>
+          <p:txBody>
+            <a:bodyPr rtlCol="0" anchor="ctr"/>
+            <a:lstStyle/>
+            <a:p>
+              <a:pPr algn="ctr"/>
+              <a:endParaRPr lang="en-US"/>
+            </a:p>
+          </p:txBody>
+        </p:sp>
+        <p:sp>
+          <p:nvSpPr>
+            <p:cNvPr id="13" name="TextBox 12">
+              <a:extLst>
+                <a:ext uri="{FF2B5EF4-FFF2-40B4-BE49-F238E27FC236}">
+                  <a16:creationId xmlns:a16="http://schemas.microsoft.com/office/drawing/2014/main" id="{936DE158-2CB9-4E5E-CB86-3EE1CB683BFB}"/>
+                </a:ext>
+              </a:extLst>
+            </p:cNvPr>
+            <p:cNvSpPr txBox="1"/>
+            <p:nvPr/>
+          </p:nvSpPr>
+          <p:spPr>
+            <a:xfrm>
+              <a:off x="218591" y="2904478"/>
+              <a:ext cx="2250830" cy="338554"/>
+            </a:xfrm>
+            <a:prstGeom prst="rect">
+              <a:avLst/>
+            </a:prstGeom>
+            <a:noFill/>
+          </p:spPr>
+          <p:txBody>
+            <a:bodyPr wrap="square" rtlCol="0">
+              <a:spAutoFit/>
+            </a:bodyPr>
+            <a:lstStyle/>
+            <a:p>
+              <a:pPr algn="ctr"/>
+              <a:r>
+                <a:rPr lang="en-US" sz="1600" b="1" dirty="0">
+                  <a:solidFill>
+                    <a:srgbClr val="0070C0"/>
+                  </a:solidFill>
+                  <a:latin typeface="AccordAlternate" panose="02000000000000000000" pitchFamily="50" charset="0"/>
+                </a:rPr>
+                <a:t>CLASSIFICATION</a:t>
+              </a:r>
+            </a:p>
+          </p:txBody>
+        </p:sp>
+        <p:sp>
+          <p:nvSpPr>
+            <p:cNvPr id="14" name="Freeform: Shape 17">
+              <a:extLst>
+                <a:ext uri="{FF2B5EF4-FFF2-40B4-BE49-F238E27FC236}">
+                  <a16:creationId xmlns:a16="http://schemas.microsoft.com/office/drawing/2014/main" id="{2656966F-ABA6-3D2B-CA9F-2C680600270D}"/>
+                </a:ext>
+              </a:extLst>
+            </p:cNvPr>
+            <p:cNvSpPr/>
+            <p:nvPr/>
+          </p:nvSpPr>
+          <p:spPr>
+            <a:xfrm flipH="1">
+              <a:off x="2585690" y="2230474"/>
+              <a:ext cx="535450" cy="1519413"/>
+            </a:xfrm>
+            <a:custGeom>
+              <a:avLst/>
+              <a:gdLst>
+                <a:gd name="connsiteX0" fmla="*/ 535450 w 535450"/>
+                <a:gd name="connsiteY0" fmla="*/ 0 h 666750"/>
+                <a:gd name="connsiteX1" fmla="*/ 68725 w 535450"/>
+                <a:gd name="connsiteY1" fmla="*/ 466725 h 666750"/>
+                <a:gd name="connsiteX2" fmla="*/ 11575 w 535450"/>
+                <a:gd name="connsiteY2" fmla="*/ 666750 h 666750"/>
+              </a:gdLst>
+              <a:ahLst/>
+              <a:cxnLst>
+                <a:cxn ang="0">
+                  <a:pos x="connsiteX0" y="connsiteY0"/>
+                </a:cxn>
+                <a:cxn ang="0">
+                  <a:pos x="connsiteX1" y="connsiteY1"/>
+                </a:cxn>
+                <a:cxn ang="0">
+                  <a:pos x="connsiteX2" y="connsiteY2"/>
+                </a:cxn>
+              </a:cxnLst>
+              <a:rect l="l" t="t" r="r" b="b"/>
+              <a:pathLst>
+                <a:path w="535450" h="666750">
+                  <a:moveTo>
+                    <a:pt x="535450" y="0"/>
+                  </a:moveTo>
+                  <a:cubicBezTo>
+                    <a:pt x="345743" y="177800"/>
+                    <a:pt x="156037" y="355600"/>
+                    <a:pt x="68725" y="466725"/>
+                  </a:cubicBezTo>
+                  <a:cubicBezTo>
+                    <a:pt x="-18587" y="577850"/>
+                    <a:pt x="-3506" y="622300"/>
+                    <a:pt x="11575" y="666750"/>
+                  </a:cubicBezTo>
+                </a:path>
+              </a:pathLst>
+            </a:custGeom>
+            <a:noFill/>
+            <a:ln w="38100">
+              <a:solidFill>
+                <a:schemeClr val="accent2"/>
+              </a:solidFill>
+            </a:ln>
+            <a:effectLst/>
+          </p:spPr>
+          <p:style>
+            <a:lnRef idx="1">
+              <a:schemeClr val="accent1"/>
+            </a:lnRef>
+            <a:fillRef idx="3">
+              <a:schemeClr val="accent1"/>
+            </a:fillRef>
+            <a:effectRef idx="2">
+              <a:schemeClr val="accent1"/>
+            </a:effectRef>
+            <a:fontRef idx="minor">
+              <a:schemeClr val="lt1"/>
+            </a:fontRef>
+          </p:style>
+          <p:txBody>
+            <a:bodyPr rtlCol="0" anchor="ctr"/>
+            <a:lstStyle/>
+            <a:p>
+              <a:pPr algn="ctr"/>
+              <a:endParaRPr lang="en-US"/>
+            </a:p>
+          </p:txBody>
+        </p:sp>
+        <p:sp>
+          <p:nvSpPr>
+            <p:cNvPr id="15" name="TextBox 14">
+              <a:extLst>
+                <a:ext uri="{FF2B5EF4-FFF2-40B4-BE49-F238E27FC236}">
+                  <a16:creationId xmlns:a16="http://schemas.microsoft.com/office/drawing/2014/main" id="{F341A73B-65A1-834D-E2F6-972096888130}"/>
+                </a:ext>
+              </a:extLst>
+            </p:cNvPr>
+            <p:cNvSpPr txBox="1"/>
+            <p:nvPr/>
+          </p:nvSpPr>
+          <p:spPr>
+            <a:xfrm>
+              <a:off x="2039499" y="3862138"/>
+              <a:ext cx="2250830" cy="338554"/>
+            </a:xfrm>
+            <a:prstGeom prst="rect">
+              <a:avLst/>
+            </a:prstGeom>
+            <a:noFill/>
+          </p:spPr>
+          <p:txBody>
+            <a:bodyPr wrap="square" rtlCol="0">
+              <a:spAutoFit/>
+            </a:bodyPr>
+            <a:lstStyle/>
+            <a:p>
+              <a:pPr algn="ctr"/>
+              <a:r>
+                <a:rPr lang="en-US" sz="1600" b="1" dirty="0">
+                  <a:solidFill>
+                    <a:srgbClr val="0070C0"/>
+                  </a:solidFill>
+                  <a:latin typeface="AccordAlternate" panose="02000000000000000000" pitchFamily="50" charset="0"/>
+                </a:rPr>
+                <a:t>REGRESSION</a:t>
+              </a:r>
+            </a:p>
+          </p:txBody>
+        </p:sp>
+        <p:pic>
+          <p:nvPicPr>
+            <p:cNvPr id="16" name="Picture 15" descr="Diagram&#10;&#10;Description automatically generated">
+              <a:extLst>
+                <a:ext uri="{FF2B5EF4-FFF2-40B4-BE49-F238E27FC236}">
+                  <a16:creationId xmlns:a16="http://schemas.microsoft.com/office/drawing/2014/main" id="{1AC57D1E-86B8-94B6-954C-A7F1ED7AAE12}"/>
+                </a:ext>
+              </a:extLst>
+            </p:cNvPr>
+            <p:cNvPicPr>
+              <a:picLocks noChangeAspect="1"/>
+            </p:cNvPicPr>
+            <p:nvPr/>
+          </p:nvPicPr>
+          <p:blipFill rotWithShape="1">
+            <a:blip r:embed="rId2"/>
+            <a:srcRect t="51831" r="83312" b="27845"/>
+            <a:stretch/>
+          </p:blipFill>
+          <p:spPr>
+            <a:xfrm>
+              <a:off x="578937" y="3230147"/>
+              <a:ext cx="1259094" cy="1057275"/>
+            </a:xfrm>
+            <a:prstGeom prst="rect">
+              <a:avLst/>
+            </a:prstGeom>
+          </p:spPr>
+        </p:pic>
+        <p:cxnSp>
+          <p:nvCxnSpPr>
+            <p:cNvPr id="17" name="Straight Connector 16">
+              <a:extLst>
+                <a:ext uri="{FF2B5EF4-FFF2-40B4-BE49-F238E27FC236}">
+                  <a16:creationId xmlns:a16="http://schemas.microsoft.com/office/drawing/2014/main" id="{BD5FB5A8-B936-EEAC-5DB2-F776F2811DB8}"/>
+                </a:ext>
+              </a:extLst>
+            </p:cNvPr>
+            <p:cNvCxnSpPr>
+              <a:cxnSpLocks/>
+            </p:cNvCxnSpPr>
+            <p:nvPr/>
+          </p:nvCxnSpPr>
+          <p:spPr>
+            <a:xfrm flipH="1" flipV="1">
+              <a:off x="4838232" y="852611"/>
+              <a:ext cx="727413" cy="1085381"/>
+            </a:xfrm>
+            <a:prstGeom prst="line">
+              <a:avLst/>
+            </a:prstGeom>
+            <a:ln w="38100" cmpd="sng">
+              <a:solidFill>
+                <a:schemeClr val="accent2"/>
+              </a:solidFill>
+            </a:ln>
+            <a:effectLst/>
+          </p:spPr>
+          <p:style>
+            <a:lnRef idx="2">
+              <a:schemeClr val="accent1"/>
+            </a:lnRef>
+            <a:fillRef idx="0">
+              <a:schemeClr val="accent1"/>
+            </a:fillRef>
+            <a:effectRef idx="1">
+              <a:schemeClr val="accent1"/>
+            </a:effectRef>
+            <a:fontRef idx="minor">
+              <a:schemeClr val="tx1"/>
+            </a:fontRef>
+          </p:style>
+        </p:cxnSp>
+        <p:sp>
+          <p:nvSpPr>
+            <p:cNvPr id="18" name="TextBox 17">
+              <a:extLst>
+                <a:ext uri="{FF2B5EF4-FFF2-40B4-BE49-F238E27FC236}">
+                  <a16:creationId xmlns:a16="http://schemas.microsoft.com/office/drawing/2014/main" id="{484E9DCE-D052-2EF3-C9DA-047B794C812C}"/>
+                </a:ext>
+              </a:extLst>
+            </p:cNvPr>
+            <p:cNvSpPr txBox="1"/>
+            <p:nvPr/>
+          </p:nvSpPr>
+          <p:spPr>
+            <a:xfrm>
+              <a:off x="4718386" y="1898003"/>
+              <a:ext cx="1894755" cy="400110"/>
+            </a:xfrm>
+            <a:prstGeom prst="rect">
+              <a:avLst/>
+            </a:prstGeom>
+            <a:noFill/>
+          </p:spPr>
+          <p:txBody>
+            <a:bodyPr wrap="square" rtlCol="0">
+              <a:spAutoFit/>
+            </a:bodyPr>
+            <a:lstStyle/>
+            <a:p>
+              <a:pPr algn="ctr"/>
+              <a:r>
+                <a:rPr lang="en-US" sz="2000" b="1" dirty="0">
+                  <a:solidFill>
+                    <a:srgbClr val="00B050"/>
+                  </a:solidFill>
+                  <a:latin typeface="AccordAlternate" panose="02000000000000000000" pitchFamily="50" charset="0"/>
+                </a:rPr>
+                <a:t>UNSUPERVISED</a:t>
+              </a:r>
+            </a:p>
+          </p:txBody>
+        </p:sp>
+        <p:sp>
+          <p:nvSpPr>
+            <p:cNvPr id="19" name="TextBox 18">
+              <a:extLst>
+                <a:ext uri="{FF2B5EF4-FFF2-40B4-BE49-F238E27FC236}">
+                  <a16:creationId xmlns:a16="http://schemas.microsoft.com/office/drawing/2014/main" id="{B86F7B23-911D-8AED-D2A4-B4E1D83C37D7}"/>
+                </a:ext>
+              </a:extLst>
+            </p:cNvPr>
+            <p:cNvSpPr txBox="1"/>
+            <p:nvPr/>
+          </p:nvSpPr>
+          <p:spPr>
+            <a:xfrm>
+              <a:off x="5321765" y="1227328"/>
+              <a:ext cx="1291376" cy="461665"/>
+            </a:xfrm>
+            <a:prstGeom prst="rect">
+              <a:avLst/>
+            </a:prstGeom>
+            <a:noFill/>
+          </p:spPr>
+          <p:txBody>
+            <a:bodyPr wrap="square" rtlCol="0">
+              <a:spAutoFit/>
+            </a:bodyPr>
+            <a:lstStyle/>
+            <a:p>
+              <a:r>
+                <a:rPr lang="en-US" sz="1200" i="1" dirty="0"/>
+                <a:t>data not labeled in any way</a:t>
+              </a:r>
+            </a:p>
+          </p:txBody>
+        </p:sp>
+        <p:sp>
+          <p:nvSpPr>
+            <p:cNvPr id="20" name="Freeform: Shape 27">
+              <a:extLst>
+                <a:ext uri="{FF2B5EF4-FFF2-40B4-BE49-F238E27FC236}">
+                  <a16:creationId xmlns:a16="http://schemas.microsoft.com/office/drawing/2014/main" id="{5DD312DA-D75C-143A-2CC8-EA04CF03853E}"/>
+                </a:ext>
+              </a:extLst>
+            </p:cNvPr>
+            <p:cNvSpPr/>
+            <p:nvPr/>
+          </p:nvSpPr>
+          <p:spPr>
+            <a:xfrm>
+              <a:off x="4919093" y="2312708"/>
+              <a:ext cx="535450" cy="650613"/>
+            </a:xfrm>
+            <a:custGeom>
+              <a:avLst/>
+              <a:gdLst>
+                <a:gd name="connsiteX0" fmla="*/ 535450 w 535450"/>
+                <a:gd name="connsiteY0" fmla="*/ 0 h 666750"/>
+                <a:gd name="connsiteX1" fmla="*/ 68725 w 535450"/>
+                <a:gd name="connsiteY1" fmla="*/ 466725 h 666750"/>
+                <a:gd name="connsiteX2" fmla="*/ 11575 w 535450"/>
+                <a:gd name="connsiteY2" fmla="*/ 666750 h 666750"/>
+              </a:gdLst>
+              <a:ahLst/>
+              <a:cxnLst>
+                <a:cxn ang="0">
+                  <a:pos x="connsiteX0" y="connsiteY0"/>
+                </a:cxn>
+                <a:cxn ang="0">
+                  <a:pos x="connsiteX1" y="connsiteY1"/>
+                </a:cxn>
+                <a:cxn ang="0">
+                  <a:pos x="connsiteX2" y="connsiteY2"/>
+                </a:cxn>
+              </a:cxnLst>
+              <a:rect l="l" t="t" r="r" b="b"/>
+              <a:pathLst>
+                <a:path w="535450" h="666750">
+                  <a:moveTo>
+                    <a:pt x="535450" y="0"/>
+                  </a:moveTo>
+                  <a:cubicBezTo>
+                    <a:pt x="345743" y="177800"/>
+                    <a:pt x="156037" y="355600"/>
+                    <a:pt x="68725" y="466725"/>
+                  </a:cubicBezTo>
+                  <a:cubicBezTo>
+                    <a:pt x="-18587" y="577850"/>
+                    <a:pt x="-3506" y="622300"/>
+                    <a:pt x="11575" y="666750"/>
+                  </a:cubicBezTo>
+                </a:path>
+              </a:pathLst>
+            </a:custGeom>
+            <a:noFill/>
+            <a:ln w="38100">
+              <a:solidFill>
+                <a:schemeClr val="accent2"/>
+              </a:solidFill>
+            </a:ln>
+            <a:effectLst/>
+          </p:spPr>
+          <p:style>
+            <a:lnRef idx="1">
+              <a:schemeClr val="accent1"/>
+            </a:lnRef>
+            <a:fillRef idx="3">
+              <a:schemeClr val="accent1"/>
+            </a:fillRef>
+            <a:effectRef idx="2">
+              <a:schemeClr val="accent1"/>
+            </a:effectRef>
+            <a:fontRef idx="minor">
+              <a:schemeClr val="lt1"/>
+            </a:fontRef>
+          </p:style>
+          <p:txBody>
+            <a:bodyPr rtlCol="0" anchor="ctr"/>
+            <a:lstStyle/>
+            <a:p>
+              <a:pPr algn="ctr"/>
+              <a:endParaRPr lang="en-US"/>
+            </a:p>
+          </p:txBody>
+        </p:sp>
+        <p:sp>
+          <p:nvSpPr>
+            <p:cNvPr id="21" name="TextBox 20">
+              <a:extLst>
+                <a:ext uri="{FF2B5EF4-FFF2-40B4-BE49-F238E27FC236}">
+                  <a16:creationId xmlns:a16="http://schemas.microsoft.com/office/drawing/2014/main" id="{BD6A2B84-33E1-982F-840A-7515D558328F}"/>
+                </a:ext>
+              </a:extLst>
+            </p:cNvPr>
+            <p:cNvSpPr txBox="1"/>
+            <p:nvPr/>
+          </p:nvSpPr>
+          <p:spPr>
+            <a:xfrm>
+              <a:off x="3573072" y="3016605"/>
+              <a:ext cx="2250830" cy="338554"/>
+            </a:xfrm>
+            <a:prstGeom prst="rect">
+              <a:avLst/>
+            </a:prstGeom>
+            <a:noFill/>
+          </p:spPr>
+          <p:txBody>
+            <a:bodyPr wrap="square" rtlCol="0">
+              <a:spAutoFit/>
+            </a:bodyPr>
+            <a:lstStyle/>
+            <a:p>
+              <a:pPr algn="ctr"/>
+              <a:r>
+                <a:rPr lang="en-US" sz="1600" b="1" dirty="0">
+                  <a:solidFill>
+                    <a:srgbClr val="00B050"/>
+                  </a:solidFill>
+                  <a:latin typeface="AccordAlternate" panose="02000000000000000000" pitchFamily="50" charset="0"/>
+                </a:rPr>
+                <a:t>CLUSTERING</a:t>
+              </a:r>
+            </a:p>
+          </p:txBody>
+        </p:sp>
+        <p:sp>
+          <p:nvSpPr>
+            <p:cNvPr id="22" name="Freeform: Shape 30">
+              <a:extLst>
+                <a:ext uri="{FF2B5EF4-FFF2-40B4-BE49-F238E27FC236}">
+                  <a16:creationId xmlns:a16="http://schemas.microsoft.com/office/drawing/2014/main" id="{BBDAE37F-A813-3AE8-FD0D-56F014BCFAEC}"/>
+                </a:ext>
+              </a:extLst>
+            </p:cNvPr>
+            <p:cNvSpPr/>
+            <p:nvPr/>
+          </p:nvSpPr>
+          <p:spPr>
+            <a:xfrm rot="20668895" flipH="1">
+              <a:off x="6093685" y="2204099"/>
+              <a:ext cx="437918" cy="1964299"/>
+            </a:xfrm>
+            <a:custGeom>
+              <a:avLst/>
+              <a:gdLst>
+                <a:gd name="connsiteX0" fmla="*/ 535450 w 535450"/>
+                <a:gd name="connsiteY0" fmla="*/ 0 h 666750"/>
+                <a:gd name="connsiteX1" fmla="*/ 68725 w 535450"/>
+                <a:gd name="connsiteY1" fmla="*/ 466725 h 666750"/>
+                <a:gd name="connsiteX2" fmla="*/ 11575 w 535450"/>
+                <a:gd name="connsiteY2" fmla="*/ 666750 h 666750"/>
+                <a:gd name="connsiteX0" fmla="*/ 484300 w 484300"/>
+                <a:gd name="connsiteY0" fmla="*/ 0 h 1387358"/>
+                <a:gd name="connsiteX1" fmla="*/ 17575 w 484300"/>
+                <a:gd name="connsiteY1" fmla="*/ 466725 h 1387358"/>
+                <a:gd name="connsiteX2" fmla="*/ 210979 w 484300"/>
+                <a:gd name="connsiteY2" fmla="*/ 1387358 h 1387358"/>
+                <a:gd name="connsiteX0" fmla="*/ 277301 w 277301"/>
+                <a:gd name="connsiteY0" fmla="*/ 0 h 1387358"/>
+                <a:gd name="connsiteX1" fmla="*/ 102889 w 277301"/>
+                <a:gd name="connsiteY1" fmla="*/ 637638 h 1387358"/>
+                <a:gd name="connsiteX2" fmla="*/ 3980 w 277301"/>
+                <a:gd name="connsiteY2" fmla="*/ 1387358 h 1387358"/>
+                <a:gd name="connsiteX0" fmla="*/ 274461 w 274461"/>
+                <a:gd name="connsiteY0" fmla="*/ 0 h 1387358"/>
+                <a:gd name="connsiteX1" fmla="*/ 100049 w 274461"/>
+                <a:gd name="connsiteY1" fmla="*/ 637638 h 1387358"/>
+                <a:gd name="connsiteX2" fmla="*/ 1140 w 274461"/>
+                <a:gd name="connsiteY2" fmla="*/ 1387358 h 1387358"/>
+                <a:gd name="connsiteX0" fmla="*/ 274271 w 274271"/>
+                <a:gd name="connsiteY0" fmla="*/ 0 h 1387358"/>
+                <a:gd name="connsiteX1" fmla="*/ 129687 w 274271"/>
+                <a:gd name="connsiteY1" fmla="*/ 642257 h 1387358"/>
+                <a:gd name="connsiteX2" fmla="*/ 950 w 274271"/>
+                <a:gd name="connsiteY2" fmla="*/ 1387358 h 1387358"/>
+                <a:gd name="connsiteX0" fmla="*/ 274271 w 274271"/>
+                <a:gd name="connsiteY0" fmla="*/ 0 h 1387358"/>
+                <a:gd name="connsiteX1" fmla="*/ 129687 w 274271"/>
+                <a:gd name="connsiteY1" fmla="*/ 642257 h 1387358"/>
+                <a:gd name="connsiteX2" fmla="*/ 950 w 274271"/>
+                <a:gd name="connsiteY2" fmla="*/ 1387358 h 1387358"/>
+                <a:gd name="connsiteX0" fmla="*/ 274271 w 274271"/>
+                <a:gd name="connsiteY0" fmla="*/ 0 h 1387358"/>
+                <a:gd name="connsiteX1" fmla="*/ 129687 w 274271"/>
+                <a:gd name="connsiteY1" fmla="*/ 642257 h 1387358"/>
+                <a:gd name="connsiteX2" fmla="*/ 950 w 274271"/>
+                <a:gd name="connsiteY2" fmla="*/ 1387358 h 1387358"/>
+              </a:gdLst>
+              <a:ahLst/>
+              <a:cxnLst>
+                <a:cxn ang="0">
+                  <a:pos x="connsiteX0" y="connsiteY0"/>
+                </a:cxn>
+                <a:cxn ang="0">
+                  <a:pos x="connsiteX1" y="connsiteY1"/>
+                </a:cxn>
+                <a:cxn ang="0">
+                  <a:pos x="connsiteX2" y="connsiteY2"/>
+                </a:cxn>
+              </a:cxnLst>
+              <a:rect l="l" t="t" r="r" b="b"/>
+              <a:pathLst>
+                <a:path w="274271" h="1387358">
+                  <a:moveTo>
+                    <a:pt x="274271" y="0"/>
+                  </a:moveTo>
+                  <a:cubicBezTo>
+                    <a:pt x="84564" y="177800"/>
+                    <a:pt x="145413" y="526513"/>
+                    <a:pt x="129687" y="642257"/>
+                  </a:cubicBezTo>
+                  <a:cubicBezTo>
+                    <a:pt x="155721" y="808814"/>
+                    <a:pt x="-14131" y="1342908"/>
+                    <a:pt x="950" y="1387358"/>
+                  </a:cubicBezTo>
+                </a:path>
+              </a:pathLst>
+            </a:custGeom>
+            <a:noFill/>
+            <a:ln w="38100">
+              <a:solidFill>
+                <a:schemeClr val="accent2"/>
+              </a:solidFill>
+            </a:ln>
+            <a:effectLst/>
+          </p:spPr>
+          <p:style>
+            <a:lnRef idx="1">
+              <a:schemeClr val="accent1"/>
+            </a:lnRef>
+            <a:fillRef idx="3">
+              <a:schemeClr val="accent1"/>
+            </a:fillRef>
+            <a:effectRef idx="2">
+              <a:schemeClr val="accent1"/>
+            </a:effectRef>
+            <a:fontRef idx="minor">
+              <a:schemeClr val="lt1"/>
+            </a:fontRef>
+          </p:style>
+          <p:txBody>
+            <a:bodyPr rtlCol="0" anchor="ctr"/>
+            <a:lstStyle/>
+            <a:p>
+              <a:pPr algn="ctr"/>
+              <a:endParaRPr lang="en-US"/>
+            </a:p>
+          </p:txBody>
+        </p:sp>
+        <p:sp>
+          <p:nvSpPr>
+            <p:cNvPr id="23" name="TextBox 22">
+              <a:extLst>
+                <a:ext uri="{FF2B5EF4-FFF2-40B4-BE49-F238E27FC236}">
+                  <a16:creationId xmlns:a16="http://schemas.microsoft.com/office/drawing/2014/main" id="{8ABBDFE6-03DC-E3D6-B263-C71FF990B7E6}"/>
+                </a:ext>
+              </a:extLst>
+            </p:cNvPr>
+            <p:cNvSpPr txBox="1"/>
+            <p:nvPr/>
+          </p:nvSpPr>
+          <p:spPr>
+            <a:xfrm>
+              <a:off x="5881412" y="4057574"/>
+              <a:ext cx="2821353" cy="338554"/>
+            </a:xfrm>
+            <a:prstGeom prst="rect">
+              <a:avLst/>
+            </a:prstGeom>
+            <a:noFill/>
+          </p:spPr>
+          <p:txBody>
+            <a:bodyPr wrap="square" rtlCol="0">
+              <a:spAutoFit/>
+            </a:bodyPr>
+            <a:lstStyle/>
+            <a:p>
+              <a:pPr algn="ctr"/>
+              <a:r>
+                <a:rPr lang="en-US" sz="1600" b="1" dirty="0">
+                  <a:solidFill>
+                    <a:srgbClr val="00B050"/>
+                  </a:solidFill>
+                  <a:latin typeface="AccordAlternate" panose="02000000000000000000" pitchFamily="50" charset="0"/>
+                </a:rPr>
+                <a:t>DIMENSIONALITY REDUCTION</a:t>
+              </a:r>
+            </a:p>
+          </p:txBody>
+        </p:sp>
+        <p:pic>
+          <p:nvPicPr>
+            <p:cNvPr id="24" name="Picture 23" descr="Diagram&#10;&#10;Description automatically generated">
+              <a:extLst>
+                <a:ext uri="{FF2B5EF4-FFF2-40B4-BE49-F238E27FC236}">
+                  <a16:creationId xmlns:a16="http://schemas.microsoft.com/office/drawing/2014/main" id="{961DCB45-D699-7724-4A20-3DD518F6E432}"/>
+                </a:ext>
+              </a:extLst>
+            </p:cNvPr>
+            <p:cNvPicPr>
+              <a:picLocks noChangeAspect="1"/>
+            </p:cNvPicPr>
+            <p:nvPr/>
+          </p:nvPicPr>
+          <p:blipFill rotWithShape="1">
+            <a:blip r:embed="rId2"/>
+            <a:srcRect l="60107" t="85514" r="25013" b="-26"/>
+            <a:stretch/>
+          </p:blipFill>
+          <p:spPr>
+            <a:xfrm>
+              <a:off x="6029678" y="4391815"/>
+              <a:ext cx="907593" cy="610367"/>
+            </a:xfrm>
+            <a:prstGeom prst="rect">
+              <a:avLst/>
+            </a:prstGeom>
+          </p:spPr>
+        </p:pic>
+        <p:sp>
+          <p:nvSpPr>
+            <p:cNvPr id="25" name="Freeform: Shape 36">
+              <a:extLst>
+                <a:ext uri="{FF2B5EF4-FFF2-40B4-BE49-F238E27FC236}">
+                  <a16:creationId xmlns:a16="http://schemas.microsoft.com/office/drawing/2014/main" id="{4CAE65A6-0263-B75A-37D3-871BCEF91887}"/>
+                </a:ext>
+              </a:extLst>
+            </p:cNvPr>
+            <p:cNvSpPr/>
+            <p:nvPr/>
+          </p:nvSpPr>
+          <p:spPr>
+            <a:xfrm flipH="1">
+              <a:off x="6051333" y="2285243"/>
+              <a:ext cx="1271385" cy="461665"/>
+            </a:xfrm>
+            <a:custGeom>
+              <a:avLst/>
+              <a:gdLst>
+                <a:gd name="connsiteX0" fmla="*/ 535450 w 535450"/>
+                <a:gd name="connsiteY0" fmla="*/ 0 h 666750"/>
+                <a:gd name="connsiteX1" fmla="*/ 68725 w 535450"/>
+                <a:gd name="connsiteY1" fmla="*/ 466725 h 666750"/>
+                <a:gd name="connsiteX2" fmla="*/ 11575 w 535450"/>
+                <a:gd name="connsiteY2" fmla="*/ 666750 h 666750"/>
+              </a:gdLst>
+              <a:ahLst/>
+              <a:cxnLst>
+                <a:cxn ang="0">
+                  <a:pos x="connsiteX0" y="connsiteY0"/>
+                </a:cxn>
+                <a:cxn ang="0">
+                  <a:pos x="connsiteX1" y="connsiteY1"/>
+                </a:cxn>
+                <a:cxn ang="0">
+                  <a:pos x="connsiteX2" y="connsiteY2"/>
+                </a:cxn>
+              </a:cxnLst>
+              <a:rect l="l" t="t" r="r" b="b"/>
+              <a:pathLst>
+                <a:path w="535450" h="666750">
+                  <a:moveTo>
+                    <a:pt x="535450" y="0"/>
+                  </a:moveTo>
+                  <a:cubicBezTo>
+                    <a:pt x="345743" y="177800"/>
+                    <a:pt x="156037" y="355600"/>
+                    <a:pt x="68725" y="466725"/>
+                  </a:cubicBezTo>
+                  <a:cubicBezTo>
+                    <a:pt x="-18587" y="577850"/>
+                    <a:pt x="-3506" y="622300"/>
+                    <a:pt x="11575" y="666750"/>
+                  </a:cubicBezTo>
+                </a:path>
+              </a:pathLst>
+            </a:custGeom>
+            <a:noFill/>
+            <a:ln w="38100">
+              <a:solidFill>
+                <a:schemeClr val="accent2"/>
+              </a:solidFill>
+            </a:ln>
+            <a:effectLst/>
+          </p:spPr>
+          <p:style>
+            <a:lnRef idx="1">
+              <a:schemeClr val="accent1"/>
+            </a:lnRef>
+            <a:fillRef idx="3">
+              <a:schemeClr val="accent1"/>
+            </a:fillRef>
+            <a:effectRef idx="2">
+              <a:schemeClr val="accent1"/>
+            </a:effectRef>
+            <a:fontRef idx="minor">
+              <a:schemeClr val="lt1"/>
+            </a:fontRef>
+          </p:style>
+          <p:txBody>
+            <a:bodyPr rtlCol="0" anchor="ctr"/>
+            <a:lstStyle/>
+            <a:p>
+              <a:pPr algn="ctr"/>
+              <a:endParaRPr lang="en-US"/>
+            </a:p>
+          </p:txBody>
+        </p:sp>
+        <p:sp>
+          <p:nvSpPr>
+            <p:cNvPr id="26" name="TextBox 25">
+              <a:extLst>
+                <a:ext uri="{FF2B5EF4-FFF2-40B4-BE49-F238E27FC236}">
+                  <a16:creationId xmlns:a16="http://schemas.microsoft.com/office/drawing/2014/main" id="{E3D24E2C-B288-8873-2608-F5E4F08869BA}"/>
+                </a:ext>
+              </a:extLst>
+            </p:cNvPr>
+            <p:cNvSpPr txBox="1"/>
+            <p:nvPr/>
+          </p:nvSpPr>
+          <p:spPr>
+            <a:xfrm>
+              <a:off x="6426061" y="2800558"/>
+              <a:ext cx="2250830" cy="338554"/>
+            </a:xfrm>
+            <a:prstGeom prst="rect">
+              <a:avLst/>
+            </a:prstGeom>
+            <a:noFill/>
+          </p:spPr>
+          <p:txBody>
+            <a:bodyPr wrap="square" rtlCol="0">
+              <a:spAutoFit/>
+            </a:bodyPr>
+            <a:lstStyle/>
+            <a:p>
+              <a:pPr algn="ctr"/>
+              <a:r>
+                <a:rPr lang="en-US" sz="1600" b="1" dirty="0">
+                  <a:solidFill>
+                    <a:srgbClr val="00B050"/>
+                  </a:solidFill>
+                  <a:latin typeface="AccordAlternate" panose="02000000000000000000" pitchFamily="50" charset="0"/>
+                </a:rPr>
+                <a:t>ASSOCIATION</a:t>
+              </a:r>
+            </a:p>
+          </p:txBody>
+        </p:sp>
+        <p:pic>
+          <p:nvPicPr>
+            <p:cNvPr id="27" name="Picture 26" descr="Diagram&#10;&#10;Description automatically generated">
+              <a:extLst>
+                <a:ext uri="{FF2B5EF4-FFF2-40B4-BE49-F238E27FC236}">
+                  <a16:creationId xmlns:a16="http://schemas.microsoft.com/office/drawing/2014/main" id="{93AD1EB2-A1EF-D17E-62B8-2F3C8894EFDF}"/>
+                </a:ext>
+              </a:extLst>
+            </p:cNvPr>
+            <p:cNvPicPr>
+              <a:picLocks noChangeAspect="1"/>
+            </p:cNvPicPr>
+            <p:nvPr/>
+          </p:nvPicPr>
+          <p:blipFill rotWithShape="1">
+            <a:blip r:embed="rId2"/>
+            <a:srcRect l="83332" t="61907" r="4206" b="25639"/>
+            <a:stretch/>
+          </p:blipFill>
+          <p:spPr>
+            <a:xfrm>
+              <a:off x="7190512" y="3125401"/>
+              <a:ext cx="940142" cy="647941"/>
+            </a:xfrm>
+            <a:prstGeom prst="rect">
+              <a:avLst/>
+            </a:prstGeom>
+          </p:spPr>
+        </p:pic>
+        <p:sp>
+          <p:nvSpPr>
+            <p:cNvPr id="28" name="Freeform: Shape 42">
+              <a:extLst>
+                <a:ext uri="{FF2B5EF4-FFF2-40B4-BE49-F238E27FC236}">
+                  <a16:creationId xmlns:a16="http://schemas.microsoft.com/office/drawing/2014/main" id="{A83BDB6A-E5B0-EB3E-5DD2-F3B3170C4926}"/>
+                </a:ext>
+              </a:extLst>
+            </p:cNvPr>
+            <p:cNvSpPr/>
+            <p:nvPr/>
+          </p:nvSpPr>
+          <p:spPr>
+            <a:xfrm flipH="1">
+              <a:off x="6029678" y="800810"/>
+              <a:ext cx="3296460" cy="896554"/>
+            </a:xfrm>
+            <a:custGeom>
+              <a:avLst/>
+              <a:gdLst>
+                <a:gd name="connsiteX0" fmla="*/ 535450 w 535450"/>
+                <a:gd name="connsiteY0" fmla="*/ 0 h 666750"/>
+                <a:gd name="connsiteX1" fmla="*/ 68725 w 535450"/>
+                <a:gd name="connsiteY1" fmla="*/ 466725 h 666750"/>
+                <a:gd name="connsiteX2" fmla="*/ 11575 w 535450"/>
+                <a:gd name="connsiteY2" fmla="*/ 666750 h 666750"/>
+                <a:gd name="connsiteX0" fmla="*/ 535450 w 535450"/>
+                <a:gd name="connsiteY0" fmla="*/ 0 h 666750"/>
+                <a:gd name="connsiteX1" fmla="*/ 68725 w 535450"/>
+                <a:gd name="connsiteY1" fmla="*/ 466725 h 666750"/>
+                <a:gd name="connsiteX2" fmla="*/ 11575 w 535450"/>
+                <a:gd name="connsiteY2" fmla="*/ 666750 h 666750"/>
+                <a:gd name="connsiteX0" fmla="*/ 537576 w 537576"/>
+                <a:gd name="connsiteY0" fmla="*/ 0 h 593458"/>
+                <a:gd name="connsiteX1" fmla="*/ 70851 w 537576"/>
+                <a:gd name="connsiteY1" fmla="*/ 466725 h 593458"/>
+                <a:gd name="connsiteX2" fmla="*/ 10594 w 537576"/>
+                <a:gd name="connsiteY2" fmla="*/ 593458 h 593458"/>
+              </a:gdLst>
+              <a:ahLst/>
+              <a:cxnLst>
+                <a:cxn ang="0">
+                  <a:pos x="connsiteX0" y="connsiteY0"/>
+                </a:cxn>
+                <a:cxn ang="0">
+                  <a:pos x="connsiteX1" y="connsiteY1"/>
+                </a:cxn>
+                <a:cxn ang="0">
+                  <a:pos x="connsiteX2" y="connsiteY2"/>
+                </a:cxn>
+              </a:cxnLst>
+              <a:rect l="l" t="t" r="r" b="b"/>
+              <a:pathLst>
+                <a:path w="537576" h="593458">
+                  <a:moveTo>
+                    <a:pt x="537576" y="0"/>
+                  </a:moveTo>
+                  <a:cubicBezTo>
+                    <a:pt x="347869" y="177800"/>
+                    <a:pt x="158163" y="355600"/>
+                    <a:pt x="70851" y="466725"/>
+                  </a:cubicBezTo>
+                  <a:cubicBezTo>
+                    <a:pt x="-16461" y="577850"/>
+                    <a:pt x="-4487" y="549008"/>
+                    <a:pt x="10594" y="593458"/>
+                  </a:cubicBezTo>
+                </a:path>
+              </a:pathLst>
+            </a:custGeom>
+            <a:noFill/>
+            <a:ln w="38100">
+              <a:solidFill>
+                <a:schemeClr val="accent2"/>
+              </a:solidFill>
+            </a:ln>
+            <a:effectLst/>
+          </p:spPr>
+          <p:style>
+            <a:lnRef idx="1">
+              <a:schemeClr val="accent1"/>
+            </a:lnRef>
+            <a:fillRef idx="3">
+              <a:schemeClr val="accent1"/>
+            </a:fillRef>
+            <a:effectRef idx="2">
+              <a:schemeClr val="accent1"/>
+            </a:effectRef>
+            <a:fontRef idx="minor">
+              <a:schemeClr val="lt1"/>
+            </a:fontRef>
+          </p:style>
+          <p:txBody>
+            <a:bodyPr rtlCol="0" anchor="ctr"/>
+            <a:lstStyle/>
+            <a:p>
+              <a:pPr algn="ctr"/>
+              <a:endParaRPr lang="en-US"/>
+            </a:p>
+          </p:txBody>
+        </p:sp>
+        <p:sp>
+          <p:nvSpPr>
+            <p:cNvPr id="29" name="TextBox 28">
+              <a:extLst>
+                <a:ext uri="{FF2B5EF4-FFF2-40B4-BE49-F238E27FC236}">
+                  <a16:creationId xmlns:a16="http://schemas.microsoft.com/office/drawing/2014/main" id="{FADC13BA-CFFF-F2AB-21DA-4BF835835863}"/>
+                </a:ext>
+              </a:extLst>
+            </p:cNvPr>
+            <p:cNvSpPr txBox="1"/>
+            <p:nvPr/>
+          </p:nvSpPr>
+          <p:spPr>
+            <a:xfrm>
+              <a:off x="8437375" y="1705111"/>
+              <a:ext cx="3296461" cy="400110"/>
+            </a:xfrm>
+            <a:prstGeom prst="rect">
+              <a:avLst/>
+            </a:prstGeom>
+            <a:noFill/>
+          </p:spPr>
+          <p:txBody>
+            <a:bodyPr wrap="square" rtlCol="0">
+              <a:spAutoFit/>
+            </a:bodyPr>
+            <a:lstStyle/>
+            <a:p>
+              <a:pPr algn="ctr"/>
+              <a:r>
+                <a:rPr lang="en-US" sz="2000" b="1" dirty="0">
+                  <a:solidFill>
+                    <a:srgbClr val="C00000"/>
+                  </a:solidFill>
+                  <a:latin typeface="AccordAlternate" panose="02000000000000000000" pitchFamily="50" charset="0"/>
+                </a:rPr>
+                <a:t>REINFORCEMENT LEARNING</a:t>
+              </a:r>
+            </a:p>
+          </p:txBody>
+        </p:sp>
+        <p:sp>
+          <p:nvSpPr>
+            <p:cNvPr id="30" name="TextBox 29">
+              <a:extLst>
+                <a:ext uri="{FF2B5EF4-FFF2-40B4-BE49-F238E27FC236}">
+                  <a16:creationId xmlns:a16="http://schemas.microsoft.com/office/drawing/2014/main" id="{48DBF41B-A02D-99FB-E578-AA090619F277}"/>
+                </a:ext>
+              </a:extLst>
+            </p:cNvPr>
+            <p:cNvSpPr txBox="1"/>
+            <p:nvPr/>
+          </p:nvSpPr>
+          <p:spPr>
+            <a:xfrm>
+              <a:off x="8483719" y="878384"/>
+              <a:ext cx="2244006" cy="461665"/>
+            </a:xfrm>
+            <a:prstGeom prst="rect">
+              <a:avLst/>
+            </a:prstGeom>
+            <a:noFill/>
+          </p:spPr>
+          <p:txBody>
+            <a:bodyPr wrap="square" rtlCol="0">
+              <a:spAutoFit/>
+            </a:bodyPr>
+            <a:lstStyle/>
+            <a:p>
+              <a:r>
+                <a:rPr lang="en-US" sz="1200" i="1" dirty="0"/>
+                <a:t>no supervision, but goal-based interaction with environment</a:t>
+              </a:r>
+            </a:p>
+          </p:txBody>
+        </p:sp>
+        <p:sp>
+          <p:nvSpPr>
+            <p:cNvPr id="31" name="Rectangle 30">
+              <a:extLst>
+                <a:ext uri="{FF2B5EF4-FFF2-40B4-BE49-F238E27FC236}">
+                  <a16:creationId xmlns:a16="http://schemas.microsoft.com/office/drawing/2014/main" id="{97EA3C98-2E91-E35E-A600-9903FE1EC405}"/>
+                </a:ext>
+              </a:extLst>
+            </p:cNvPr>
+            <p:cNvSpPr/>
+            <p:nvPr/>
+          </p:nvSpPr>
+          <p:spPr>
+            <a:xfrm>
+              <a:off x="8676891" y="5556559"/>
+              <a:ext cx="3252350" cy="584775"/>
+            </a:xfrm>
+            <a:prstGeom prst="rect">
+              <a:avLst/>
+            </a:prstGeom>
+            <a:solidFill>
+              <a:srgbClr val="FF0000"/>
+            </a:solidFill>
+          </p:spPr>
+          <p:txBody>
+            <a:bodyPr wrap="square">
+              <a:spAutoFit/>
+            </a:bodyPr>
+            <a:lstStyle/>
+            <a:p>
+              <a:pPr indent="-228600" algn="ctr"/>
+              <a:r>
+                <a:rPr lang="en-GB" sz="1600" b="1" dirty="0"/>
+                <a:t>learning by trial-and-error</a:t>
+              </a:r>
+            </a:p>
+            <a:p>
+              <a:pPr indent="-228600" algn="ctr"/>
+              <a:r>
+                <a:rPr lang="en-GB" sz="1600" b="1" dirty="0"/>
+                <a:t>(sequential decision making)</a:t>
+              </a:r>
+            </a:p>
+          </p:txBody>
+        </p:sp>
+        <p:sp>
+          <p:nvSpPr>
+            <p:cNvPr id="32" name="Rectangle 31">
+              <a:extLst>
+                <a:ext uri="{FF2B5EF4-FFF2-40B4-BE49-F238E27FC236}">
+                  <a16:creationId xmlns:a16="http://schemas.microsoft.com/office/drawing/2014/main" id="{CBC8E22A-2FAB-C37C-FECC-32879863F722}"/>
+                </a:ext>
+              </a:extLst>
+            </p:cNvPr>
+            <p:cNvSpPr/>
+            <p:nvPr/>
+          </p:nvSpPr>
+          <p:spPr>
+            <a:xfrm>
+              <a:off x="4617646" y="5561521"/>
+              <a:ext cx="3171744" cy="584775"/>
+            </a:xfrm>
+            <a:prstGeom prst="rect">
+              <a:avLst/>
+            </a:prstGeom>
+            <a:solidFill>
+              <a:srgbClr val="92D050"/>
+            </a:solidFill>
+          </p:spPr>
+          <p:txBody>
+            <a:bodyPr wrap="square">
+              <a:spAutoFit/>
+            </a:bodyPr>
+            <a:lstStyle/>
+            <a:p>
+              <a:pPr indent="-228600" algn="ctr"/>
+              <a:r>
+                <a:rPr lang="en-US" sz="1600" b="1" dirty="0"/>
+                <a:t>learning by observation</a:t>
+              </a:r>
+            </a:p>
+            <a:p>
+              <a:pPr indent="-228600" algn="ctr"/>
+              <a:r>
+                <a:rPr lang="en-US" sz="1600" b="1" dirty="0"/>
+                <a:t>(pattern recognition)</a:t>
+              </a:r>
+            </a:p>
+          </p:txBody>
+        </p:sp>
+        <p:sp>
+          <p:nvSpPr>
+            <p:cNvPr id="33" name="Rectangle 32">
+              <a:extLst>
+                <a:ext uri="{FF2B5EF4-FFF2-40B4-BE49-F238E27FC236}">
+                  <a16:creationId xmlns:a16="http://schemas.microsoft.com/office/drawing/2014/main" id="{75B146D8-ADDB-5E2C-F2D2-B6C2AFFF7293}"/>
+                </a:ext>
+              </a:extLst>
+            </p:cNvPr>
+            <p:cNvSpPr/>
+            <p:nvPr/>
+          </p:nvSpPr>
+          <p:spPr>
+            <a:xfrm>
+              <a:off x="578937" y="5556559"/>
+              <a:ext cx="3151208" cy="584775"/>
+            </a:xfrm>
+            <a:prstGeom prst="rect">
+              <a:avLst/>
+            </a:prstGeom>
+            <a:solidFill>
+              <a:srgbClr val="00B0F0"/>
+            </a:solidFill>
+          </p:spPr>
+          <p:txBody>
+            <a:bodyPr wrap="square">
+              <a:spAutoFit/>
+            </a:bodyPr>
+            <a:lstStyle/>
+            <a:p>
+              <a:pPr indent="-228600" algn="ctr"/>
+              <a:r>
+                <a:rPr lang="en-US" sz="1600" b="1" dirty="0"/>
+                <a:t>learning by teacher </a:t>
+              </a:r>
+            </a:p>
+            <a:p>
+              <a:pPr indent="-228600" algn="ctr"/>
+              <a:r>
+                <a:rPr lang="en-US" sz="1600" b="1" dirty="0"/>
+                <a:t>(high-dimensional curve fitting)</a:t>
+              </a:r>
+            </a:p>
+          </p:txBody>
+        </p:sp>
+        <p:sp>
+          <p:nvSpPr>
+            <p:cNvPr id="34" name="Freeform: Shape 44">
+              <a:extLst>
+                <a:ext uri="{FF2B5EF4-FFF2-40B4-BE49-F238E27FC236}">
+                  <a16:creationId xmlns:a16="http://schemas.microsoft.com/office/drawing/2014/main" id="{31F79D89-FD19-5BCE-89CD-FBE1F5B82566}"/>
+                </a:ext>
+              </a:extLst>
+            </p:cNvPr>
+            <p:cNvSpPr/>
+            <p:nvPr/>
+          </p:nvSpPr>
+          <p:spPr>
+            <a:xfrm rot="16780113" flipV="1">
+              <a:off x="9126569" y="2460533"/>
+              <a:ext cx="748260" cy="45719"/>
+            </a:xfrm>
+            <a:custGeom>
+              <a:avLst/>
+              <a:gdLst>
+                <a:gd name="connsiteX0" fmla="*/ 535450 w 535450"/>
+                <a:gd name="connsiteY0" fmla="*/ 0 h 666750"/>
+                <a:gd name="connsiteX1" fmla="*/ 68725 w 535450"/>
+                <a:gd name="connsiteY1" fmla="*/ 466725 h 666750"/>
+                <a:gd name="connsiteX2" fmla="*/ 11575 w 535450"/>
+                <a:gd name="connsiteY2" fmla="*/ 666750 h 666750"/>
+              </a:gdLst>
+              <a:ahLst/>
+              <a:cxnLst>
+                <a:cxn ang="0">
+                  <a:pos x="connsiteX0" y="connsiteY0"/>
+                </a:cxn>
+                <a:cxn ang="0">
+                  <a:pos x="connsiteX1" y="connsiteY1"/>
+                </a:cxn>
+                <a:cxn ang="0">
+                  <a:pos x="connsiteX2" y="connsiteY2"/>
+                </a:cxn>
+              </a:cxnLst>
+              <a:rect l="l" t="t" r="r" b="b"/>
+              <a:pathLst>
+                <a:path w="535450" h="666750">
+                  <a:moveTo>
+                    <a:pt x="535450" y="0"/>
+                  </a:moveTo>
+                  <a:cubicBezTo>
+                    <a:pt x="345743" y="177800"/>
+                    <a:pt x="156037" y="355600"/>
+                    <a:pt x="68725" y="466725"/>
+                  </a:cubicBezTo>
+                  <a:cubicBezTo>
+                    <a:pt x="-18587" y="577850"/>
+                    <a:pt x="-3506" y="622300"/>
+                    <a:pt x="11575" y="666750"/>
+                  </a:cubicBezTo>
+                </a:path>
+              </a:pathLst>
+            </a:custGeom>
+            <a:noFill/>
+            <a:ln w="38100">
+              <a:solidFill>
+                <a:schemeClr val="accent2"/>
+              </a:solidFill>
+            </a:ln>
+            <a:effectLst/>
+          </p:spPr>
+          <p:style>
+            <a:lnRef idx="1">
+              <a:schemeClr val="accent1"/>
+            </a:lnRef>
+            <a:fillRef idx="3">
+              <a:schemeClr val="accent1"/>
+            </a:fillRef>
+            <a:effectRef idx="2">
+              <a:schemeClr val="accent1"/>
+            </a:effectRef>
+            <a:fontRef idx="minor">
+              <a:schemeClr val="lt1"/>
+            </a:fontRef>
+          </p:style>
+          <p:txBody>
+            <a:bodyPr rtlCol="0" anchor="ctr"/>
+            <a:lstStyle/>
+            <a:p>
+              <a:pPr algn="ctr"/>
+              <a:endParaRPr lang="en-US"/>
+            </a:p>
+          </p:txBody>
+        </p:sp>
+        <p:sp>
+          <p:nvSpPr>
+            <p:cNvPr id="35" name="TextBox 34">
+              <a:extLst>
+                <a:ext uri="{FF2B5EF4-FFF2-40B4-BE49-F238E27FC236}">
+                  <a16:creationId xmlns:a16="http://schemas.microsoft.com/office/drawing/2014/main" id="{A23F74E0-97B2-1B63-1A18-907E0E269C69}"/>
+                </a:ext>
+              </a:extLst>
+            </p:cNvPr>
+            <p:cNvSpPr txBox="1"/>
+            <p:nvPr/>
+          </p:nvSpPr>
+          <p:spPr>
+            <a:xfrm>
+              <a:off x="8640864" y="2960609"/>
+              <a:ext cx="1894755" cy="584775"/>
+            </a:xfrm>
+            <a:prstGeom prst="rect">
+              <a:avLst/>
+            </a:prstGeom>
+            <a:noFill/>
+          </p:spPr>
+          <p:txBody>
+            <a:bodyPr wrap="square" rtlCol="0">
+              <a:spAutoFit/>
+            </a:bodyPr>
+            <a:lstStyle/>
+            <a:p>
+              <a:pPr algn="ctr"/>
+              <a:r>
+                <a:rPr lang="en-US" sz="1600" b="1" dirty="0">
+                  <a:solidFill>
+                    <a:srgbClr val="C00000"/>
+                  </a:solidFill>
+                  <a:latin typeface="AccordAlternate" panose="02000000000000000000" pitchFamily="50" charset="0"/>
+                </a:rPr>
+                <a:t>LEARN STATE OR ACTION VALUES</a:t>
+              </a:r>
+            </a:p>
+          </p:txBody>
+        </p:sp>
+        <p:sp>
+          <p:nvSpPr>
+            <p:cNvPr id="36" name="Freeform: Shape 55">
+              <a:extLst>
+                <a:ext uri="{FF2B5EF4-FFF2-40B4-BE49-F238E27FC236}">
+                  <a16:creationId xmlns:a16="http://schemas.microsoft.com/office/drawing/2014/main" id="{0A770BE1-8426-B62A-37AD-B905AFA21D63}"/>
+                </a:ext>
+              </a:extLst>
+            </p:cNvPr>
+            <p:cNvSpPr/>
+            <p:nvPr/>
+          </p:nvSpPr>
+          <p:spPr>
+            <a:xfrm flipH="1">
+              <a:off x="9985125" y="2105221"/>
+              <a:ext cx="1490090" cy="1419215"/>
+            </a:xfrm>
+            <a:custGeom>
+              <a:avLst/>
+              <a:gdLst>
+                <a:gd name="connsiteX0" fmla="*/ 535450 w 535450"/>
+                <a:gd name="connsiteY0" fmla="*/ 0 h 666750"/>
+                <a:gd name="connsiteX1" fmla="*/ 68725 w 535450"/>
+                <a:gd name="connsiteY1" fmla="*/ 466725 h 666750"/>
+                <a:gd name="connsiteX2" fmla="*/ 11575 w 535450"/>
+                <a:gd name="connsiteY2" fmla="*/ 666750 h 666750"/>
+              </a:gdLst>
+              <a:ahLst/>
+              <a:cxnLst>
+                <a:cxn ang="0">
+                  <a:pos x="connsiteX0" y="connsiteY0"/>
+                </a:cxn>
+                <a:cxn ang="0">
+                  <a:pos x="connsiteX1" y="connsiteY1"/>
+                </a:cxn>
+                <a:cxn ang="0">
+                  <a:pos x="connsiteX2" y="connsiteY2"/>
+                </a:cxn>
+              </a:cxnLst>
+              <a:rect l="l" t="t" r="r" b="b"/>
+              <a:pathLst>
+                <a:path w="535450" h="666750">
+                  <a:moveTo>
+                    <a:pt x="535450" y="0"/>
+                  </a:moveTo>
+                  <a:cubicBezTo>
+                    <a:pt x="345743" y="177800"/>
+                    <a:pt x="156037" y="355600"/>
+                    <a:pt x="68725" y="466725"/>
+                  </a:cubicBezTo>
+                  <a:cubicBezTo>
+                    <a:pt x="-18587" y="577850"/>
+                    <a:pt x="-3506" y="622300"/>
+                    <a:pt x="11575" y="666750"/>
+                  </a:cubicBezTo>
+                </a:path>
+              </a:pathLst>
+            </a:custGeom>
+            <a:noFill/>
+            <a:ln w="38100">
+              <a:solidFill>
+                <a:schemeClr val="accent2"/>
+              </a:solidFill>
+            </a:ln>
+            <a:effectLst/>
+          </p:spPr>
+          <p:style>
+            <a:lnRef idx="1">
+              <a:schemeClr val="accent1"/>
+            </a:lnRef>
+            <a:fillRef idx="3">
+              <a:schemeClr val="accent1"/>
+            </a:fillRef>
+            <a:effectRef idx="2">
+              <a:schemeClr val="accent1"/>
+            </a:effectRef>
+            <a:fontRef idx="minor">
+              <a:schemeClr val="lt1"/>
+            </a:fontRef>
+          </p:style>
+          <p:txBody>
+            <a:bodyPr rtlCol="0" anchor="ctr"/>
+            <a:lstStyle/>
+            <a:p>
+              <a:pPr algn="ctr"/>
+              <a:endParaRPr lang="en-US"/>
+            </a:p>
+          </p:txBody>
+        </p:sp>
+        <p:sp>
+          <p:nvSpPr>
+            <p:cNvPr id="37" name="TextBox 36">
+              <a:extLst>
+                <a:ext uri="{FF2B5EF4-FFF2-40B4-BE49-F238E27FC236}">
+                  <a16:creationId xmlns:a16="http://schemas.microsoft.com/office/drawing/2014/main" id="{38B187C2-E5F5-3E8D-6CEE-E5A492F05D5D}"/>
+                </a:ext>
+              </a:extLst>
+            </p:cNvPr>
+            <p:cNvSpPr txBox="1"/>
+            <p:nvPr/>
+          </p:nvSpPr>
+          <p:spPr>
+            <a:xfrm>
+              <a:off x="10328735" y="3625432"/>
+              <a:ext cx="1894755" cy="584775"/>
+            </a:xfrm>
+            <a:prstGeom prst="rect">
+              <a:avLst/>
+            </a:prstGeom>
+            <a:noFill/>
+          </p:spPr>
+          <p:txBody>
+            <a:bodyPr wrap="square" rtlCol="0">
+              <a:spAutoFit/>
+            </a:bodyPr>
+            <a:lstStyle/>
+            <a:p>
+              <a:pPr algn="ctr"/>
+              <a:r>
+                <a:rPr lang="en-US" sz="1600" b="1" dirty="0">
+                  <a:solidFill>
+                    <a:srgbClr val="C00000"/>
+                  </a:solidFill>
+                  <a:latin typeface="AccordAlternate" panose="02000000000000000000" pitchFamily="50" charset="0"/>
+                </a:rPr>
+                <a:t>LEARN POLICY DIRECTLY</a:t>
+              </a:r>
+            </a:p>
+          </p:txBody>
+        </p:sp>
+        <p:pic>
+          <p:nvPicPr>
+            <p:cNvPr id="38" name="Picture 6" descr="Three Things to Know About Reinforcement Learning - KDnuggets">
+              <a:extLst>
+                <a:ext uri="{FF2B5EF4-FFF2-40B4-BE49-F238E27FC236}">
+                  <a16:creationId xmlns:a16="http://schemas.microsoft.com/office/drawing/2014/main" id="{5A07FD57-AB36-D315-0803-61EC9D6005BB}"/>
+                </a:ext>
+              </a:extLst>
+            </p:cNvPr>
+            <p:cNvPicPr>
+              <a:picLocks noChangeAspect="1" noChangeArrowheads="1"/>
+            </p:cNvPicPr>
+            <p:nvPr/>
+          </p:nvPicPr>
+          <p:blipFill>
+            <a:blip r:embed="rId4">
+              <a:extLst>
+                <a:ext uri="{28A0092B-C50C-407E-A947-70E740481C1C}">
+                  <a14:useLocalDpi xmlns:a14="http://schemas.microsoft.com/office/drawing/2010/main" val="0"/>
+                </a:ext>
+              </a:extLst>
+            </a:blip>
+            <a:srcRect/>
+            <a:stretch>
+              <a:fillRect/>
+            </a:stretch>
+          </p:blipFill>
+          <p:spPr bwMode="auto">
+            <a:xfrm>
+              <a:off x="8867181" y="4210234"/>
+              <a:ext cx="2012950" cy="1016000"/>
+            </a:xfrm>
+            <a:prstGeom prst="rect">
+              <a:avLst/>
+            </a:prstGeom>
+            <a:noFill/>
+            <a:extLst>
+              <a:ext uri="{909E8E84-426E-40DD-AFC4-6F175D3DCCD1}">
+                <a14:hiddenFill xmlns:a14="http://schemas.microsoft.com/office/drawing/2010/main">
+                  <a:solidFill>
+                    <a:srgbClr val="FFFFFF"/>
+                  </a:solidFill>
+                </a14:hiddenFill>
+              </a:ext>
+            </a:extLst>
+          </p:spPr>
+        </p:pic>
+        <p:pic>
+          <p:nvPicPr>
+            <p:cNvPr id="39" name="Picture 2">
+              <a:extLst>
+                <a:ext uri="{FF2B5EF4-FFF2-40B4-BE49-F238E27FC236}">
+                  <a16:creationId xmlns:a16="http://schemas.microsoft.com/office/drawing/2014/main" id="{577DC3E1-B1A6-589C-A746-70239E53BC52}"/>
+                </a:ext>
+              </a:extLst>
+            </p:cNvPr>
+            <p:cNvPicPr>
+              <a:picLocks noChangeAspect="1" noChangeArrowheads="1"/>
+            </p:cNvPicPr>
+            <p:nvPr/>
+          </p:nvPicPr>
+          <p:blipFill rotWithShape="1">
+            <a:blip r:embed="rId5">
+              <a:extLst>
+                <a:ext uri="{28A0092B-C50C-407E-A947-70E740481C1C}">
+                  <a14:useLocalDpi xmlns:a14="http://schemas.microsoft.com/office/drawing/2010/main" val="0"/>
+                </a:ext>
+              </a:extLst>
+            </a:blip>
+            <a:srcRect b="47298"/>
+            <a:stretch/>
+          </p:blipFill>
+          <p:spPr bwMode="auto">
+            <a:xfrm>
+              <a:off x="2535366" y="4179415"/>
+              <a:ext cx="1259095" cy="687601"/>
+            </a:xfrm>
+            <a:prstGeom prst="rect">
+              <a:avLst/>
+            </a:prstGeom>
+            <a:noFill/>
+            <a:extLst>
+              <a:ext uri="{909E8E84-426E-40DD-AFC4-6F175D3DCCD1}">
+                <a14:hiddenFill xmlns:a14="http://schemas.microsoft.com/office/drawing/2010/main">
+                  <a:solidFill>
+                    <a:srgbClr val="FFFFFF"/>
+                  </a:solidFill>
+                </a14:hiddenFill>
+              </a:ext>
+            </a:extLst>
+          </p:spPr>
+        </p:pic>
+        <p:sp>
+          <p:nvSpPr>
+            <p:cNvPr id="40" name="TextBox 39">
+              <a:extLst>
+                <a:ext uri="{FF2B5EF4-FFF2-40B4-BE49-F238E27FC236}">
+                  <a16:creationId xmlns:a16="http://schemas.microsoft.com/office/drawing/2014/main" id="{7F9648B0-1D8D-FCC6-CD96-C7A66123BF25}"/>
+                </a:ext>
+              </a:extLst>
+            </p:cNvPr>
+            <p:cNvSpPr txBox="1"/>
+            <p:nvPr/>
+          </p:nvSpPr>
+          <p:spPr>
+            <a:xfrm>
+              <a:off x="3983202" y="4674063"/>
+              <a:ext cx="2095904" cy="338554"/>
+            </a:xfrm>
+            <a:prstGeom prst="rect">
+              <a:avLst/>
+            </a:prstGeom>
+            <a:noFill/>
+          </p:spPr>
+          <p:txBody>
+            <a:bodyPr wrap="square" rtlCol="0">
+              <a:spAutoFit/>
+            </a:bodyPr>
+            <a:lstStyle/>
+            <a:p>
+              <a:pPr algn="ctr"/>
+              <a:r>
+                <a:rPr lang="en-US" sz="1600" b="1" dirty="0">
+                  <a:solidFill>
+                    <a:srgbClr val="00B050"/>
+                  </a:solidFill>
+                  <a:latin typeface="AccordAlternate" panose="02000000000000000000" pitchFamily="50" charset="0"/>
+                </a:rPr>
+                <a:t>SELF-SUPERVISED</a:t>
+              </a:r>
+            </a:p>
+          </p:txBody>
+        </p:sp>
+        <p:cxnSp>
+          <p:nvCxnSpPr>
+            <p:cNvPr id="41" name="Straight Connector 40">
+              <a:extLst>
+                <a:ext uri="{FF2B5EF4-FFF2-40B4-BE49-F238E27FC236}">
+                  <a16:creationId xmlns:a16="http://schemas.microsoft.com/office/drawing/2014/main" id="{FF3FC286-A669-F959-2B90-91B42040EE70}"/>
+                </a:ext>
+              </a:extLst>
+            </p:cNvPr>
+            <p:cNvCxnSpPr>
+              <a:cxnSpLocks/>
+              <a:stCxn id="40" idx="0"/>
+              <a:endCxn id="18" idx="2"/>
+            </p:cNvCxnSpPr>
+            <p:nvPr/>
+          </p:nvCxnSpPr>
+          <p:spPr>
+            <a:xfrm flipV="1">
+              <a:off x="5031154" y="2298113"/>
+              <a:ext cx="634610" cy="2375950"/>
+            </a:xfrm>
+            <a:prstGeom prst="line">
+              <a:avLst/>
+            </a:prstGeom>
+            <a:ln w="38100" cmpd="sng">
+              <a:solidFill>
+                <a:schemeClr val="accent2"/>
+              </a:solidFill>
+            </a:ln>
+            <a:effectLst/>
+          </p:spPr>
+          <p:style>
+            <a:lnRef idx="2">
+              <a:schemeClr val="accent1"/>
+            </a:lnRef>
+            <a:fillRef idx="0">
+              <a:schemeClr val="accent1"/>
+            </a:fillRef>
+            <a:effectRef idx="1">
+              <a:schemeClr val="accent1"/>
+            </a:effectRef>
+            <a:fontRef idx="minor">
+              <a:schemeClr val="tx1"/>
+            </a:fontRef>
+          </p:style>
+        </p:cxnSp>
+      </p:grpSp>
+    </p:spTree>
+    <p:extLst>
+      <p:ext uri="{BB962C8B-B14F-4D97-AF65-F5344CB8AC3E}">
+        <p14:creationId xmlns:p14="http://schemas.microsoft.com/office/powerpoint/2010/main" val="3765141192"/>
+      </p:ext>
+    </p:extLst>
+  </p:cSld>
+  <p:clrMapOvr>
+    <a:masterClrMapping/>
+  </p:clrMapOvr>
+</p:sld>
+</file>
+
+<file path=ppt/slides/slide8.xml><?xml version="1.0" encoding="utf-8"?>
+<p:sld xmlns:a="http://schemas.openxmlformats.org/drawingml/2006/main" xmlns:r="http://schemas.openxmlformats.org/officeDocument/2006/relationships" xmlns:p="http://schemas.openxmlformats.org/presentationml/2006/main">
+  <p:cSld>
+    <p:spTree>
+      <p:nvGrpSpPr>
+        <p:cNvPr id="1" name=""/>
+        <p:cNvGrpSpPr/>
+        <p:nvPr/>
+      </p:nvGrpSpPr>
+      <p:grpSpPr>
+        <a:xfrm>
+          <a:off x="0" y="0"/>
+          <a:ext cx="0" cy="0"/>
+          <a:chOff x="0" y="0"/>
+          <a:chExt cx="0" cy="0"/>
+        </a:xfrm>
+      </p:grpSpPr>
+      <p:sp>
+        <p:nvSpPr>
           <p:cNvPr id="6" name="Title 5">
             <a:extLst>
               <a:ext uri="{FF2B5EF4-FFF2-40B4-BE49-F238E27FC236}">
@@ -6469,7 +8507,7 @@
           <a:p>
             <a:fld id="{A3F33A53-1B14-4784-A6BE-2DB6D72C8D95}" type="slidenum">
               <a:rPr lang="en-GB" smtClean="0"/>
-              <a:t>7</a:t>
+              <a:t>8</a:t>
             </a:fld>
             <a:endParaRPr lang="en-GB"/>
           </a:p>
@@ -6535,7 +8573,7 @@
 </p:sld>
 </file>
 
-<file path=ppt/slides/slide8.xml><?xml version="1.0" encoding="utf-8"?>
+<file path=ppt/slides/slide9.xml><?xml version="1.0" encoding="utf-8"?>
 <p:sld xmlns:a="http://schemas.openxmlformats.org/drawingml/2006/main" xmlns:r="http://schemas.openxmlformats.org/officeDocument/2006/relationships" xmlns:p="http://schemas.openxmlformats.org/presentationml/2006/main">
   <p:cSld>
     <p:spTree>
@@ -6603,7 +8641,7 @@
           <a:p>
             <a:fld id="{08C366F5-AFAD-49CB-854A-9D9E238FCA13}" type="slidenum">
               <a:rPr lang="en-GB" smtClean="0"/>
-              <a:t>8</a:t>
+              <a:t>9</a:t>
             </a:fld>
             <a:endParaRPr lang="en-GB"/>
           </a:p>
@@ -6638,7 +8676,7 @@
         </p:blipFill>
         <p:spPr bwMode="auto">
           <a:xfrm>
-            <a:off x="514434" y="1680462"/>
+            <a:off x="514433" y="1690688"/>
             <a:ext cx="3394103" cy="1527347"/>
           </a:xfrm>
           <a:prstGeom prst="rect">
@@ -6685,7 +8723,7 @@
         </p:blipFill>
         <p:spPr bwMode="auto">
           <a:xfrm>
-            <a:off x="677657" y="3397494"/>
+            <a:off x="677656" y="3429000"/>
             <a:ext cx="3230880" cy="1305814"/>
           </a:xfrm>
           <a:prstGeom prst="rect">
@@ -6732,7 +8770,7 @@
         </p:blipFill>
         <p:spPr bwMode="auto">
           <a:xfrm>
-            <a:off x="5058203" y="3566553"/>
+            <a:off x="5868343" y="5238557"/>
             <a:ext cx="2075592" cy="1117793"/>
           </a:xfrm>
           <a:prstGeom prst="rect">
@@ -6779,7 +8817,7 @@
         </p:blipFill>
         <p:spPr bwMode="auto">
           <a:xfrm>
-            <a:off x="8490005" y="2444135"/>
+            <a:off x="8610600" y="2428578"/>
             <a:ext cx="2984390" cy="547138"/>
           </a:xfrm>
           <a:prstGeom prst="rect">
@@ -6826,7 +8864,7 @@
         </p:blipFill>
         <p:spPr bwMode="auto">
           <a:xfrm>
-            <a:off x="838200" y="4833999"/>
+            <a:off x="757928" y="4952571"/>
             <a:ext cx="3070337" cy="1586341"/>
           </a:xfrm>
           <a:prstGeom prst="rect">
@@ -6873,7 +8911,7 @@
         </p:blipFill>
         <p:spPr bwMode="auto">
           <a:xfrm>
-            <a:off x="8610600" y="3866728"/>
+            <a:off x="8663766" y="3294359"/>
             <a:ext cx="2934730" cy="838494"/>
           </a:xfrm>
           <a:prstGeom prst="rect">
@@ -6920,7 +8958,7 @@
         </p:blipFill>
         <p:spPr bwMode="auto">
           <a:xfrm>
-            <a:off x="5402634" y="1750769"/>
+            <a:off x="5018482" y="1690688"/>
             <a:ext cx="1386731" cy="1386731"/>
           </a:xfrm>
           <a:prstGeom prst="rect">
@@ -6967,8 +9005,55 @@
         </p:blipFill>
         <p:spPr bwMode="auto">
           <a:xfrm>
-            <a:off x="5058203" y="5113400"/>
+            <a:off x="5293873" y="3201175"/>
             <a:ext cx="2222679" cy="1608075"/>
+          </a:xfrm>
+          <a:prstGeom prst="rect">
+            <a:avLst/>
+          </a:prstGeom>
+          <a:noFill/>
+          <a:extLst>
+            <a:ext uri="{909E8E84-426E-40DD-AFC4-6F175D3DCCD1}">
+              <a14:hiddenFill xmlns:a14="http://schemas.microsoft.com/office/drawing/2010/main">
+                <a:solidFill>
+                  <a:srgbClr val="FFFFFF"/>
+                </a:solidFill>
+              </a14:hiddenFill>
+            </a:ext>
+          </a:extLst>
+        </p:spPr>
+      </p:pic>
+      <p:pic>
+        <p:nvPicPr>
+          <p:cNvPr id="2" name="Picture 2" descr="PyTorch is evolving fast. Listen to this podcast to find out how!">
+            <a:extLst>
+              <a:ext uri="{FF2B5EF4-FFF2-40B4-BE49-F238E27FC236}">
+                <a16:creationId xmlns:a16="http://schemas.microsoft.com/office/drawing/2014/main" id="{03EFA391-0540-053A-0BFD-2FB91B5A0EC0}"/>
+              </a:ext>
+            </a:extLst>
+          </p:cNvPr>
+          <p:cNvPicPr>
+            <a:picLocks noChangeAspect="1" noChangeArrowheads="1"/>
+          </p:cNvPicPr>
+          <p:nvPr/>
+        </p:nvPicPr>
+        <p:blipFill>
+          <a:blip r:embed="rId10">
+            <a:extLst>
+              <a:ext uri="{28A0092B-C50C-407E-A947-70E740481C1C}">
+                <a14:useLocalDpi xmlns:a14="http://schemas.microsoft.com/office/drawing/2010/main" val="0"/>
+              </a:ext>
+            </a:extLst>
+          </a:blip>
+          <a:srcRect/>
+          <a:stretch>
+            <a:fillRect/>
+          </a:stretch>
+        </p:blipFill>
+        <p:spPr bwMode="auto">
+          <a:xfrm>
+            <a:off x="8032144" y="5238557"/>
+            <a:ext cx="3701716" cy="789677"/>
           </a:xfrm>
           <a:prstGeom prst="rect">
             <a:avLst/>
@@ -6989,209 +9074,6 @@
     <p:extLst>
       <p:ext uri="{BB962C8B-B14F-4D97-AF65-F5344CB8AC3E}">
         <p14:creationId xmlns:p14="http://schemas.microsoft.com/office/powerpoint/2010/main" val="4221412267"/>
-      </p:ext>
-    </p:extLst>
-  </p:cSld>
-  <p:clrMapOvr>
-    <a:masterClrMapping/>
-  </p:clrMapOvr>
-</p:sld>
-</file>
-
-<file path=ppt/slides/slide9.xml><?xml version="1.0" encoding="utf-8"?>
-<p:sld xmlns:a="http://schemas.openxmlformats.org/drawingml/2006/main" xmlns:r="http://schemas.openxmlformats.org/officeDocument/2006/relationships" xmlns:p="http://schemas.openxmlformats.org/presentationml/2006/main">
-  <p:cSld>
-    <p:spTree>
-      <p:nvGrpSpPr>
-        <p:cNvPr id="1" name=""/>
-        <p:cNvGrpSpPr/>
-        <p:nvPr/>
-      </p:nvGrpSpPr>
-      <p:grpSpPr>
-        <a:xfrm>
-          <a:off x="0" y="0"/>
-          <a:ext cx="0" cy="0"/>
-          <a:chOff x="0" y="0"/>
-          <a:chExt cx="0" cy="0"/>
-        </a:xfrm>
-      </p:grpSpPr>
-      <p:sp>
-        <p:nvSpPr>
-          <p:cNvPr id="2" name="Title 1">
-            <a:extLst>
-              <a:ext uri="{FF2B5EF4-FFF2-40B4-BE49-F238E27FC236}">
-                <a16:creationId xmlns:a16="http://schemas.microsoft.com/office/drawing/2014/main" id="{287931D7-F116-6FF9-9B2A-660AE0271642}"/>
-              </a:ext>
-            </a:extLst>
-          </p:cNvPr>
-          <p:cNvSpPr>
-            <a:spLocks noGrp="1"/>
-          </p:cNvSpPr>
-          <p:nvPr>
-            <p:ph type="title"/>
-          </p:nvPr>
-        </p:nvSpPr>
-        <p:spPr/>
-        <p:txBody>
-          <a:bodyPr/>
-          <a:lstStyle/>
-          <a:p>
-            <a:r>
-              <a:rPr lang="en-GB" dirty="0"/>
-              <a:t>Programming Environments</a:t>
-            </a:r>
-          </a:p>
-        </p:txBody>
-      </p:sp>
-      <p:sp>
-        <p:nvSpPr>
-          <p:cNvPr id="3" name="Content Placeholder 2">
-            <a:extLst>
-              <a:ext uri="{FF2B5EF4-FFF2-40B4-BE49-F238E27FC236}">
-                <a16:creationId xmlns:a16="http://schemas.microsoft.com/office/drawing/2014/main" id="{C612A4C1-FFFD-3C44-E2CA-D30093EF744E}"/>
-              </a:ext>
-            </a:extLst>
-          </p:cNvPr>
-          <p:cNvSpPr>
-            <a:spLocks noGrp="1"/>
-          </p:cNvSpPr>
-          <p:nvPr>
-            <p:ph idx="1"/>
-          </p:nvPr>
-        </p:nvSpPr>
-        <p:spPr/>
-        <p:txBody>
-          <a:bodyPr/>
-          <a:lstStyle/>
-          <a:p>
-            <a:pPr marL="0" indent="0">
-              <a:buNone/>
-            </a:pPr>
-            <a:r>
-              <a:rPr lang="en-GB" dirty="0"/>
-              <a:t>locally, best use</a:t>
-            </a:r>
-          </a:p>
-          <a:p>
-            <a:r>
-              <a:rPr lang="en-GB" dirty="0"/>
-              <a:t>a virtual environment to flexibly install packages (e.g., </a:t>
-            </a:r>
-            <a:r>
-              <a:rPr lang="en-GB" dirty="0" err="1">
-                <a:hlinkClick r:id="rId2"/>
-              </a:rPr>
-              <a:t>venv</a:t>
-            </a:r>
-            <a:r>
-              <a:rPr lang="en-GB" dirty="0"/>
-              <a:t>)</a:t>
-            </a:r>
-          </a:p>
-          <a:p>
-            <a:r>
-              <a:rPr lang="en-GB" dirty="0"/>
-              <a:t>an IDE of your choice (e.g., </a:t>
-            </a:r>
-            <a:r>
-              <a:rPr lang="en-GB" dirty="0">
-                <a:hlinkClick r:id="rId3"/>
-              </a:rPr>
-              <a:t>VS Code</a:t>
-            </a:r>
-            <a:r>
-              <a:rPr lang="en-GB" dirty="0"/>
-              <a:t>)</a:t>
-            </a:r>
-          </a:p>
-          <a:p>
-            <a:r>
-              <a:rPr lang="en-GB" dirty="0"/>
-              <a:t>both plain Python files or </a:t>
-            </a:r>
-            <a:r>
-              <a:rPr lang="en-GB" dirty="0" err="1">
-                <a:hlinkClick r:id="rId4"/>
-              </a:rPr>
-              <a:t>Jupyter</a:t>
-            </a:r>
-            <a:r>
-              <a:rPr lang="en-GB" dirty="0">
-                <a:hlinkClick r:id="rId4"/>
-              </a:rPr>
-              <a:t> notebooks</a:t>
-            </a:r>
-            <a:r>
-              <a:rPr lang="en-GB" dirty="0"/>
-              <a:t> are fine</a:t>
-            </a:r>
-          </a:p>
-          <a:p>
-            <a:pPr marL="0" indent="0">
-              <a:buNone/>
-            </a:pPr>
-            <a:endParaRPr lang="en-GB" dirty="0"/>
-          </a:p>
-          <a:p>
-            <a:pPr marL="0" indent="0">
-              <a:buNone/>
-            </a:pPr>
-            <a:r>
-              <a:rPr lang="en-GB" dirty="0"/>
-              <a:t>but cloud-based environments also fine (e.g., </a:t>
-            </a:r>
-            <a:r>
-              <a:rPr lang="en-GB" dirty="0">
-                <a:hlinkClick r:id="rId5"/>
-              </a:rPr>
-              <a:t>Google </a:t>
-            </a:r>
-            <a:r>
-              <a:rPr lang="en-GB" dirty="0" err="1">
-                <a:hlinkClick r:id="rId5"/>
-              </a:rPr>
-              <a:t>Colab</a:t>
-            </a:r>
-            <a:r>
-              <a:rPr lang="en-GB" dirty="0"/>
-              <a:t>)</a:t>
-            </a:r>
-          </a:p>
-        </p:txBody>
-      </p:sp>
-      <p:sp>
-        <p:nvSpPr>
-          <p:cNvPr id="4" name="Slide Number Placeholder 3">
-            <a:extLst>
-              <a:ext uri="{FF2B5EF4-FFF2-40B4-BE49-F238E27FC236}">
-                <a16:creationId xmlns:a16="http://schemas.microsoft.com/office/drawing/2014/main" id="{279EB8C7-7F0B-BA44-36D2-4511056C6368}"/>
-              </a:ext>
-            </a:extLst>
-          </p:cNvPr>
-          <p:cNvSpPr>
-            <a:spLocks noGrp="1"/>
-          </p:cNvSpPr>
-          <p:nvPr>
-            <p:ph type="sldNum" sz="quarter" idx="12"/>
-          </p:nvPr>
-        </p:nvSpPr>
-        <p:spPr/>
-        <p:txBody>
-          <a:bodyPr/>
-          <a:lstStyle/>
-          <a:p>
-            <a:fld id="{A3F33A53-1B14-4784-A6BE-2DB6D72C8D95}" type="slidenum">
-              <a:rPr lang="en-GB" smtClean="0"/>
-              <a:t>9</a:t>
-            </a:fld>
-            <a:endParaRPr lang="en-GB"/>
-          </a:p>
-        </p:txBody>
-      </p:sp>
-    </p:spTree>
-    <p:extLst>
-      <p:ext uri="{BB962C8B-B14F-4D97-AF65-F5344CB8AC3E}">
-        <p14:creationId xmlns:p14="http://schemas.microsoft.com/office/powerpoint/2010/main" val="2053728267"/>
       </p:ext>
     </p:extLst>
   </p:cSld>

--- a/slides/0_intro.pptx
+++ b/slides/0_intro.pptx
@@ -5,7 +5,7 @@
     <p:sldMasterId id="2147483648" r:id="rId1"/>
   </p:sldMasterIdLst>
   <p:notesMasterIdLst>
-    <p:notesMasterId r:id="rId13"/>
+    <p:notesMasterId r:id="rId15"/>
   </p:notesMasterIdLst>
   <p:sldIdLst>
     <p:sldId id="256" r:id="rId2"/>
@@ -19,6 +19,8 @@
     <p:sldId id="274" r:id="rId10"/>
     <p:sldId id="271" r:id="rId11"/>
     <p:sldId id="272" r:id="rId12"/>
+    <p:sldId id="275" r:id="rId13"/>
+    <p:sldId id="276" r:id="rId14"/>
   </p:sldIdLst>
   <p:sldSz cx="12192000" cy="6858000"/>
   <p:notesSz cx="6858000" cy="9144000"/>
@@ -489,7 +491,7 @@
           <a:p>
             <a:fld id="{506E0FD1-891F-4B1E-916D-E9B585160BB8}" type="datetimeFigureOut">
               <a:rPr lang="en-GB" smtClean="0"/>
-              <a:t>05/03/2026</a:t>
+              <a:t>22/03/2026</a:t>
             </a:fld>
             <a:endParaRPr lang="en-GB"/>
           </a:p>
@@ -906,7 +908,7 @@
           <a:p>
             <a:fld id="{D68C3F22-27B2-44E3-9C5F-D08126455F6F}" type="datetime1">
               <a:rPr lang="en-GB" smtClean="0"/>
-              <a:t>05/03/2026</a:t>
+              <a:t>22/03/2026</a:t>
             </a:fld>
             <a:endParaRPr lang="en-GB"/>
           </a:p>
@@ -1106,7 +1108,7 @@
           <a:p>
             <a:fld id="{1CD03846-7BF6-4FB6-A921-FF3379ADBD4C}" type="datetime1">
               <a:rPr lang="en-GB" smtClean="0"/>
-              <a:t>05/03/2026</a:t>
+              <a:t>22/03/2026</a:t>
             </a:fld>
             <a:endParaRPr lang="en-GB"/>
           </a:p>
@@ -1316,7 +1318,7 @@
           <a:p>
             <a:fld id="{99E1B91A-3FD0-4144-9C84-63E9688ED2FE}" type="datetime1">
               <a:rPr lang="en-GB" smtClean="0"/>
-              <a:t>05/03/2026</a:t>
+              <a:t>22/03/2026</a:t>
             </a:fld>
             <a:endParaRPr lang="en-GB"/>
           </a:p>
@@ -1516,7 +1518,7 @@
           <a:p>
             <a:fld id="{5295ED7B-FEAD-4734-819F-93EF4B0EA908}" type="datetime1">
               <a:rPr lang="en-GB" smtClean="0"/>
-              <a:t>05/03/2026</a:t>
+              <a:t>22/03/2026</a:t>
             </a:fld>
             <a:endParaRPr lang="en-GB"/>
           </a:p>
@@ -1792,7 +1794,7 @@
           <a:p>
             <a:fld id="{D2D5D4B4-C926-4B45-8815-1ED8911179A2}" type="datetime1">
               <a:rPr lang="en-GB" smtClean="0"/>
-              <a:t>05/03/2026</a:t>
+              <a:t>22/03/2026</a:t>
             </a:fld>
             <a:endParaRPr lang="en-GB"/>
           </a:p>
@@ -2060,7 +2062,7 @@
           <a:p>
             <a:fld id="{B4C5210A-0E37-4935-93AF-69F21A5F712F}" type="datetime1">
               <a:rPr lang="en-GB" smtClean="0"/>
-              <a:t>05/03/2026</a:t>
+              <a:t>22/03/2026</a:t>
             </a:fld>
             <a:endParaRPr lang="en-GB"/>
           </a:p>
@@ -2475,7 +2477,7 @@
           <a:p>
             <a:fld id="{3D3A6B2F-436C-4691-80E8-9C890E000E9D}" type="datetime1">
               <a:rPr lang="en-GB" smtClean="0"/>
-              <a:t>05/03/2026</a:t>
+              <a:t>22/03/2026</a:t>
             </a:fld>
             <a:endParaRPr lang="en-GB"/>
           </a:p>
@@ -2617,7 +2619,7 @@
           <a:p>
             <a:fld id="{84385F4C-D74B-496F-8D21-97E3549C783B}" type="datetime1">
               <a:rPr lang="en-GB" smtClean="0"/>
-              <a:t>05/03/2026</a:t>
+              <a:t>22/03/2026</a:t>
             </a:fld>
             <a:endParaRPr lang="en-GB"/>
           </a:p>
@@ -2730,7 +2732,7 @@
           <a:p>
             <a:fld id="{0CBDCB32-C241-4703-A832-4EB47BD54E83}" type="datetime1">
               <a:rPr lang="en-GB" smtClean="0"/>
-              <a:t>05/03/2026</a:t>
+              <a:t>22/03/2026</a:t>
             </a:fld>
             <a:endParaRPr lang="en-GB"/>
           </a:p>
@@ -3043,7 +3045,7 @@
           <a:p>
             <a:fld id="{85C150FF-BE95-4D25-A16A-E368A81CBF24}" type="datetime1">
               <a:rPr lang="en-GB" smtClean="0"/>
-              <a:t>05/03/2026</a:t>
+              <a:t>22/03/2026</a:t>
             </a:fld>
             <a:endParaRPr lang="en-GB"/>
           </a:p>
@@ -3332,7 +3334,7 @@
           <a:p>
             <a:fld id="{F3C5DB4B-B349-43C9-A424-BADA723AD9F1}" type="datetime1">
               <a:rPr lang="en-GB" smtClean="0"/>
-              <a:t>05/03/2026</a:t>
+              <a:t>22/03/2026</a:t>
             </a:fld>
             <a:endParaRPr lang="en-GB"/>
           </a:p>
@@ -3575,7 +3577,7 @@
           <a:p>
             <a:fld id="{12632426-0A0C-405F-A3D0-2D11AA44702A}" type="datetime1">
               <a:rPr lang="en-GB" smtClean="0"/>
-              <a:t>05/03/2026</a:t>
+              <a:t>22/03/2026</a:t>
             </a:fld>
             <a:endParaRPr lang="en-GB"/>
           </a:p>
@@ -4435,6 +4437,717 @@
     <p:extLst>
       <p:ext uri="{BB962C8B-B14F-4D97-AF65-F5344CB8AC3E}">
         <p14:creationId xmlns:p14="http://schemas.microsoft.com/office/powerpoint/2010/main" val="793683279"/>
+      </p:ext>
+    </p:extLst>
+  </p:cSld>
+  <p:clrMapOvr>
+    <a:masterClrMapping/>
+  </p:clrMapOvr>
+</p:sld>
+</file>
+
+<file path=ppt/slides/slide12.xml><?xml version="1.0" encoding="utf-8"?>
+<p:sld xmlns:a="http://schemas.openxmlformats.org/drawingml/2006/main" xmlns:r="http://schemas.openxmlformats.org/officeDocument/2006/relationships" xmlns:p="http://schemas.openxmlformats.org/presentationml/2006/main">
+  <p:cSld>
+    <p:spTree>
+      <p:nvGrpSpPr>
+        <p:cNvPr id="1" name="">
+          <a:extLst>
+            <a:ext uri="{FF2B5EF4-FFF2-40B4-BE49-F238E27FC236}">
+              <a16:creationId xmlns:a16="http://schemas.microsoft.com/office/drawing/2014/main" id="{77B00577-1A45-E216-DEF8-BD7E708C3015}"/>
+            </a:ext>
+          </a:extLst>
+        </p:cNvPr>
+        <p:cNvGrpSpPr/>
+        <p:nvPr/>
+      </p:nvGrpSpPr>
+      <p:grpSpPr>
+        <a:xfrm>
+          <a:off x="0" y="0"/>
+          <a:ext cx="0" cy="0"/>
+          <a:chOff x="0" y="0"/>
+          <a:chExt cx="0" cy="0"/>
+        </a:xfrm>
+      </p:grpSpPr>
+      <p:sp>
+        <p:nvSpPr>
+          <p:cNvPr id="2" name="Title 1">
+            <a:extLst>
+              <a:ext uri="{FF2B5EF4-FFF2-40B4-BE49-F238E27FC236}">
+                <a16:creationId xmlns:a16="http://schemas.microsoft.com/office/drawing/2014/main" id="{680246B3-6275-CB91-1DF3-1016B4FAA31F}"/>
+              </a:ext>
+            </a:extLst>
+          </p:cNvPr>
+          <p:cNvSpPr>
+            <a:spLocks noGrp="1"/>
+          </p:cNvSpPr>
+          <p:nvPr>
+            <p:ph type="title"/>
+          </p:nvPr>
+        </p:nvSpPr>
+        <p:spPr/>
+        <p:txBody>
+          <a:bodyPr/>
+          <a:lstStyle/>
+          <a:p>
+            <a:r>
+              <a:rPr lang="en-GB" dirty="0"/>
+              <a:t>Exam form – Assignment (A)</a:t>
+            </a:r>
+          </a:p>
+        </p:txBody>
+      </p:sp>
+      <p:sp>
+        <p:nvSpPr>
+          <p:cNvPr id="3" name="Content Placeholder 2">
+            <a:extLst>
+              <a:ext uri="{FF2B5EF4-FFF2-40B4-BE49-F238E27FC236}">
+                <a16:creationId xmlns:a16="http://schemas.microsoft.com/office/drawing/2014/main" id="{B8D50199-2F53-5FC5-521A-A38336014E38}"/>
+              </a:ext>
+            </a:extLst>
+          </p:cNvPr>
+          <p:cNvSpPr>
+            <a:spLocks noGrp="1"/>
+          </p:cNvSpPr>
+          <p:nvPr>
+            <p:ph idx="1"/>
+          </p:nvPr>
+        </p:nvSpPr>
+        <p:spPr/>
+        <p:txBody>
+          <a:bodyPr>
+            <a:normAutofit/>
+          </a:bodyPr>
+          <a:lstStyle/>
+          <a:p>
+            <a:endParaRPr lang="en-GB" b="1" dirty="0"/>
+          </a:p>
+          <a:p>
+            <a:r>
+              <a:rPr lang="en-GB" b="1" dirty="0"/>
+              <a:t>Two assignments </a:t>
+            </a:r>
+            <a:r>
+              <a:rPr lang="en-GB" dirty="0"/>
+              <a:t>during lecture time</a:t>
+            </a:r>
+          </a:p>
+          <a:p>
+            <a:r>
+              <a:rPr lang="en-GB" dirty="0"/>
+              <a:t>Working in </a:t>
+            </a:r>
+            <a:r>
+              <a:rPr lang="en-GB" b="1" dirty="0"/>
+              <a:t>groups of two </a:t>
+            </a:r>
+            <a:r>
+              <a:rPr lang="en-GB" dirty="0"/>
+              <a:t>(exceptional three) </a:t>
+            </a:r>
+            <a:r>
+              <a:rPr lang="en-GB" b="1" dirty="0"/>
+              <a:t>students</a:t>
+            </a:r>
+          </a:p>
+          <a:p>
+            <a:r>
+              <a:rPr lang="en-GB" dirty="0"/>
+              <a:t>An </a:t>
+            </a:r>
+            <a:r>
+              <a:rPr lang="en-GB" b="1" dirty="0"/>
+              <a:t>assignment</a:t>
+            </a:r>
+            <a:r>
+              <a:rPr lang="en-GB" dirty="0"/>
+              <a:t> consists of …</a:t>
+            </a:r>
+          </a:p>
+          <a:p>
+            <a:pPr lvl="1"/>
+            <a:r>
+              <a:rPr lang="en-GB" dirty="0"/>
+              <a:t>a specific task given after deadline of registration</a:t>
+            </a:r>
+          </a:p>
+          <a:p>
+            <a:pPr lvl="1"/>
+            <a:r>
+              <a:rPr lang="en-GB" dirty="0"/>
+              <a:t>processing and completing the task</a:t>
+            </a:r>
+          </a:p>
+          <a:p>
+            <a:pPr lvl="1"/>
+            <a:r>
+              <a:rPr lang="en-GB" dirty="0"/>
+              <a:t>presentation (25-30 min) + oral discussion (15 min)</a:t>
+            </a:r>
+          </a:p>
+        </p:txBody>
+      </p:sp>
+      <p:sp>
+        <p:nvSpPr>
+          <p:cNvPr id="4" name="Slide Number Placeholder 3">
+            <a:extLst>
+              <a:ext uri="{FF2B5EF4-FFF2-40B4-BE49-F238E27FC236}">
+                <a16:creationId xmlns:a16="http://schemas.microsoft.com/office/drawing/2014/main" id="{6CD3C19B-2E9C-41EF-C38E-923297E4DF37}"/>
+              </a:ext>
+            </a:extLst>
+          </p:cNvPr>
+          <p:cNvSpPr>
+            <a:spLocks noGrp="1"/>
+          </p:cNvSpPr>
+          <p:nvPr>
+            <p:ph type="sldNum" sz="quarter" idx="12"/>
+          </p:nvPr>
+        </p:nvSpPr>
+        <p:spPr/>
+        <p:txBody>
+          <a:bodyPr/>
+          <a:lstStyle/>
+          <a:p>
+            <a:fld id="{A3F33A53-1B14-4784-A6BE-2DB6D72C8D95}" type="slidenum">
+              <a:rPr lang="en-GB" smtClean="0"/>
+              <a:t>12</a:t>
+            </a:fld>
+            <a:endParaRPr lang="en-GB"/>
+          </a:p>
+        </p:txBody>
+      </p:sp>
+    </p:spTree>
+    <p:extLst>
+      <p:ext uri="{BB962C8B-B14F-4D97-AF65-F5344CB8AC3E}">
+        <p14:creationId xmlns:p14="http://schemas.microsoft.com/office/powerpoint/2010/main" val="2382802394"/>
+      </p:ext>
+    </p:extLst>
+  </p:cSld>
+  <p:clrMapOvr>
+    <a:masterClrMapping/>
+  </p:clrMapOvr>
+</p:sld>
+</file>
+
+<file path=ppt/slides/slide13.xml><?xml version="1.0" encoding="utf-8"?>
+<p:sld xmlns:a="http://schemas.openxmlformats.org/drawingml/2006/main" xmlns:r="http://schemas.openxmlformats.org/officeDocument/2006/relationships" xmlns:p="http://schemas.openxmlformats.org/presentationml/2006/main">
+  <p:cSld>
+    <p:spTree>
+      <p:nvGrpSpPr>
+        <p:cNvPr id="1" name="">
+          <a:extLst>
+            <a:ext uri="{FF2B5EF4-FFF2-40B4-BE49-F238E27FC236}">
+              <a16:creationId xmlns:a16="http://schemas.microsoft.com/office/drawing/2014/main" id="{F2418705-A0D8-82EA-9919-BDE0A523AF76}"/>
+            </a:ext>
+          </a:extLst>
+        </p:cNvPr>
+        <p:cNvGrpSpPr/>
+        <p:nvPr/>
+      </p:nvGrpSpPr>
+      <p:grpSpPr>
+        <a:xfrm>
+          <a:off x="0" y="0"/>
+          <a:ext cx="0" cy="0"/>
+          <a:chOff x="0" y="0"/>
+          <a:chExt cx="0" cy="0"/>
+        </a:xfrm>
+      </p:grpSpPr>
+      <p:sp>
+        <p:nvSpPr>
+          <p:cNvPr id="2" name="Title 1">
+            <a:extLst>
+              <a:ext uri="{FF2B5EF4-FFF2-40B4-BE49-F238E27FC236}">
+                <a16:creationId xmlns:a16="http://schemas.microsoft.com/office/drawing/2014/main" id="{771C393E-63BA-5E87-3F47-DB591718F4EC}"/>
+              </a:ext>
+            </a:extLst>
+          </p:cNvPr>
+          <p:cNvSpPr>
+            <a:spLocks noGrp="1"/>
+          </p:cNvSpPr>
+          <p:nvPr>
+            <p:ph type="title"/>
+          </p:nvPr>
+        </p:nvSpPr>
+        <p:spPr/>
+        <p:txBody>
+          <a:bodyPr/>
+          <a:lstStyle/>
+          <a:p>
+            <a:r>
+              <a:rPr lang="en-GB" dirty="0"/>
+              <a:t>Schedule</a:t>
+            </a:r>
+          </a:p>
+        </p:txBody>
+      </p:sp>
+      <p:graphicFrame>
+        <p:nvGraphicFramePr>
+          <p:cNvPr id="6" name="Inhaltsplatzhalter 5">
+            <a:extLst>
+              <a:ext uri="{FF2B5EF4-FFF2-40B4-BE49-F238E27FC236}">
+                <a16:creationId xmlns:a16="http://schemas.microsoft.com/office/drawing/2014/main" id="{402E6085-D2F0-6C89-5A8B-49530E82462E}"/>
+              </a:ext>
+            </a:extLst>
+          </p:cNvPr>
+          <p:cNvGraphicFramePr>
+            <a:graphicFrameLocks noGrp="1"/>
+          </p:cNvGraphicFramePr>
+          <p:nvPr>
+            <p:ph idx="1"/>
+            <p:extLst>
+              <p:ext uri="{D42A27DB-BD31-4B8C-83A1-F6EECF244321}">
+                <p14:modId xmlns:p14="http://schemas.microsoft.com/office/powerpoint/2010/main" val="2252931701"/>
+              </p:ext>
+            </p:extLst>
+          </p:nvPr>
+        </p:nvGraphicFramePr>
+        <p:xfrm>
+          <a:off x="838200" y="1825625"/>
+          <a:ext cx="10515597" cy="2595880"/>
+        </p:xfrm>
+        <a:graphic>
+          <a:graphicData uri="http://schemas.openxmlformats.org/drawingml/2006/table">
+            <a:tbl>
+              <a:tblPr firstRow="1" bandRow="1">
+                <a:tableStyleId>{5C22544A-7EE6-4342-B048-85BDC9FD1C3A}</a:tableStyleId>
+              </a:tblPr>
+              <a:tblGrid>
+                <a:gridCol w="1668517">
+                  <a:extLst>
+                    <a:ext uri="{9D8B030D-6E8A-4147-A177-3AD203B41FA5}">
+                      <a16:colId xmlns:a16="http://schemas.microsoft.com/office/drawing/2014/main" val="1625432407"/>
+                    </a:ext>
+                  </a:extLst>
+                </a:gridCol>
+                <a:gridCol w="2309649">
+                  <a:extLst>
+                    <a:ext uri="{9D8B030D-6E8A-4147-A177-3AD203B41FA5}">
+                      <a16:colId xmlns:a16="http://schemas.microsoft.com/office/drawing/2014/main" val="2116451947"/>
+                    </a:ext>
+                  </a:extLst>
+                </a:gridCol>
+                <a:gridCol w="6537431">
+                  <a:extLst>
+                    <a:ext uri="{9D8B030D-6E8A-4147-A177-3AD203B41FA5}">
+                      <a16:colId xmlns:a16="http://schemas.microsoft.com/office/drawing/2014/main" val="3062158426"/>
+                    </a:ext>
+                  </a:extLst>
+                </a:gridCol>
+              </a:tblGrid>
+              <a:tr h="370840">
+                <a:tc>
+                  <a:txBody>
+                    <a:bodyPr/>
+                    <a:lstStyle/>
+                    <a:p>
+                      <a:r>
+                        <a:rPr lang="en-US" dirty="0"/>
+                        <a:t>week</a:t>
+                      </a:r>
+                      <a:endParaRPr lang="de-DE" dirty="0"/>
+                    </a:p>
+                  </a:txBody>
+                  <a:tcPr/>
+                </a:tc>
+                <a:tc>
+                  <a:txBody>
+                    <a:bodyPr/>
+                    <a:lstStyle/>
+                    <a:p>
+                      <a:r>
+                        <a:rPr lang="en-US" dirty="0"/>
+                        <a:t>date</a:t>
+                      </a:r>
+                      <a:endParaRPr lang="de-DE" dirty="0"/>
+                    </a:p>
+                  </a:txBody>
+                  <a:tcPr/>
+                </a:tc>
+                <a:tc>
+                  <a:txBody>
+                    <a:bodyPr/>
+                    <a:lstStyle/>
+                    <a:p>
+                      <a:r>
+                        <a:rPr lang="en-US" dirty="0"/>
+                        <a:t>topic</a:t>
+                      </a:r>
+                      <a:endParaRPr lang="de-DE" dirty="0"/>
+                    </a:p>
+                  </a:txBody>
+                  <a:tcPr/>
+                </a:tc>
+                <a:extLst>
+                  <a:ext uri="{0D108BD9-81ED-4DB2-BD59-A6C34878D82A}">
+                    <a16:rowId xmlns:a16="http://schemas.microsoft.com/office/drawing/2014/main" val="3806329829"/>
+                  </a:ext>
+                </a:extLst>
+              </a:tr>
+              <a:tr h="370840">
+                <a:tc>
+                  <a:txBody>
+                    <a:bodyPr/>
+                    <a:lstStyle/>
+                    <a:p>
+                      <a:r>
+                        <a:rPr lang="en-US" dirty="0"/>
+                        <a:t>4</a:t>
+                      </a:r>
+                      <a:endParaRPr lang="de-DE" dirty="0"/>
+                    </a:p>
+                  </a:txBody>
+                  <a:tcPr/>
+                </a:tc>
+                <a:tc>
+                  <a:txBody>
+                    <a:bodyPr/>
+                    <a:lstStyle/>
+                    <a:p>
+                      <a:r>
+                        <a:rPr lang="en-US" dirty="0"/>
+                        <a:t>17.04.2026</a:t>
+                      </a:r>
+                      <a:endParaRPr lang="de-DE" dirty="0"/>
+                    </a:p>
+                  </a:txBody>
+                  <a:tcPr/>
+                </a:tc>
+                <a:tc>
+                  <a:txBody>
+                    <a:bodyPr/>
+                    <a:lstStyle/>
+                    <a:p>
+                      <a:r>
+                        <a:rPr lang="en-US" dirty="0"/>
+                        <a:t>deadline of exam registration via QIS</a:t>
+                      </a:r>
+                      <a:endParaRPr lang="de-DE" dirty="0"/>
+                    </a:p>
+                  </a:txBody>
+                  <a:tcPr/>
+                </a:tc>
+                <a:extLst>
+                  <a:ext uri="{0D108BD9-81ED-4DB2-BD59-A6C34878D82A}">
+                    <a16:rowId xmlns:a16="http://schemas.microsoft.com/office/drawing/2014/main" val="3593473387"/>
+                  </a:ext>
+                </a:extLst>
+              </a:tr>
+              <a:tr h="370840">
+                <a:tc>
+                  <a:txBody>
+                    <a:bodyPr/>
+                    <a:lstStyle/>
+                    <a:p>
+                      <a:r>
+                        <a:rPr lang="en-US" dirty="0"/>
+                        <a:t>5</a:t>
+                      </a:r>
+                      <a:endParaRPr lang="de-DE" dirty="0"/>
+                    </a:p>
+                  </a:txBody>
+                  <a:tcPr/>
+                </a:tc>
+                <a:tc>
+                  <a:txBody>
+                    <a:bodyPr/>
+                    <a:lstStyle/>
+                    <a:p>
+                      <a:r>
+                        <a:rPr lang="en-US" dirty="0"/>
+                        <a:t>20.-24.04.2026</a:t>
+                      </a:r>
+                      <a:endParaRPr lang="de-DE" dirty="0"/>
+                    </a:p>
+                  </a:txBody>
+                  <a:tcPr/>
+                </a:tc>
+                <a:tc>
+                  <a:txBody>
+                    <a:bodyPr/>
+                    <a:lstStyle/>
+                    <a:p>
+                      <a:r>
+                        <a:rPr lang="en-US" dirty="0"/>
+                        <a:t>announcement of assignments, groups &amp; presentation dates</a:t>
+                      </a:r>
+                      <a:endParaRPr lang="de-DE" dirty="0"/>
+                    </a:p>
+                  </a:txBody>
+                  <a:tcPr/>
+                </a:tc>
+                <a:extLst>
+                  <a:ext uri="{0D108BD9-81ED-4DB2-BD59-A6C34878D82A}">
+                    <a16:rowId xmlns:a16="http://schemas.microsoft.com/office/drawing/2014/main" val="4030441038"/>
+                  </a:ext>
+                </a:extLst>
+              </a:tr>
+              <a:tr h="370840">
+                <a:tc>
+                  <a:txBody>
+                    <a:bodyPr/>
+                    <a:lstStyle/>
+                    <a:p>
+                      <a:r>
+                        <a:rPr lang="en-US" dirty="0"/>
+                        <a:t>8</a:t>
+                      </a:r>
+                      <a:endParaRPr lang="de-DE" dirty="0"/>
+                    </a:p>
+                  </a:txBody>
+                  <a:tcPr/>
+                </a:tc>
+                <a:tc>
+                  <a:txBody>
+                    <a:bodyPr/>
+                    <a:lstStyle/>
+                    <a:p>
+                      <a:r>
+                        <a:rPr lang="en-US" dirty="0"/>
+                        <a:t>11.-15.05.2026</a:t>
+                      </a:r>
+                      <a:endParaRPr lang="de-DE" dirty="0"/>
+                    </a:p>
+                  </a:txBody>
+                  <a:tcPr/>
+                </a:tc>
+                <a:tc>
+                  <a:txBody>
+                    <a:bodyPr/>
+                    <a:lstStyle/>
+                    <a:p>
+                      <a:r>
+                        <a:rPr lang="en-US" dirty="0"/>
+                        <a:t>no lectures for final preparation of assignment 1</a:t>
+                      </a:r>
+                      <a:endParaRPr lang="de-DE" dirty="0"/>
+                    </a:p>
+                  </a:txBody>
+                  <a:tcPr/>
+                </a:tc>
+                <a:extLst>
+                  <a:ext uri="{0D108BD9-81ED-4DB2-BD59-A6C34878D82A}">
+                    <a16:rowId xmlns:a16="http://schemas.microsoft.com/office/drawing/2014/main" val="2162498138"/>
+                  </a:ext>
+                </a:extLst>
+              </a:tr>
+              <a:tr h="370840">
+                <a:tc>
+                  <a:txBody>
+                    <a:bodyPr/>
+                    <a:lstStyle/>
+                    <a:p>
+                      <a:r>
+                        <a:rPr lang="en-US" dirty="0"/>
+                        <a:t>9</a:t>
+                      </a:r>
+                      <a:endParaRPr lang="de-DE" dirty="0"/>
+                    </a:p>
+                  </a:txBody>
+                  <a:tcPr/>
+                </a:tc>
+                <a:tc>
+                  <a:txBody>
+                    <a:bodyPr/>
+                    <a:lstStyle/>
+                    <a:p>
+                      <a:r>
+                        <a:rPr lang="en-US" dirty="0"/>
+                        <a:t>18.-22.05.2026</a:t>
+                      </a:r>
+                      <a:endParaRPr lang="de-DE" dirty="0"/>
+                    </a:p>
+                  </a:txBody>
+                  <a:tcPr/>
+                </a:tc>
+                <a:tc>
+                  <a:txBody>
+                    <a:bodyPr/>
+                    <a:lstStyle/>
+                    <a:p>
+                      <a:r>
+                        <a:rPr lang="en-US" dirty="0"/>
+                        <a:t>assignment 1 (5 blocks including Friday (22.05.) block 4 and 5)</a:t>
+                      </a:r>
+                      <a:endParaRPr lang="de-DE" dirty="0"/>
+                    </a:p>
+                  </a:txBody>
+                  <a:tcPr/>
+                </a:tc>
+                <a:extLst>
+                  <a:ext uri="{0D108BD9-81ED-4DB2-BD59-A6C34878D82A}">
+                    <a16:rowId xmlns:a16="http://schemas.microsoft.com/office/drawing/2014/main" val="3379262404"/>
+                  </a:ext>
+                </a:extLst>
+              </a:tr>
+              <a:tr h="370840">
+                <a:tc>
+                  <a:txBody>
+                    <a:bodyPr/>
+                    <a:lstStyle/>
+                    <a:p>
+                      <a:r>
+                        <a:rPr lang="en-US" dirty="0"/>
+                        <a:t>13</a:t>
+                      </a:r>
+                      <a:endParaRPr lang="de-DE" dirty="0"/>
+                    </a:p>
+                  </a:txBody>
+                  <a:tcPr/>
+                </a:tc>
+                <a:tc>
+                  <a:txBody>
+                    <a:bodyPr/>
+                    <a:lstStyle/>
+                    <a:p>
+                      <a:r>
+                        <a:rPr lang="en-US" dirty="0"/>
+                        <a:t>15.-19.06.2026</a:t>
+                      </a:r>
+                      <a:endParaRPr lang="de-DE" dirty="0"/>
+                    </a:p>
+                  </a:txBody>
+                  <a:tcPr/>
+                </a:tc>
+                <a:tc>
+                  <a:txBody>
+                    <a:bodyPr/>
+                    <a:lstStyle/>
+                    <a:p>
+                      <a:pPr marL="0" marR="0" lvl="0" indent="0" algn="l" defTabSz="914400" rtl="0" eaLnBrk="1" fontAlgn="auto" latinLnBrk="0" hangingPunct="1">
+                        <a:lnSpc>
+                          <a:spcPct val="100000"/>
+                        </a:lnSpc>
+                        <a:spcBef>
+                          <a:spcPts val="0"/>
+                        </a:spcBef>
+                        <a:spcAft>
+                          <a:spcPts val="0"/>
+                        </a:spcAft>
+                        <a:buClrTx/>
+                        <a:buSzTx/>
+                        <a:buFontTx/>
+                        <a:buNone/>
+                        <a:tabLst/>
+                        <a:defRPr/>
+                      </a:pPr>
+                      <a:r>
+                        <a:rPr lang="en-US" dirty="0"/>
+                        <a:t>no lectures for final preparation of assignment 2</a:t>
+                      </a:r>
+                      <a:endParaRPr lang="de-DE" dirty="0"/>
+                    </a:p>
+                  </a:txBody>
+                  <a:tcPr/>
+                </a:tc>
+                <a:extLst>
+                  <a:ext uri="{0D108BD9-81ED-4DB2-BD59-A6C34878D82A}">
+                    <a16:rowId xmlns:a16="http://schemas.microsoft.com/office/drawing/2014/main" val="1879679713"/>
+                  </a:ext>
+                </a:extLst>
+              </a:tr>
+              <a:tr h="370840">
+                <a:tc>
+                  <a:txBody>
+                    <a:bodyPr/>
+                    <a:lstStyle/>
+                    <a:p>
+                      <a:r>
+                        <a:rPr lang="en-US" dirty="0"/>
+                        <a:t>14</a:t>
+                      </a:r>
+                      <a:endParaRPr lang="de-DE" dirty="0"/>
+                    </a:p>
+                  </a:txBody>
+                  <a:tcPr/>
+                </a:tc>
+                <a:tc>
+                  <a:txBody>
+                    <a:bodyPr/>
+                    <a:lstStyle/>
+                    <a:p>
+                      <a:r>
+                        <a:rPr lang="en-US" dirty="0"/>
+                        <a:t>22.-26.06.2026</a:t>
+                      </a:r>
+                      <a:endParaRPr lang="de-DE" dirty="0"/>
+                    </a:p>
+                  </a:txBody>
+                  <a:tcPr/>
+                </a:tc>
+                <a:tc>
+                  <a:txBody>
+                    <a:bodyPr/>
+                    <a:lstStyle/>
+                    <a:p>
+                      <a:pPr marL="0" marR="0" lvl="0" indent="0" algn="l" defTabSz="914400" rtl="0" eaLnBrk="1" fontAlgn="auto" latinLnBrk="0" hangingPunct="1">
+                        <a:lnSpc>
+                          <a:spcPct val="100000"/>
+                        </a:lnSpc>
+                        <a:spcBef>
+                          <a:spcPts val="0"/>
+                        </a:spcBef>
+                        <a:spcAft>
+                          <a:spcPts val="0"/>
+                        </a:spcAft>
+                        <a:buClrTx/>
+                        <a:buSzTx/>
+                        <a:buFontTx/>
+                        <a:buNone/>
+                        <a:tabLst/>
+                        <a:defRPr/>
+                      </a:pPr>
+                      <a:r>
+                        <a:rPr lang="en-US" dirty="0"/>
+                        <a:t>assignment 2 (5 blocks including Friday (26.06.) block 4 and 5)</a:t>
+                      </a:r>
+                      <a:endParaRPr lang="de-DE" dirty="0"/>
+                    </a:p>
+                  </a:txBody>
+                  <a:tcPr/>
+                </a:tc>
+                <a:extLst>
+                  <a:ext uri="{0D108BD9-81ED-4DB2-BD59-A6C34878D82A}">
+                    <a16:rowId xmlns:a16="http://schemas.microsoft.com/office/drawing/2014/main" val="3448091922"/>
+                  </a:ext>
+                </a:extLst>
+              </a:tr>
+            </a:tbl>
+          </a:graphicData>
+        </a:graphic>
+      </p:graphicFrame>
+      <p:sp>
+        <p:nvSpPr>
+          <p:cNvPr id="4" name="Slide Number Placeholder 3">
+            <a:extLst>
+              <a:ext uri="{FF2B5EF4-FFF2-40B4-BE49-F238E27FC236}">
+                <a16:creationId xmlns:a16="http://schemas.microsoft.com/office/drawing/2014/main" id="{841A8E4E-B65A-9F65-A488-C177AA8CEA5E}"/>
+              </a:ext>
+            </a:extLst>
+          </p:cNvPr>
+          <p:cNvSpPr>
+            <a:spLocks noGrp="1"/>
+          </p:cNvSpPr>
+          <p:nvPr>
+            <p:ph type="sldNum" sz="quarter" idx="12"/>
+          </p:nvPr>
+        </p:nvSpPr>
+        <p:spPr/>
+        <p:txBody>
+          <a:bodyPr/>
+          <a:lstStyle/>
+          <a:p>
+            <a:fld id="{A3F33A53-1B14-4784-A6BE-2DB6D72C8D95}" type="slidenum">
+              <a:rPr lang="en-GB" smtClean="0"/>
+              <a:t>13</a:t>
+            </a:fld>
+            <a:endParaRPr lang="en-GB"/>
+          </a:p>
+        </p:txBody>
+      </p:sp>
+    </p:spTree>
+    <p:extLst>
+      <p:ext uri="{BB962C8B-B14F-4D97-AF65-F5344CB8AC3E}">
+        <p14:creationId xmlns:p14="http://schemas.microsoft.com/office/powerpoint/2010/main" val="1293552580"/>
       </p:ext>
     </p:extLst>
   </p:cSld>

--- a/slides/0_intro.pptx
+++ b/slides/0_intro.pptx
@@ -491,7 +491,7 @@
           <a:p>
             <a:fld id="{506E0FD1-891F-4B1E-916D-E9B585160BB8}" type="datetimeFigureOut">
               <a:rPr lang="en-GB" smtClean="0"/>
-              <a:t>22/03/2026</a:t>
+              <a:t>23/03/2026</a:t>
             </a:fld>
             <a:endParaRPr lang="en-GB"/>
           </a:p>
@@ -908,7 +908,7 @@
           <a:p>
             <a:fld id="{D68C3F22-27B2-44E3-9C5F-D08126455F6F}" type="datetime1">
               <a:rPr lang="en-GB" smtClean="0"/>
-              <a:t>22/03/2026</a:t>
+              <a:t>23/03/2026</a:t>
             </a:fld>
             <a:endParaRPr lang="en-GB"/>
           </a:p>
@@ -1108,7 +1108,7 @@
           <a:p>
             <a:fld id="{1CD03846-7BF6-4FB6-A921-FF3379ADBD4C}" type="datetime1">
               <a:rPr lang="en-GB" smtClean="0"/>
-              <a:t>22/03/2026</a:t>
+              <a:t>23/03/2026</a:t>
             </a:fld>
             <a:endParaRPr lang="en-GB"/>
           </a:p>
@@ -1318,7 +1318,7 @@
           <a:p>
             <a:fld id="{99E1B91A-3FD0-4144-9C84-63E9688ED2FE}" type="datetime1">
               <a:rPr lang="en-GB" smtClean="0"/>
-              <a:t>22/03/2026</a:t>
+              <a:t>23/03/2026</a:t>
             </a:fld>
             <a:endParaRPr lang="en-GB"/>
           </a:p>
@@ -1518,7 +1518,7 @@
           <a:p>
             <a:fld id="{5295ED7B-FEAD-4734-819F-93EF4B0EA908}" type="datetime1">
               <a:rPr lang="en-GB" smtClean="0"/>
-              <a:t>22/03/2026</a:t>
+              <a:t>23/03/2026</a:t>
             </a:fld>
             <a:endParaRPr lang="en-GB"/>
           </a:p>
@@ -1794,7 +1794,7 @@
           <a:p>
             <a:fld id="{D2D5D4B4-C926-4B45-8815-1ED8911179A2}" type="datetime1">
               <a:rPr lang="en-GB" smtClean="0"/>
-              <a:t>22/03/2026</a:t>
+              <a:t>23/03/2026</a:t>
             </a:fld>
             <a:endParaRPr lang="en-GB"/>
           </a:p>
@@ -2062,7 +2062,7 @@
           <a:p>
             <a:fld id="{B4C5210A-0E37-4935-93AF-69F21A5F712F}" type="datetime1">
               <a:rPr lang="en-GB" smtClean="0"/>
-              <a:t>22/03/2026</a:t>
+              <a:t>23/03/2026</a:t>
             </a:fld>
             <a:endParaRPr lang="en-GB"/>
           </a:p>
@@ -2477,7 +2477,7 @@
           <a:p>
             <a:fld id="{3D3A6B2F-436C-4691-80E8-9C890E000E9D}" type="datetime1">
               <a:rPr lang="en-GB" smtClean="0"/>
-              <a:t>22/03/2026</a:t>
+              <a:t>23/03/2026</a:t>
             </a:fld>
             <a:endParaRPr lang="en-GB"/>
           </a:p>
@@ -2619,7 +2619,7 @@
           <a:p>
             <a:fld id="{84385F4C-D74B-496F-8D21-97E3549C783B}" type="datetime1">
               <a:rPr lang="en-GB" smtClean="0"/>
-              <a:t>22/03/2026</a:t>
+              <a:t>23/03/2026</a:t>
             </a:fld>
             <a:endParaRPr lang="en-GB"/>
           </a:p>
@@ -2732,7 +2732,7 @@
           <a:p>
             <a:fld id="{0CBDCB32-C241-4703-A832-4EB47BD54E83}" type="datetime1">
               <a:rPr lang="en-GB" smtClean="0"/>
-              <a:t>22/03/2026</a:t>
+              <a:t>23/03/2026</a:t>
             </a:fld>
             <a:endParaRPr lang="en-GB"/>
           </a:p>
@@ -3045,7 +3045,7 @@
           <a:p>
             <a:fld id="{85C150FF-BE95-4D25-A16A-E368A81CBF24}" type="datetime1">
               <a:rPr lang="en-GB" smtClean="0"/>
-              <a:t>22/03/2026</a:t>
+              <a:t>23/03/2026</a:t>
             </a:fld>
             <a:endParaRPr lang="en-GB"/>
           </a:p>
@@ -3334,7 +3334,7 @@
           <a:p>
             <a:fld id="{F3C5DB4B-B349-43C9-A424-BADA723AD9F1}" type="datetime1">
               <a:rPr lang="en-GB" smtClean="0"/>
-              <a:t>22/03/2026</a:t>
+              <a:t>23/03/2026</a:t>
             </a:fld>
             <a:endParaRPr lang="en-GB"/>
           </a:p>
@@ -3577,7 +3577,7 @@
           <a:p>
             <a:fld id="{12632426-0A0C-405F-A3D0-2D11AA44702A}" type="datetime1">
               <a:rPr lang="en-GB" smtClean="0"/>
-              <a:t>22/03/2026</a:t>
+              <a:t>23/03/2026</a:t>
             </a:fld>
             <a:endParaRPr lang="en-GB"/>
           </a:p>
@@ -4582,7 +4582,23 @@
             <a:pPr lvl="1"/>
             <a:r>
               <a:rPr lang="en-GB" dirty="0"/>
-              <a:t>presentation (25-30 min) + oral discussion (15 min)</a:t>
+              <a:t>presentation </a:t>
+            </a:r>
+            <a:r>
+              <a:rPr lang="en-GB"/>
+              <a:t>(20-30 </a:t>
+            </a:r>
+            <a:r>
+              <a:rPr lang="en-GB" dirty="0"/>
+              <a:t>min) + oral discussion </a:t>
+            </a:r>
+            <a:r>
+              <a:rPr lang="en-GB"/>
+              <a:t>(10-20 </a:t>
+            </a:r>
+            <a:r>
+              <a:rPr lang="en-GB" dirty="0"/>
+              <a:t>min)</a:t>
             </a:r>
           </a:p>
         </p:txBody>

--- a/slides/0_intro.pptx
+++ b/slides/0_intro.pptx
@@ -491,7 +491,7 @@
           <a:p>
             <a:fld id="{506E0FD1-891F-4B1E-916D-E9B585160BB8}" type="datetimeFigureOut">
               <a:rPr lang="en-GB" smtClean="0"/>
-              <a:t>23/03/2026</a:t>
+              <a:t>17/04/2026</a:t>
             </a:fld>
             <a:endParaRPr lang="en-GB"/>
           </a:p>
@@ -908,7 +908,7 @@
           <a:p>
             <a:fld id="{D68C3F22-27B2-44E3-9C5F-D08126455F6F}" type="datetime1">
               <a:rPr lang="en-GB" smtClean="0"/>
-              <a:t>23/03/2026</a:t>
+              <a:t>17/04/2026</a:t>
             </a:fld>
             <a:endParaRPr lang="en-GB"/>
           </a:p>
@@ -1108,7 +1108,7 @@
           <a:p>
             <a:fld id="{1CD03846-7BF6-4FB6-A921-FF3379ADBD4C}" type="datetime1">
               <a:rPr lang="en-GB" smtClean="0"/>
-              <a:t>23/03/2026</a:t>
+              <a:t>17/04/2026</a:t>
             </a:fld>
             <a:endParaRPr lang="en-GB"/>
           </a:p>
@@ -1318,7 +1318,7 @@
           <a:p>
             <a:fld id="{99E1B91A-3FD0-4144-9C84-63E9688ED2FE}" type="datetime1">
               <a:rPr lang="en-GB" smtClean="0"/>
-              <a:t>23/03/2026</a:t>
+              <a:t>17/04/2026</a:t>
             </a:fld>
             <a:endParaRPr lang="en-GB"/>
           </a:p>
@@ -1518,7 +1518,7 @@
           <a:p>
             <a:fld id="{5295ED7B-FEAD-4734-819F-93EF4B0EA908}" type="datetime1">
               <a:rPr lang="en-GB" smtClean="0"/>
-              <a:t>23/03/2026</a:t>
+              <a:t>17/04/2026</a:t>
             </a:fld>
             <a:endParaRPr lang="en-GB"/>
           </a:p>
@@ -1794,7 +1794,7 @@
           <a:p>
             <a:fld id="{D2D5D4B4-C926-4B45-8815-1ED8911179A2}" type="datetime1">
               <a:rPr lang="en-GB" smtClean="0"/>
-              <a:t>23/03/2026</a:t>
+              <a:t>17/04/2026</a:t>
             </a:fld>
             <a:endParaRPr lang="en-GB"/>
           </a:p>
@@ -2062,7 +2062,7 @@
           <a:p>
             <a:fld id="{B4C5210A-0E37-4935-93AF-69F21A5F712F}" type="datetime1">
               <a:rPr lang="en-GB" smtClean="0"/>
-              <a:t>23/03/2026</a:t>
+              <a:t>17/04/2026</a:t>
             </a:fld>
             <a:endParaRPr lang="en-GB"/>
           </a:p>
@@ -2477,7 +2477,7 @@
           <a:p>
             <a:fld id="{3D3A6B2F-436C-4691-80E8-9C890E000E9D}" type="datetime1">
               <a:rPr lang="en-GB" smtClean="0"/>
-              <a:t>23/03/2026</a:t>
+              <a:t>17/04/2026</a:t>
             </a:fld>
             <a:endParaRPr lang="en-GB"/>
           </a:p>
@@ -2619,7 +2619,7 @@
           <a:p>
             <a:fld id="{84385F4C-D74B-496F-8D21-97E3549C783B}" type="datetime1">
               <a:rPr lang="en-GB" smtClean="0"/>
-              <a:t>23/03/2026</a:t>
+              <a:t>17/04/2026</a:t>
             </a:fld>
             <a:endParaRPr lang="en-GB"/>
           </a:p>
@@ -2732,7 +2732,7 @@
           <a:p>
             <a:fld id="{0CBDCB32-C241-4703-A832-4EB47BD54E83}" type="datetime1">
               <a:rPr lang="en-GB" smtClean="0"/>
-              <a:t>23/03/2026</a:t>
+              <a:t>17/04/2026</a:t>
             </a:fld>
             <a:endParaRPr lang="en-GB"/>
           </a:p>
@@ -3045,7 +3045,7 @@
           <a:p>
             <a:fld id="{85C150FF-BE95-4D25-A16A-E368A81CBF24}" type="datetime1">
               <a:rPr lang="en-GB" smtClean="0"/>
-              <a:t>23/03/2026</a:t>
+              <a:t>17/04/2026</a:t>
             </a:fld>
             <a:endParaRPr lang="en-GB"/>
           </a:p>
@@ -3334,7 +3334,7 @@
           <a:p>
             <a:fld id="{F3C5DB4B-B349-43C9-A424-BADA723AD9F1}" type="datetime1">
               <a:rPr lang="en-GB" smtClean="0"/>
-              <a:t>23/03/2026</a:t>
+              <a:t>17/04/2026</a:t>
             </a:fld>
             <a:endParaRPr lang="en-GB"/>
           </a:p>
@@ -3577,7 +3577,7 @@
           <a:p>
             <a:fld id="{12632426-0A0C-405F-A3D0-2D11AA44702A}" type="datetime1">
               <a:rPr lang="en-GB" smtClean="0"/>
-              <a:t>23/03/2026</a:t>
+              <a:t>17/04/2026</a:t>
             </a:fld>
             <a:endParaRPr lang="en-GB"/>
           </a:p>
@@ -5306,11 +5306,11 @@
             </a:pPr>
             <a:r>
               <a:rPr lang="de-DE" dirty="0"/>
-              <a:t>Statistical </a:t>
+              <a:t>Parameter </a:t>
             </a:r>
             <a:r>
               <a:rPr lang="de-DE" dirty="0" err="1"/>
-              <a:t>Inference</a:t>
+              <a:t>Estimation</a:t>
             </a:r>
             <a:endParaRPr lang="de-DE" dirty="0"/>
           </a:p>
@@ -5328,7 +5328,7 @@
             </a:pPr>
             <a:r>
               <a:rPr lang="de-DE" dirty="0" err="1"/>
-              <a:t>Machine</a:t>
+              <a:t>Supervised</a:t>
             </a:r>
             <a:r>
               <a:rPr lang="de-DE" dirty="0"/>
